--- a/LG_부트캠프_12기_C반_프로젝트일정_및_최종제출결과물_3팀/LG_부트캠프_12기_C반_최종결과물(3팀)/결과보고서/4.LG_부트캠프_12기_C반_결과보고서(3팀)_v1.pptx
+++ b/LG_부트캠프_12기_C반_프로젝트일정_및_최종제출결과물_3팀/LG_부트캠프_12기_C반_최종결과물(3팀)/결과보고서/4.LG_부트캠프_12기_C반_결과보고서(3팀)_v1.pptx
@@ -10445,17 +10445,7 @@
                 <a:latin typeface="LG스마트체2.0 Regular" panose="020B0600000101010101" pitchFamily="50" charset="-127"/>
                 <a:ea typeface="LG스마트체2.0 Regular" panose="020B0600000101010101" pitchFamily="50" charset="-127"/>
               </a:rPr>
-              <a:t>(</a:t>
-            </a:r>
-            <a:r>
-              <a:rPr lang="en-US" altLang="ko-KR" sz="5400" b="1" smtClean="0">
-                <a:solidFill>
-                  <a:schemeClr val="bg1"/>
-                </a:solidFill>
-                <a:latin typeface="LG스마트체2.0 Regular" panose="020B0600000101010101" pitchFamily="50" charset="-127"/>
-                <a:ea typeface="LG스마트체2.0 Regular" panose="020B0600000101010101" pitchFamily="50" charset="-127"/>
-              </a:rPr>
-              <a:t>260420)</a:t>
+              <a:t>(260420)</a:t>
             </a:r>
             <a:endParaRPr lang="ko-KR" altLang="en-US" sz="5400" b="1" dirty="0">
               <a:solidFill>
@@ -10526,7 +10516,23 @@
                   <a:schemeClr val="tx1"/>
                 </a:solidFill>
               </a:rPr>
-              <a:t>월 팀별 영상 제작</a:t>
+              <a:t>월 </a:t>
+            </a:r>
+            <a:r>
+              <a:rPr lang="ko-KR" altLang="en-US" b="1" smtClean="0">
+                <a:solidFill>
+                  <a:schemeClr val="tx1"/>
+                </a:solidFill>
+              </a:rPr>
+              <a:t>오후 한시반 팀별 </a:t>
+            </a:r>
+            <a:r>
+              <a:rPr lang="ko-KR" altLang="en-US" b="1" smtClean="0">
+                <a:solidFill>
+                  <a:schemeClr val="tx1"/>
+                </a:solidFill>
+              </a:rPr>
+              <a:t>영상 제작</a:t>
             </a:r>
             <a:endParaRPr lang="en-US" altLang="ko-KR" b="1" dirty="0" smtClean="0">
               <a:solidFill>

--- a/LG_부트캠프_12기_C반_프로젝트일정_및_최종제출결과물_3팀/LG_부트캠프_12기_C반_최종결과물(3팀)/결과보고서/4.LG_부트캠프_12기_C반_결과보고서(3팀)_v1.pptx
+++ b/LG_부트캠프_12기_C반_프로젝트일정_및_최종제출결과물_3팀/LG_부트캠프_12기_C반_최종결과물(3팀)/결과보고서/4.LG_부트캠프_12기_C반_결과보고서(3팀)_v1.pptx
@@ -5,30 +5,24 @@
     <p:sldMasterId id="2147483648" r:id="rId1"/>
   </p:sldMasterIdLst>
   <p:notesMasterIdLst>
-    <p:notesMasterId r:id="rId23"/>
+    <p:notesMasterId r:id="rId17"/>
   </p:notesMasterIdLst>
   <p:sldIdLst>
     <p:sldId id="257" r:id="rId2"/>
     <p:sldId id="258" r:id="rId3"/>
-    <p:sldId id="259" r:id="rId4"/>
-    <p:sldId id="266" r:id="rId5"/>
-    <p:sldId id="267" r:id="rId6"/>
-    <p:sldId id="277" r:id="rId7"/>
-    <p:sldId id="278" r:id="rId8"/>
-    <p:sldId id="269" r:id="rId9"/>
-    <p:sldId id="271" r:id="rId10"/>
-    <p:sldId id="272" r:id="rId11"/>
-    <p:sldId id="274" r:id="rId12"/>
-    <p:sldId id="275" r:id="rId13"/>
-    <p:sldId id="276" r:id="rId14"/>
-    <p:sldId id="270" r:id="rId15"/>
-    <p:sldId id="273" r:id="rId16"/>
-    <p:sldId id="268" r:id="rId17"/>
-    <p:sldId id="260" r:id="rId18"/>
-    <p:sldId id="261" r:id="rId19"/>
-    <p:sldId id="262" r:id="rId20"/>
-    <p:sldId id="263" r:id="rId21"/>
-    <p:sldId id="264" r:id="rId22"/>
+    <p:sldId id="269" r:id="rId4"/>
+    <p:sldId id="271" r:id="rId5"/>
+    <p:sldId id="272" r:id="rId6"/>
+    <p:sldId id="274" r:id="rId7"/>
+    <p:sldId id="275" r:id="rId8"/>
+    <p:sldId id="276" r:id="rId9"/>
+    <p:sldId id="270" r:id="rId10"/>
+    <p:sldId id="273" r:id="rId11"/>
+    <p:sldId id="259" r:id="rId12"/>
+    <p:sldId id="266" r:id="rId13"/>
+    <p:sldId id="267" r:id="rId14"/>
+    <p:sldId id="277" r:id="rId15"/>
+    <p:sldId id="278" r:id="rId16"/>
   </p:sldIdLst>
   <p:sldSz cx="17556163" cy="9875838"/>
   <p:notesSz cx="9875838" cy="17556163"/>
@@ -1136,15 +1130,22 @@
           <a:lstStyle/>
           <a:p>
             <a:r>
-              <a:rPr lang="ko-KR" altLang="en-US" sz="5400" b="1" dirty="0">
+              <a:rPr lang="ko-KR" altLang="en-US" sz="5400" b="1" dirty="0" err="1" smtClean="0">
                 <a:solidFill>
                   <a:schemeClr val="bg1"/>
                 </a:solidFill>
                 <a:latin typeface="LG스마트체2.0 Regular" panose="020B0600000101010101" pitchFamily="50" charset="-127"/>
                 <a:ea typeface="LG스마트체2.0 Regular" panose="020B0600000101010101" pitchFamily="50" charset="-127"/>
               </a:rPr>
-              <a:t>프로젝트 제목을 기입합니다</a:t>
-            </a:r>
+              <a:t>쿵야</a:t>
+            </a:r>
+            <a:endParaRPr lang="ko-KR" altLang="en-US" sz="5400" b="1" dirty="0">
+              <a:solidFill>
+                <a:schemeClr val="bg1"/>
+              </a:solidFill>
+              <a:latin typeface="LG스마트체2.0 Regular" panose="020B0600000101010101" pitchFamily="50" charset="-127"/>
+              <a:ea typeface="LG스마트체2.0 Regular" panose="020B0600000101010101" pitchFamily="50" charset="-127"/>
+            </a:endParaRPr>
           </a:p>
         </p:txBody>
       </p:sp>
@@ -1229,35 +1230,32 @@
           </a:p>
           <a:p>
             <a:r>
-              <a:rPr lang="ko-KR" altLang="en-US" sz="2800" b="1" dirty="0">
+              <a:rPr lang="ko-KR" altLang="en-US" sz="2800" b="1" dirty="0" err="1" smtClean="0">
                 <a:solidFill>
                   <a:schemeClr val="bg1"/>
                 </a:solidFill>
                 <a:latin typeface="LG스마트체2.0 Regular" panose="020B0600000101010101" pitchFamily="50" charset="-127"/>
                 <a:ea typeface="LG스마트체2.0 Regular" panose="020B0600000101010101" pitchFamily="50" charset="-127"/>
               </a:rPr>
-              <a:t>홍길동 </a:t>
-            </a:r>
-            <a:r>
-              <a:rPr lang="ko-KR" altLang="en-US" sz="2800" b="1" dirty="0" err="1">
+              <a:t>엄제원</a:t>
+            </a:r>
+            <a:r>
+              <a:rPr lang="ko-KR" altLang="en-US" sz="2800" b="1" dirty="0" smtClean="0">
                 <a:solidFill>
                   <a:schemeClr val="bg1"/>
                 </a:solidFill>
                 <a:latin typeface="LG스마트체2.0 Regular" panose="020B0600000101010101" pitchFamily="50" charset="-127"/>
                 <a:ea typeface="LG스마트체2.0 Regular" panose="020B0600000101010101" pitchFamily="50" charset="-127"/>
               </a:rPr>
-              <a:t>갑돌이</a:t>
-            </a:r>
-            <a:r>
-              <a:rPr lang="ko-KR" altLang="en-US" sz="2800" b="1" dirty="0">
-                <a:solidFill>
-                  <a:schemeClr val="bg1"/>
-                </a:solidFill>
-                <a:latin typeface="LG스마트체2.0 Regular" panose="020B0600000101010101" pitchFamily="50" charset="-127"/>
-                <a:ea typeface="LG스마트체2.0 Regular" panose="020B0600000101010101" pitchFamily="50" charset="-127"/>
-              </a:rPr>
-              <a:t> 돌돌이</a:t>
-            </a:r>
+              <a:t> 이경환 윤지원</a:t>
+            </a:r>
+            <a:endParaRPr lang="ko-KR" altLang="en-US" sz="2800" b="1" dirty="0">
+              <a:solidFill>
+                <a:schemeClr val="bg1"/>
+              </a:solidFill>
+              <a:latin typeface="LG스마트체2.0 Regular" panose="020B0600000101010101" pitchFamily="50" charset="-127"/>
+              <a:ea typeface="LG스마트체2.0 Regular" panose="020B0600000101010101" pitchFamily="50" charset="-127"/>
+            </a:endParaRPr>
           </a:p>
         </p:txBody>
       </p:sp>
@@ -1305,942 +1303,6 @@
 </file>
 
 <file path=ppt/slides/slide10.xml><?xml version="1.0" encoding="utf-8"?>
-<p:sld xmlns:a="http://schemas.openxmlformats.org/drawingml/2006/main" xmlns:r="http://schemas.openxmlformats.org/officeDocument/2006/relationships" xmlns:p="http://schemas.openxmlformats.org/presentationml/2006/main">
-  <p:cSld>
-    <p:spTree>
-      <p:nvGrpSpPr>
-        <p:cNvPr id="1" name=""/>
-        <p:cNvGrpSpPr/>
-        <p:nvPr/>
-      </p:nvGrpSpPr>
-      <p:grpSpPr>
-        <a:xfrm>
-          <a:off x="0" y="0"/>
-          <a:ext cx="0" cy="0"/>
-          <a:chOff x="0" y="0"/>
-          <a:chExt cx="0" cy="0"/>
-        </a:xfrm>
-      </p:grpSpPr>
-      <p:sp>
-        <p:nvSpPr>
-          <p:cNvPr id="2" name="텍스트 개체 틀 1"/>
-          <p:cNvSpPr>
-            <a:spLocks noGrp="1"/>
-          </p:cNvSpPr>
-          <p:nvPr>
-            <p:ph type="body" sz="quarter" idx="10"/>
-          </p:nvPr>
-        </p:nvSpPr>
-        <p:spPr/>
-        <p:txBody>
-          <a:bodyPr/>
-          <a:lstStyle/>
-          <a:p>
-            <a:r>
-              <a:rPr lang="ko-KR" altLang="en-US" dirty="0" smtClean="0"/>
-              <a:t>다중 클라이언트 실시간 </a:t>
-            </a:r>
-            <a:r>
-              <a:rPr lang="en-US" altLang="ko-KR" dirty="0" smtClean="0"/>
-              <a:t>UDP </a:t>
-            </a:r>
-            <a:r>
-              <a:rPr lang="ko-KR" altLang="en-US" smtClean="0"/>
-              <a:t>통신</a:t>
-            </a:r>
-            <a:endParaRPr lang="en-US" altLang="ko-KR" dirty="0" smtClean="0"/>
-          </a:p>
-          <a:p>
-            <a:r>
-              <a:rPr lang="ko-KR" altLang="en-US" dirty="0" smtClean="0"/>
-              <a:t>출제자와 참가자 화면 동기화</a:t>
-            </a:r>
-            <a:endParaRPr lang="en-US" altLang="ko-KR" dirty="0" smtClean="0"/>
-          </a:p>
-          <a:p>
-            <a:endParaRPr lang="en-US" altLang="ko-KR" dirty="0" smtClean="0"/>
-          </a:p>
-          <a:p>
-            <a:endParaRPr lang="ko-KR" altLang="en-US" dirty="0"/>
-          </a:p>
-        </p:txBody>
-      </p:sp>
-      <p:sp>
-        <p:nvSpPr>
-          <p:cNvPr id="3" name="TextBox 2"/>
-          <p:cNvSpPr txBox="1"/>
-          <p:nvPr/>
-        </p:nvSpPr>
-        <p:spPr>
-          <a:xfrm>
-            <a:off x="244862" y="238662"/>
-            <a:ext cx="14190667" cy="923330"/>
-          </a:xfrm>
-          <a:prstGeom prst="rect">
-            <a:avLst/>
-          </a:prstGeom>
-          <a:noFill/>
-        </p:spPr>
-        <p:txBody>
-          <a:bodyPr wrap="square" rtlCol="0">
-            <a:spAutoFit/>
-          </a:bodyPr>
-          <a:lstStyle/>
-          <a:p>
-            <a:r>
-              <a:rPr lang="en-US" altLang="ko-KR" sz="5400" b="1" dirty="0">
-                <a:solidFill>
-                  <a:schemeClr val="bg1"/>
-                </a:solidFill>
-                <a:latin typeface="LG스마트체2.0 Regular" panose="020B0600000101010101" pitchFamily="50" charset="-127"/>
-                <a:ea typeface="LG스마트체2.0 Regular" panose="020B0600000101010101" pitchFamily="50" charset="-127"/>
-              </a:rPr>
-              <a:t>3. </a:t>
-            </a:r>
-            <a:r>
-              <a:rPr lang="ko-KR" altLang="en-US" sz="5400" b="1" dirty="0">
-                <a:solidFill>
-                  <a:schemeClr val="bg1"/>
-                </a:solidFill>
-                <a:latin typeface="LG스마트체2.0 Regular" panose="020B0600000101010101" pitchFamily="50" charset="-127"/>
-                <a:ea typeface="LG스마트체2.0 Regular" panose="020B0600000101010101" pitchFamily="50" charset="-127"/>
-              </a:rPr>
-              <a:t>핵심 기술</a:t>
-            </a:r>
-          </a:p>
-        </p:txBody>
-      </p:sp>
-      <p:sp>
-        <p:nvSpPr>
-          <p:cNvPr id="4" name="직사각형 3"/>
-          <p:cNvSpPr/>
-          <p:nvPr/>
-        </p:nvSpPr>
-        <p:spPr>
-          <a:xfrm>
-            <a:off x="-690380" y="7570611"/>
-            <a:ext cx="11092721" cy="2188564"/>
-          </a:xfrm>
-          <a:prstGeom prst="rect">
-            <a:avLst/>
-          </a:prstGeom>
-          <a:solidFill>
-            <a:srgbClr val="FFFF00"/>
-          </a:solidFill>
-        </p:spPr>
-        <p:style>
-          <a:lnRef idx="2">
-            <a:schemeClr val="accent1">
-              <a:shade val="50000"/>
-            </a:schemeClr>
-          </a:lnRef>
-          <a:fillRef idx="1">
-            <a:schemeClr val="accent1"/>
-          </a:fillRef>
-          <a:effectRef idx="0">
-            <a:schemeClr val="accent1"/>
-          </a:effectRef>
-          <a:fontRef idx="minor">
-            <a:schemeClr val="lt1"/>
-          </a:fontRef>
-        </p:style>
-        <p:txBody>
-          <a:bodyPr rtlCol="0" anchor="ctr"/>
-          <a:lstStyle/>
-          <a:p>
-            <a:pPr marL="457200" indent="-457200">
-              <a:buFontTx/>
-              <a:buChar char="-"/>
-            </a:pPr>
-            <a:r>
-              <a:rPr lang="ko-KR" altLang="en-US" sz="3200" b="1" dirty="0">
-                <a:solidFill>
-                  <a:schemeClr val="tx1"/>
-                </a:solidFill>
-              </a:rPr>
-              <a:t>개발에 사용된 가장 핵심적으로 구현된 기술 소개</a:t>
-            </a:r>
-            <a:endParaRPr lang="en-US" altLang="ko-KR" sz="3200" b="1" dirty="0">
-              <a:solidFill>
-                <a:schemeClr val="tx1"/>
-              </a:solidFill>
-            </a:endParaRPr>
-          </a:p>
-          <a:p>
-            <a:pPr marL="457200" indent="-457200">
-              <a:buFontTx/>
-              <a:buChar char="-"/>
-            </a:pPr>
-            <a:r>
-              <a:rPr lang="ko-KR" altLang="en-US" sz="3200" b="1" dirty="0">
-                <a:solidFill>
-                  <a:schemeClr val="tx1"/>
-                </a:solidFill>
-              </a:rPr>
-              <a:t>기술 내용 또는 소스코드 등 다양한 방법으로 핵심을 소개</a:t>
-            </a:r>
-            <a:endParaRPr lang="en-US" altLang="ko-KR" sz="3200" b="1" dirty="0">
-              <a:solidFill>
-                <a:schemeClr val="tx1"/>
-              </a:solidFill>
-            </a:endParaRPr>
-          </a:p>
-          <a:p>
-            <a:pPr marL="457200" indent="-457200">
-              <a:buFontTx/>
-              <a:buChar char="-"/>
-            </a:pPr>
-            <a:r>
-              <a:rPr lang="ko-KR" altLang="en-US" sz="3200" b="1" dirty="0">
-                <a:solidFill>
-                  <a:schemeClr val="tx1"/>
-                </a:solidFill>
-              </a:rPr>
-              <a:t>페이지 수 무관</a:t>
-            </a:r>
-          </a:p>
-        </p:txBody>
-      </p:sp>
-    </p:spTree>
-    <p:extLst>
-      <p:ext uri="{BB962C8B-B14F-4D97-AF65-F5344CB8AC3E}">
-        <p14:creationId xmlns:p14="http://schemas.microsoft.com/office/powerpoint/2010/main" val="3138293880"/>
-      </p:ext>
-    </p:extLst>
-  </p:cSld>
-  <p:clrMapOvr>
-    <a:masterClrMapping/>
-  </p:clrMapOvr>
-  <p:timing>
-    <p:tnLst>
-      <p:par>
-        <p:cTn id="1" dur="indefinite" restart="never" nodeType="tmRoot"/>
-      </p:par>
-    </p:tnLst>
-  </p:timing>
-</p:sld>
-</file>
-
-<file path=ppt/slides/slide11.xml><?xml version="1.0" encoding="utf-8"?>
-<p:sld xmlns:a="http://schemas.openxmlformats.org/drawingml/2006/main" xmlns:r="http://schemas.openxmlformats.org/officeDocument/2006/relationships" xmlns:p="http://schemas.openxmlformats.org/presentationml/2006/main">
-  <p:cSld>
-    <p:spTree>
-      <p:nvGrpSpPr>
-        <p:cNvPr id="1" name=""/>
-        <p:cNvGrpSpPr/>
-        <p:nvPr/>
-      </p:nvGrpSpPr>
-      <p:grpSpPr>
-        <a:xfrm>
-          <a:off x="0" y="0"/>
-          <a:ext cx="0" cy="0"/>
-          <a:chOff x="0" y="0"/>
-          <a:chExt cx="0" cy="0"/>
-        </a:xfrm>
-      </p:grpSpPr>
-      <p:sp>
-        <p:nvSpPr>
-          <p:cNvPr id="2" name="텍스트 개체 틀 1"/>
-          <p:cNvSpPr>
-            <a:spLocks noGrp="1"/>
-          </p:cNvSpPr>
-          <p:nvPr>
-            <p:ph type="body" sz="quarter" idx="10"/>
-          </p:nvPr>
-        </p:nvSpPr>
-        <p:spPr/>
-        <p:txBody>
-          <a:bodyPr/>
-          <a:lstStyle/>
-          <a:p>
-            <a:endParaRPr lang="ko-KR" altLang="en-US"/>
-          </a:p>
-        </p:txBody>
-      </p:sp>
-      <p:sp>
-        <p:nvSpPr>
-          <p:cNvPr id="3" name="TextBox 2"/>
-          <p:cNvSpPr txBox="1"/>
-          <p:nvPr/>
-        </p:nvSpPr>
-        <p:spPr>
-          <a:xfrm>
-            <a:off x="244862" y="238662"/>
-            <a:ext cx="14190667" cy="923330"/>
-          </a:xfrm>
-          <a:prstGeom prst="rect">
-            <a:avLst/>
-          </a:prstGeom>
-          <a:noFill/>
-        </p:spPr>
-        <p:txBody>
-          <a:bodyPr wrap="square" rtlCol="0">
-            <a:spAutoFit/>
-          </a:bodyPr>
-          <a:lstStyle/>
-          <a:p>
-            <a:r>
-              <a:rPr lang="en-US" altLang="ko-KR" sz="5400" b="1" dirty="0">
-                <a:solidFill>
-                  <a:schemeClr val="bg1"/>
-                </a:solidFill>
-                <a:latin typeface="LG스마트체2.0 Regular" panose="020B0600000101010101" pitchFamily="50" charset="-127"/>
-                <a:ea typeface="LG스마트체2.0 Regular" panose="020B0600000101010101" pitchFamily="50" charset="-127"/>
-              </a:rPr>
-              <a:t>4. </a:t>
-            </a:r>
-            <a:r>
-              <a:rPr lang="ko-KR" altLang="en-US" sz="5400" b="1" dirty="0">
-                <a:solidFill>
-                  <a:schemeClr val="bg1"/>
-                </a:solidFill>
-                <a:latin typeface="LG스마트체2.0 Regular" panose="020B0600000101010101" pitchFamily="50" charset="-127"/>
-                <a:ea typeface="LG스마트체2.0 Regular" panose="020B0600000101010101" pitchFamily="50" charset="-127"/>
-              </a:rPr>
-              <a:t>결과 분석 및 기대 효과</a:t>
-            </a:r>
-          </a:p>
-        </p:txBody>
-      </p:sp>
-      <p:sp>
-        <p:nvSpPr>
-          <p:cNvPr id="4" name="직사각형 3"/>
-          <p:cNvSpPr/>
-          <p:nvPr/>
-        </p:nvSpPr>
-        <p:spPr>
-          <a:xfrm>
-            <a:off x="884420" y="2488367"/>
-            <a:ext cx="11092721" cy="2458388"/>
-          </a:xfrm>
-          <a:prstGeom prst="rect">
-            <a:avLst/>
-          </a:prstGeom>
-          <a:solidFill>
-            <a:srgbClr val="FFFF00"/>
-          </a:solidFill>
-        </p:spPr>
-        <p:style>
-          <a:lnRef idx="2">
-            <a:schemeClr val="accent1">
-              <a:shade val="50000"/>
-            </a:schemeClr>
-          </a:lnRef>
-          <a:fillRef idx="1">
-            <a:schemeClr val="accent1"/>
-          </a:fillRef>
-          <a:effectRef idx="0">
-            <a:schemeClr val="accent1"/>
-          </a:effectRef>
-          <a:fontRef idx="minor">
-            <a:schemeClr val="lt1"/>
-          </a:fontRef>
-        </p:style>
-        <p:txBody>
-          <a:bodyPr rtlCol="0" anchor="ctr"/>
-          <a:lstStyle/>
-          <a:p>
-            <a:pPr marL="457200" indent="-457200">
-              <a:buFontTx/>
-              <a:buChar char="-"/>
-            </a:pPr>
-            <a:r>
-              <a:rPr lang="ko-KR" altLang="en-US" sz="3200" b="1" dirty="0">
-                <a:solidFill>
-                  <a:schemeClr val="tx1"/>
-                </a:solidFill>
-              </a:rPr>
-              <a:t>결과물에 대한 성능측정 또는 목표달성 여부 등 평가</a:t>
-            </a:r>
-            <a:endParaRPr lang="en-US" altLang="ko-KR" sz="3200" b="1" dirty="0">
-              <a:solidFill>
-                <a:schemeClr val="tx1"/>
-              </a:solidFill>
-            </a:endParaRPr>
-          </a:p>
-          <a:p>
-            <a:pPr marL="457200" indent="-457200">
-              <a:buFontTx/>
-              <a:buChar char="-"/>
-            </a:pPr>
-            <a:r>
-              <a:rPr lang="ko-KR" altLang="en-US" sz="3200" b="1" dirty="0">
-                <a:solidFill>
-                  <a:schemeClr val="tx1"/>
-                </a:solidFill>
-              </a:rPr>
-              <a:t>성능이 낮을 경우 원인 분석 및 개선책 검토 기록</a:t>
-            </a:r>
-            <a:endParaRPr lang="en-US" altLang="ko-KR" sz="3200" b="1" dirty="0">
-              <a:solidFill>
-                <a:schemeClr val="tx1"/>
-              </a:solidFill>
-            </a:endParaRPr>
-          </a:p>
-          <a:p>
-            <a:pPr marL="457200" indent="-457200">
-              <a:buFontTx/>
-              <a:buChar char="-"/>
-            </a:pPr>
-            <a:r>
-              <a:rPr lang="ko-KR" altLang="en-US" sz="3200" b="1" dirty="0">
-                <a:solidFill>
-                  <a:schemeClr val="tx1"/>
-                </a:solidFill>
-              </a:rPr>
-              <a:t>성능이 만족했을 경우 향후 활용 가능한 기대효과 기록</a:t>
-            </a:r>
-            <a:endParaRPr lang="en-US" altLang="ko-KR" sz="3200" b="1" dirty="0">
-              <a:solidFill>
-                <a:schemeClr val="tx1"/>
-              </a:solidFill>
-            </a:endParaRPr>
-          </a:p>
-          <a:p>
-            <a:pPr marL="457200" indent="-457200">
-              <a:buFontTx/>
-              <a:buChar char="-"/>
-            </a:pPr>
-            <a:r>
-              <a:rPr lang="ko-KR" altLang="en-US" sz="3200" b="1" dirty="0">
-                <a:solidFill>
-                  <a:schemeClr val="tx1"/>
-                </a:solidFill>
-              </a:rPr>
-              <a:t>가급적 </a:t>
-            </a:r>
-            <a:r>
-              <a:rPr lang="en-US" altLang="ko-KR" sz="3200" b="1" dirty="0">
-                <a:solidFill>
-                  <a:schemeClr val="tx1"/>
-                </a:solidFill>
-              </a:rPr>
-              <a:t>1 </a:t>
-            </a:r>
-            <a:r>
-              <a:rPr lang="ko-KR" altLang="en-US" sz="3200" b="1" dirty="0">
-                <a:solidFill>
-                  <a:schemeClr val="tx1"/>
-                </a:solidFill>
-              </a:rPr>
-              <a:t>페이지로 정리</a:t>
-            </a:r>
-          </a:p>
-        </p:txBody>
-      </p:sp>
-    </p:spTree>
-    <p:extLst>
-      <p:ext uri="{BB962C8B-B14F-4D97-AF65-F5344CB8AC3E}">
-        <p14:creationId xmlns:p14="http://schemas.microsoft.com/office/powerpoint/2010/main" val="442290376"/>
-      </p:ext>
-    </p:extLst>
-  </p:cSld>
-  <p:clrMapOvr>
-    <a:masterClrMapping/>
-  </p:clrMapOvr>
-  <p:timing>
-    <p:tnLst>
-      <p:par>
-        <p:cTn id="1" dur="indefinite" restart="never" nodeType="tmRoot"/>
-      </p:par>
-    </p:tnLst>
-  </p:timing>
-</p:sld>
-</file>
-
-<file path=ppt/slides/slide12.xml><?xml version="1.0" encoding="utf-8"?>
-<p:sld xmlns:a="http://schemas.openxmlformats.org/drawingml/2006/main" xmlns:r="http://schemas.openxmlformats.org/officeDocument/2006/relationships" xmlns:p="http://schemas.openxmlformats.org/presentationml/2006/main">
-  <p:cSld>
-    <p:spTree>
-      <p:nvGrpSpPr>
-        <p:cNvPr id="1" name=""/>
-        <p:cNvGrpSpPr/>
-        <p:nvPr/>
-      </p:nvGrpSpPr>
-      <p:grpSpPr>
-        <a:xfrm>
-          <a:off x="0" y="0"/>
-          <a:ext cx="0" cy="0"/>
-          <a:chOff x="0" y="0"/>
-          <a:chExt cx="0" cy="0"/>
-        </a:xfrm>
-      </p:grpSpPr>
-      <p:sp>
-        <p:nvSpPr>
-          <p:cNvPr id="2" name="텍스트 개체 틀 1"/>
-          <p:cNvSpPr>
-            <a:spLocks noGrp="1"/>
-          </p:cNvSpPr>
-          <p:nvPr>
-            <p:ph type="body" sz="quarter" idx="10"/>
-          </p:nvPr>
-        </p:nvSpPr>
-        <p:spPr/>
-        <p:txBody>
-          <a:bodyPr/>
-          <a:lstStyle/>
-          <a:p>
-            <a:endParaRPr lang="ko-KR" altLang="en-US"/>
-          </a:p>
-        </p:txBody>
-      </p:sp>
-      <p:sp>
-        <p:nvSpPr>
-          <p:cNvPr id="3" name="TextBox 2"/>
-          <p:cNvSpPr txBox="1"/>
-          <p:nvPr/>
-        </p:nvSpPr>
-        <p:spPr>
-          <a:xfrm>
-            <a:off x="244862" y="238662"/>
-            <a:ext cx="14190667" cy="923330"/>
-          </a:xfrm>
-          <a:prstGeom prst="rect">
-            <a:avLst/>
-          </a:prstGeom>
-          <a:noFill/>
-        </p:spPr>
-        <p:txBody>
-          <a:bodyPr wrap="square" rtlCol="0">
-            <a:spAutoFit/>
-          </a:bodyPr>
-          <a:lstStyle/>
-          <a:p>
-            <a:r>
-              <a:rPr lang="en-US" altLang="ko-KR" sz="5400" b="1" dirty="0">
-                <a:solidFill>
-                  <a:schemeClr val="bg1"/>
-                </a:solidFill>
-                <a:latin typeface="LG스마트체2.0 Regular" panose="020B0600000101010101" pitchFamily="50" charset="-127"/>
-                <a:ea typeface="LG스마트체2.0 Regular" panose="020B0600000101010101" pitchFamily="50" charset="-127"/>
-              </a:rPr>
-              <a:t>5. </a:t>
-            </a:r>
-            <a:r>
-              <a:rPr lang="ko-KR" altLang="en-US" sz="5400" b="1" dirty="0">
-                <a:solidFill>
-                  <a:schemeClr val="bg1"/>
-                </a:solidFill>
-                <a:latin typeface="LG스마트체2.0 Regular" panose="020B0600000101010101" pitchFamily="50" charset="-127"/>
-                <a:ea typeface="LG스마트체2.0 Regular" panose="020B0600000101010101" pitchFamily="50" charset="-127"/>
-              </a:rPr>
-              <a:t>향후 연구 과제</a:t>
-            </a:r>
-          </a:p>
-        </p:txBody>
-      </p:sp>
-      <p:sp>
-        <p:nvSpPr>
-          <p:cNvPr id="4" name="직사각형 3"/>
-          <p:cNvSpPr/>
-          <p:nvPr/>
-        </p:nvSpPr>
-        <p:spPr>
-          <a:xfrm>
-            <a:off x="884420" y="2488367"/>
-            <a:ext cx="11092721" cy="1798820"/>
-          </a:xfrm>
-          <a:prstGeom prst="rect">
-            <a:avLst/>
-          </a:prstGeom>
-          <a:solidFill>
-            <a:srgbClr val="FFFF00"/>
-          </a:solidFill>
-        </p:spPr>
-        <p:style>
-          <a:lnRef idx="2">
-            <a:schemeClr val="accent1">
-              <a:shade val="50000"/>
-            </a:schemeClr>
-          </a:lnRef>
-          <a:fillRef idx="1">
-            <a:schemeClr val="accent1"/>
-          </a:fillRef>
-          <a:effectRef idx="0">
-            <a:schemeClr val="accent1"/>
-          </a:effectRef>
-          <a:fontRef idx="minor">
-            <a:schemeClr val="lt1"/>
-          </a:fontRef>
-        </p:style>
-        <p:txBody>
-          <a:bodyPr rtlCol="0" anchor="ctr"/>
-          <a:lstStyle/>
-          <a:p>
-            <a:pPr marL="457200" indent="-457200">
-              <a:buFontTx/>
-              <a:buChar char="-"/>
-            </a:pPr>
-            <a:r>
-              <a:rPr lang="ko-KR" altLang="en-US" sz="3200" b="1" dirty="0">
-                <a:solidFill>
-                  <a:schemeClr val="tx1"/>
-                </a:solidFill>
-              </a:rPr>
-              <a:t>개발 결과물의 추후 개선점</a:t>
-            </a:r>
-            <a:r>
-              <a:rPr lang="en-US" altLang="ko-KR" sz="3200" b="1" dirty="0">
-                <a:solidFill>
-                  <a:schemeClr val="tx1"/>
-                </a:solidFill>
-              </a:rPr>
-              <a:t>, </a:t>
-            </a:r>
-            <a:r>
-              <a:rPr lang="ko-KR" altLang="en-US" sz="3200" b="1" dirty="0">
-                <a:solidFill>
-                  <a:schemeClr val="tx1"/>
-                </a:solidFill>
-              </a:rPr>
-              <a:t>후속 개발 주제 등에 대한 내용</a:t>
-            </a:r>
-            <a:endParaRPr lang="en-US" altLang="ko-KR" sz="3200" b="1" dirty="0">
-              <a:solidFill>
-                <a:schemeClr val="tx1"/>
-              </a:solidFill>
-            </a:endParaRPr>
-          </a:p>
-          <a:p>
-            <a:pPr marL="457200" indent="-457200">
-              <a:buFontTx/>
-              <a:buChar char="-"/>
-            </a:pPr>
-            <a:r>
-              <a:rPr lang="ko-KR" altLang="en-US" sz="3200" b="1" dirty="0">
-                <a:solidFill>
-                  <a:schemeClr val="tx1"/>
-                </a:solidFill>
-              </a:rPr>
-              <a:t>가급적 </a:t>
-            </a:r>
-            <a:r>
-              <a:rPr lang="en-US" altLang="ko-KR" sz="3200" b="1" dirty="0">
-                <a:solidFill>
-                  <a:schemeClr val="tx1"/>
-                </a:solidFill>
-              </a:rPr>
-              <a:t>1</a:t>
-            </a:r>
-            <a:r>
-              <a:rPr lang="ko-KR" altLang="en-US" sz="3200" b="1" dirty="0">
-                <a:solidFill>
-                  <a:schemeClr val="tx1"/>
-                </a:solidFill>
-              </a:rPr>
-              <a:t>페이지로 요약</a:t>
-            </a:r>
-          </a:p>
-        </p:txBody>
-      </p:sp>
-    </p:spTree>
-    <p:extLst>
-      <p:ext uri="{BB962C8B-B14F-4D97-AF65-F5344CB8AC3E}">
-        <p14:creationId xmlns:p14="http://schemas.microsoft.com/office/powerpoint/2010/main" val="2998846418"/>
-      </p:ext>
-    </p:extLst>
-  </p:cSld>
-  <p:clrMapOvr>
-    <a:masterClrMapping/>
-  </p:clrMapOvr>
-  <p:timing>
-    <p:tnLst>
-      <p:par>
-        <p:cTn id="1" dur="indefinite" restart="never" nodeType="tmRoot"/>
-      </p:par>
-    </p:tnLst>
-  </p:timing>
-</p:sld>
-</file>
-
-<file path=ppt/slides/slide13.xml><?xml version="1.0" encoding="utf-8"?>
-<p:sld xmlns:a="http://schemas.openxmlformats.org/drawingml/2006/main" xmlns:r="http://schemas.openxmlformats.org/officeDocument/2006/relationships" xmlns:p="http://schemas.openxmlformats.org/presentationml/2006/main">
-  <p:cSld>
-    <p:spTree>
-      <p:nvGrpSpPr>
-        <p:cNvPr id="1" name=""/>
-        <p:cNvGrpSpPr/>
-        <p:nvPr/>
-      </p:nvGrpSpPr>
-      <p:grpSpPr>
-        <a:xfrm>
-          <a:off x="0" y="0"/>
-          <a:ext cx="0" cy="0"/>
-          <a:chOff x="0" y="0"/>
-          <a:chExt cx="0" cy="0"/>
-        </a:xfrm>
-      </p:grpSpPr>
-      <p:sp>
-        <p:nvSpPr>
-          <p:cNvPr id="2" name="텍스트 개체 틀 1"/>
-          <p:cNvSpPr>
-            <a:spLocks noGrp="1"/>
-          </p:cNvSpPr>
-          <p:nvPr>
-            <p:ph type="body" sz="quarter" idx="10"/>
-          </p:nvPr>
-        </p:nvSpPr>
-        <p:spPr/>
-        <p:txBody>
-          <a:bodyPr/>
-          <a:lstStyle/>
-          <a:p>
-            <a:endParaRPr lang="ko-KR" altLang="en-US"/>
-          </a:p>
-        </p:txBody>
-      </p:sp>
-      <p:sp>
-        <p:nvSpPr>
-          <p:cNvPr id="3" name="TextBox 2"/>
-          <p:cNvSpPr txBox="1"/>
-          <p:nvPr/>
-        </p:nvSpPr>
-        <p:spPr>
-          <a:xfrm>
-            <a:off x="244862" y="238662"/>
-            <a:ext cx="14190667" cy="923330"/>
-          </a:xfrm>
-          <a:prstGeom prst="rect">
-            <a:avLst/>
-          </a:prstGeom>
-          <a:noFill/>
-        </p:spPr>
-        <p:txBody>
-          <a:bodyPr wrap="square" rtlCol="0">
-            <a:spAutoFit/>
-          </a:bodyPr>
-          <a:lstStyle/>
-          <a:p>
-            <a:r>
-              <a:rPr lang="en-US" altLang="ko-KR" sz="5400" b="1" dirty="0">
-                <a:solidFill>
-                  <a:schemeClr val="bg1"/>
-                </a:solidFill>
-                <a:latin typeface="LG스마트체2.0 Regular" panose="020B0600000101010101" pitchFamily="50" charset="-127"/>
-                <a:ea typeface="LG스마트체2.0 Regular" panose="020B0600000101010101" pitchFamily="50" charset="-127"/>
-              </a:rPr>
-              <a:t>6. </a:t>
-            </a:r>
-            <a:r>
-              <a:rPr lang="ko-KR" altLang="en-US" sz="5400" b="1" dirty="0">
-                <a:solidFill>
-                  <a:schemeClr val="bg1"/>
-                </a:solidFill>
-                <a:latin typeface="LG스마트체2.0 Regular" panose="020B0600000101010101" pitchFamily="50" charset="-127"/>
-                <a:ea typeface="LG스마트체2.0 Regular" panose="020B0600000101010101" pitchFamily="50" charset="-127"/>
-              </a:rPr>
-              <a:t>프로젝트 수행 후기</a:t>
-            </a:r>
-          </a:p>
-        </p:txBody>
-      </p:sp>
-      <p:sp>
-        <p:nvSpPr>
-          <p:cNvPr id="4" name="직사각형 3"/>
-          <p:cNvSpPr/>
-          <p:nvPr/>
-        </p:nvSpPr>
-        <p:spPr>
-          <a:xfrm>
-            <a:off x="884420" y="2488367"/>
-            <a:ext cx="11092721" cy="2203554"/>
-          </a:xfrm>
-          <a:prstGeom prst="rect">
-            <a:avLst/>
-          </a:prstGeom>
-          <a:solidFill>
-            <a:srgbClr val="FFFF00"/>
-          </a:solidFill>
-        </p:spPr>
-        <p:style>
-          <a:lnRef idx="2">
-            <a:schemeClr val="accent1">
-              <a:shade val="50000"/>
-            </a:schemeClr>
-          </a:lnRef>
-          <a:fillRef idx="1">
-            <a:schemeClr val="accent1"/>
-          </a:fillRef>
-          <a:effectRef idx="0">
-            <a:schemeClr val="accent1"/>
-          </a:effectRef>
-          <a:fontRef idx="minor">
-            <a:schemeClr val="lt1"/>
-          </a:fontRef>
-        </p:style>
-        <p:txBody>
-          <a:bodyPr rtlCol="0" anchor="ctr"/>
-          <a:lstStyle/>
-          <a:p>
-            <a:pPr marL="457200" indent="-457200">
-              <a:buFontTx/>
-              <a:buChar char="-"/>
-            </a:pPr>
-            <a:r>
-              <a:rPr lang="ko-KR" altLang="en-US" sz="3200" b="1" dirty="0">
-                <a:solidFill>
-                  <a:schemeClr val="tx1"/>
-                </a:solidFill>
-              </a:rPr>
-              <a:t>프로젝트 수행에 따른 </a:t>
-            </a:r>
-            <a:r>
-              <a:rPr lang="ko-KR" altLang="en-US" sz="3200" b="1" dirty="0" err="1">
-                <a:solidFill>
-                  <a:schemeClr val="tx1"/>
-                </a:solidFill>
-              </a:rPr>
-              <a:t>느낀점</a:t>
-            </a:r>
-            <a:endParaRPr lang="en-US" altLang="ko-KR" sz="3200" b="1" dirty="0">
-              <a:solidFill>
-                <a:schemeClr val="tx1"/>
-              </a:solidFill>
-            </a:endParaRPr>
-          </a:p>
-          <a:p>
-            <a:pPr marL="457200" indent="-457200">
-              <a:buFontTx/>
-              <a:buChar char="-"/>
-            </a:pPr>
-            <a:r>
-              <a:rPr lang="ko-KR" altLang="en-US" sz="3200" b="1" dirty="0" err="1">
-                <a:solidFill>
-                  <a:schemeClr val="tx1"/>
-                </a:solidFill>
-              </a:rPr>
-              <a:t>개발중</a:t>
-            </a:r>
-            <a:r>
-              <a:rPr lang="ko-KR" altLang="en-US" sz="3200" b="1" dirty="0">
-                <a:solidFill>
-                  <a:schemeClr val="tx1"/>
-                </a:solidFill>
-              </a:rPr>
-              <a:t> 어려웠던 점 그리고 이를 극복한 사연 등</a:t>
-            </a:r>
-            <a:endParaRPr lang="en-US" altLang="ko-KR" sz="3200" b="1" dirty="0">
-              <a:solidFill>
-                <a:schemeClr val="tx1"/>
-              </a:solidFill>
-            </a:endParaRPr>
-          </a:p>
-          <a:p>
-            <a:pPr marL="457200" indent="-457200">
-              <a:buFontTx/>
-              <a:buChar char="-"/>
-            </a:pPr>
-            <a:r>
-              <a:rPr lang="ko-KR" altLang="en-US" sz="3200" b="1" dirty="0">
-                <a:solidFill>
-                  <a:schemeClr val="tx1"/>
-                </a:solidFill>
-              </a:rPr>
-              <a:t>교육과 프로젝트를 마무리한 소회 등</a:t>
-            </a:r>
-            <a:r>
-              <a:rPr lang="en-US" altLang="ko-KR" sz="3200" b="1" dirty="0">
-                <a:solidFill>
-                  <a:schemeClr val="tx1"/>
-                </a:solidFill>
-              </a:rPr>
-              <a:t>… 1</a:t>
-            </a:r>
-            <a:r>
-              <a:rPr lang="ko-KR" altLang="en-US" sz="3200" b="1" dirty="0">
-                <a:solidFill>
-                  <a:schemeClr val="tx1"/>
-                </a:solidFill>
-              </a:rPr>
-              <a:t>페이지로 정리 </a:t>
-            </a:r>
-          </a:p>
-        </p:txBody>
-      </p:sp>
-    </p:spTree>
-    <p:extLst>
-      <p:ext uri="{BB962C8B-B14F-4D97-AF65-F5344CB8AC3E}">
-        <p14:creationId xmlns:p14="http://schemas.microsoft.com/office/powerpoint/2010/main" val="693654044"/>
-      </p:ext>
-    </p:extLst>
-  </p:cSld>
-  <p:clrMapOvr>
-    <a:masterClrMapping/>
-  </p:clrMapOvr>
-  <p:timing>
-    <p:tnLst>
-      <p:par>
-        <p:cTn id="1" dur="indefinite" restart="never" nodeType="tmRoot"/>
-      </p:par>
-    </p:tnLst>
-  </p:timing>
-</p:sld>
-</file>
-
-<file path=ppt/slides/slide14.xml><?xml version="1.0" encoding="utf-8"?>
-<p:sld xmlns:a="http://schemas.openxmlformats.org/drawingml/2006/main" xmlns:r="http://schemas.openxmlformats.org/officeDocument/2006/relationships" xmlns:p="http://schemas.openxmlformats.org/presentationml/2006/main">
-  <p:cSld>
-    <p:spTree>
-      <p:nvGrpSpPr>
-        <p:cNvPr id="1" name=""/>
-        <p:cNvGrpSpPr/>
-        <p:nvPr/>
-      </p:nvGrpSpPr>
-      <p:grpSpPr>
-        <a:xfrm>
-          <a:off x="0" y="0"/>
-          <a:ext cx="0" cy="0"/>
-          <a:chOff x="0" y="0"/>
-          <a:chExt cx="0" cy="0"/>
-        </a:xfrm>
-      </p:grpSpPr>
-      <p:sp>
-        <p:nvSpPr>
-          <p:cNvPr id="2" name="텍스트 개체 틀 1"/>
-          <p:cNvSpPr>
-            <a:spLocks noGrp="1"/>
-          </p:cNvSpPr>
-          <p:nvPr>
-            <p:ph type="body" sz="quarter" idx="10"/>
-          </p:nvPr>
-        </p:nvSpPr>
-        <p:spPr/>
-        <p:txBody>
-          <a:bodyPr/>
-          <a:lstStyle/>
-          <a:p>
-            <a:pPr marL="0" indent="0" algn="ctr">
-              <a:buNone/>
-            </a:pPr>
-            <a:r>
-              <a:rPr lang="en-US" altLang="ko-KR" sz="19900" dirty="0" smtClean="0"/>
-              <a:t>APPENDIX</a:t>
-            </a:r>
-            <a:endParaRPr lang="ko-KR" altLang="en-US"/>
-          </a:p>
-        </p:txBody>
-      </p:sp>
-    </p:spTree>
-    <p:extLst>
-      <p:ext uri="{BB962C8B-B14F-4D97-AF65-F5344CB8AC3E}">
-        <p14:creationId xmlns:p14="http://schemas.microsoft.com/office/powerpoint/2010/main" val="1390112942"/>
-      </p:ext>
-    </p:extLst>
-  </p:cSld>
-  <p:clrMapOvr>
-    <a:masterClrMapping/>
-  </p:clrMapOvr>
-  <p:timing>
-    <p:tnLst>
-      <p:par>
-        <p:cTn id="1" dur="indefinite" restart="never" nodeType="tmRoot"/>
-      </p:par>
-    </p:tnLst>
-  </p:timing>
-</p:sld>
-</file>
-
-<file path=ppt/slides/slide15.xml><?xml version="1.0" encoding="utf-8"?>
 <p:sld xmlns:a="http://schemas.openxmlformats.org/drawingml/2006/main" xmlns:r="http://schemas.openxmlformats.org/officeDocument/2006/relationships" xmlns:p="http://schemas.openxmlformats.org/presentationml/2006/main">
   <p:cSld>
     <p:spTree>
@@ -2852,1475 +1914,7 @@
 </p:sld>
 </file>
 
-<file path=ppt/slides/slide16.xml><?xml version="1.0" encoding="utf-8"?>
-<p:sld xmlns:a="http://schemas.openxmlformats.org/drawingml/2006/main" xmlns:r="http://schemas.openxmlformats.org/officeDocument/2006/relationships" xmlns:p="http://schemas.openxmlformats.org/presentationml/2006/main">
-  <p:cSld>
-    <p:spTree>
-      <p:nvGrpSpPr>
-        <p:cNvPr id="1" name=""/>
-        <p:cNvGrpSpPr/>
-        <p:nvPr/>
-      </p:nvGrpSpPr>
-      <p:grpSpPr>
-        <a:xfrm>
-          <a:off x="0" y="0"/>
-          <a:ext cx="0" cy="0"/>
-          <a:chOff x="0" y="0"/>
-          <a:chExt cx="0" cy="0"/>
-        </a:xfrm>
-      </p:grpSpPr>
-      <p:sp>
-        <p:nvSpPr>
-          <p:cNvPr id="2" name="TextBox 1"/>
-          <p:cNvSpPr txBox="1"/>
-          <p:nvPr/>
-        </p:nvSpPr>
-        <p:spPr>
-          <a:xfrm>
-            <a:off x="244862" y="238662"/>
-            <a:ext cx="14190667" cy="923330"/>
-          </a:xfrm>
-          <a:prstGeom prst="rect">
-            <a:avLst/>
-          </a:prstGeom>
-          <a:noFill/>
-        </p:spPr>
-        <p:txBody>
-          <a:bodyPr wrap="square" rtlCol="0">
-            <a:spAutoFit/>
-          </a:bodyPr>
-          <a:lstStyle/>
-          <a:p>
-            <a:r>
-              <a:rPr lang="en-US" altLang="ko-KR" sz="5400" b="1" dirty="0">
-                <a:solidFill>
-                  <a:schemeClr val="bg1"/>
-                </a:solidFill>
-                <a:latin typeface="LG스마트체2.0 Regular" panose="020B0600000101010101" pitchFamily="50" charset="-127"/>
-                <a:ea typeface="LG스마트체2.0 Regular" panose="020B0600000101010101" pitchFamily="50" charset="-127"/>
-              </a:rPr>
-              <a:t>1. </a:t>
-            </a:r>
-            <a:r>
-              <a:rPr lang="ko-KR" altLang="en-US" sz="5400" b="1" dirty="0">
-                <a:solidFill>
-                  <a:schemeClr val="bg1"/>
-                </a:solidFill>
-                <a:latin typeface="LG스마트체2.0 Regular" panose="020B0600000101010101" pitchFamily="50" charset="-127"/>
-                <a:ea typeface="LG스마트체2.0 Regular" panose="020B0600000101010101" pitchFamily="50" charset="-127"/>
-              </a:rPr>
-              <a:t>주제 및 결과 요약</a:t>
-            </a:r>
-          </a:p>
-        </p:txBody>
-      </p:sp>
-      <p:sp>
-        <p:nvSpPr>
-          <p:cNvPr id="3" name="직사각형 2"/>
-          <p:cNvSpPr/>
-          <p:nvPr/>
-        </p:nvSpPr>
-        <p:spPr>
-          <a:xfrm>
-            <a:off x="884420" y="2488367"/>
-            <a:ext cx="11092721" cy="1124263"/>
-          </a:xfrm>
-          <a:prstGeom prst="rect">
-            <a:avLst/>
-          </a:prstGeom>
-          <a:solidFill>
-            <a:srgbClr val="FFFF00"/>
-          </a:solidFill>
-        </p:spPr>
-        <p:style>
-          <a:lnRef idx="2">
-            <a:schemeClr val="accent1">
-              <a:shade val="50000"/>
-            </a:schemeClr>
-          </a:lnRef>
-          <a:fillRef idx="1">
-            <a:schemeClr val="accent1"/>
-          </a:fillRef>
-          <a:effectRef idx="0">
-            <a:schemeClr val="accent1"/>
-          </a:effectRef>
-          <a:fontRef idx="minor">
-            <a:schemeClr val="lt1"/>
-          </a:fontRef>
-        </p:style>
-        <p:txBody>
-          <a:bodyPr rtlCol="0" anchor="ctr"/>
-          <a:lstStyle/>
-          <a:p>
-            <a:r>
-              <a:rPr lang="ko-KR" altLang="en-US" sz="3200" b="1" dirty="0">
-                <a:solidFill>
-                  <a:schemeClr val="tx1"/>
-                </a:solidFill>
-              </a:rPr>
-              <a:t>간략하게 </a:t>
-            </a:r>
-            <a:r>
-              <a:rPr lang="en-US" altLang="ko-KR" sz="3200" b="1" dirty="0">
-                <a:solidFill>
-                  <a:schemeClr val="tx1"/>
-                </a:solidFill>
-              </a:rPr>
-              <a:t>1 </a:t>
-            </a:r>
-            <a:r>
-              <a:rPr lang="ko-KR" altLang="en-US" sz="3200" b="1" dirty="0">
-                <a:solidFill>
-                  <a:schemeClr val="tx1"/>
-                </a:solidFill>
-              </a:rPr>
-              <a:t>페이지에 프로젝트의 주제</a:t>
-            </a:r>
-            <a:r>
-              <a:rPr lang="en-US" altLang="ko-KR" sz="3200" b="1" dirty="0">
-                <a:solidFill>
-                  <a:schemeClr val="tx1"/>
-                </a:solidFill>
-              </a:rPr>
-              <a:t>, </a:t>
-            </a:r>
-            <a:r>
-              <a:rPr lang="ko-KR" altLang="en-US" sz="3200" b="1" dirty="0">
-                <a:solidFill>
-                  <a:schemeClr val="tx1"/>
-                </a:solidFill>
-              </a:rPr>
-              <a:t>목표</a:t>
-            </a:r>
-            <a:r>
-              <a:rPr lang="en-US" altLang="ko-KR" sz="3200" b="1" dirty="0">
-                <a:solidFill>
-                  <a:schemeClr val="tx1"/>
-                </a:solidFill>
-              </a:rPr>
-              <a:t>, </a:t>
-            </a:r>
-            <a:r>
-              <a:rPr lang="ko-KR" altLang="en-US" sz="3200" b="1" dirty="0">
-                <a:solidFill>
-                  <a:schemeClr val="tx1"/>
-                </a:solidFill>
-              </a:rPr>
-              <a:t>결과를 요약</a:t>
-            </a:r>
-          </a:p>
-        </p:txBody>
-      </p:sp>
-    </p:spTree>
-    <p:extLst>
-      <p:ext uri="{BB962C8B-B14F-4D97-AF65-F5344CB8AC3E}">
-        <p14:creationId xmlns:p14="http://schemas.microsoft.com/office/powerpoint/2010/main" val="819906418"/>
-      </p:ext>
-    </p:extLst>
-  </p:cSld>
-  <p:clrMapOvr>
-    <a:masterClrMapping/>
-  </p:clrMapOvr>
-  <p:timing>
-    <p:tnLst>
-      <p:par>
-        <p:cTn id="1" dur="indefinite" restart="never" nodeType="tmRoot"/>
-      </p:par>
-    </p:tnLst>
-  </p:timing>
-</p:sld>
-</file>
-
-<file path=ppt/slides/slide17.xml><?xml version="1.0" encoding="utf-8"?>
-<p:sld xmlns:a="http://schemas.openxmlformats.org/drawingml/2006/main" xmlns:r="http://schemas.openxmlformats.org/officeDocument/2006/relationships" xmlns:p="http://schemas.openxmlformats.org/presentationml/2006/main">
-  <p:cSld>
-    <p:spTree>
-      <p:nvGrpSpPr>
-        <p:cNvPr id="1" name=""/>
-        <p:cNvGrpSpPr/>
-        <p:nvPr/>
-      </p:nvGrpSpPr>
-      <p:grpSpPr>
-        <a:xfrm>
-          <a:off x="0" y="0"/>
-          <a:ext cx="0" cy="0"/>
-          <a:chOff x="0" y="0"/>
-          <a:chExt cx="0" cy="0"/>
-        </a:xfrm>
-      </p:grpSpPr>
-      <p:sp>
-        <p:nvSpPr>
-          <p:cNvPr id="2" name="TextBox 1"/>
-          <p:cNvSpPr txBox="1"/>
-          <p:nvPr/>
-        </p:nvSpPr>
-        <p:spPr>
-          <a:xfrm>
-            <a:off x="244862" y="238662"/>
-            <a:ext cx="14190667" cy="923330"/>
-          </a:xfrm>
-          <a:prstGeom prst="rect">
-            <a:avLst/>
-          </a:prstGeom>
-          <a:noFill/>
-        </p:spPr>
-        <p:txBody>
-          <a:bodyPr wrap="square" rtlCol="0">
-            <a:spAutoFit/>
-          </a:bodyPr>
-          <a:lstStyle/>
-          <a:p>
-            <a:r>
-              <a:rPr lang="en-US" altLang="ko-KR" sz="5400" b="1" dirty="0">
-                <a:solidFill>
-                  <a:schemeClr val="bg1"/>
-                </a:solidFill>
-                <a:latin typeface="LG스마트체2.0 Regular" panose="020B0600000101010101" pitchFamily="50" charset="-127"/>
-                <a:ea typeface="LG스마트체2.0 Regular" panose="020B0600000101010101" pitchFamily="50" charset="-127"/>
-              </a:rPr>
-              <a:t>2. </a:t>
-            </a:r>
-            <a:r>
-              <a:rPr lang="ko-KR" altLang="en-US" sz="5400" b="1" dirty="0">
-                <a:solidFill>
-                  <a:schemeClr val="bg1"/>
-                </a:solidFill>
-                <a:latin typeface="LG스마트체2.0 Regular" panose="020B0600000101010101" pitchFamily="50" charset="-127"/>
-                <a:ea typeface="LG스마트체2.0 Regular" panose="020B0600000101010101" pitchFamily="50" charset="-127"/>
-              </a:rPr>
-              <a:t>개발 목표 및 개발 결과</a:t>
-            </a:r>
-          </a:p>
-        </p:txBody>
-      </p:sp>
-      <p:sp>
-        <p:nvSpPr>
-          <p:cNvPr id="3" name="직사각형 2"/>
-          <p:cNvSpPr/>
-          <p:nvPr/>
-        </p:nvSpPr>
-        <p:spPr>
-          <a:xfrm>
-            <a:off x="884420" y="2488367"/>
-            <a:ext cx="11092721" cy="2548328"/>
-          </a:xfrm>
-          <a:prstGeom prst="rect">
-            <a:avLst/>
-          </a:prstGeom>
-          <a:solidFill>
-            <a:srgbClr val="FFFF00"/>
-          </a:solidFill>
-        </p:spPr>
-        <p:style>
-          <a:lnRef idx="2">
-            <a:schemeClr val="accent1">
-              <a:shade val="50000"/>
-            </a:schemeClr>
-          </a:lnRef>
-          <a:fillRef idx="1">
-            <a:schemeClr val="accent1"/>
-          </a:fillRef>
-          <a:effectRef idx="0">
-            <a:schemeClr val="accent1"/>
-          </a:effectRef>
-          <a:fontRef idx="minor">
-            <a:schemeClr val="lt1"/>
-          </a:fontRef>
-        </p:style>
-        <p:txBody>
-          <a:bodyPr rtlCol="0" anchor="ctr"/>
-          <a:lstStyle/>
-          <a:p>
-            <a:pPr marL="457200" indent="-457200">
-              <a:buFontTx/>
-              <a:buChar char="-"/>
-            </a:pPr>
-            <a:r>
-              <a:rPr lang="ko-KR" altLang="en-US" sz="3200" b="1" dirty="0">
-                <a:solidFill>
-                  <a:schemeClr val="tx1"/>
-                </a:solidFill>
-              </a:rPr>
-              <a:t>처음 기획한 개발 목표</a:t>
-            </a:r>
-            <a:endParaRPr lang="en-US" altLang="ko-KR" sz="3200" b="1" dirty="0">
-              <a:solidFill>
-                <a:schemeClr val="tx1"/>
-              </a:solidFill>
-            </a:endParaRPr>
-          </a:p>
-          <a:p>
-            <a:pPr marL="457200" indent="-457200">
-              <a:buFontTx/>
-              <a:buChar char="-"/>
-            </a:pPr>
-            <a:r>
-              <a:rPr lang="ko-KR" altLang="en-US" sz="3200" b="1" dirty="0">
-                <a:solidFill>
-                  <a:schemeClr val="tx1"/>
-                </a:solidFill>
-              </a:rPr>
-              <a:t>실제 개발 결과 소개</a:t>
-            </a:r>
-            <a:endParaRPr lang="en-US" altLang="ko-KR" sz="3200" b="1" dirty="0">
-              <a:solidFill>
-                <a:schemeClr val="tx1"/>
-              </a:solidFill>
-            </a:endParaRPr>
-          </a:p>
-          <a:p>
-            <a:pPr marL="457200" indent="-457200">
-              <a:buFontTx/>
-              <a:buChar char="-"/>
-            </a:pPr>
-            <a:r>
-              <a:rPr lang="ko-KR" altLang="en-US" sz="3200" b="1" dirty="0">
-                <a:solidFill>
-                  <a:schemeClr val="tx1"/>
-                </a:solidFill>
-              </a:rPr>
-              <a:t>가급적 결과 내용을 상세히 기술</a:t>
-            </a:r>
-            <a:endParaRPr lang="en-US" altLang="ko-KR" sz="3200" b="1" dirty="0">
-              <a:solidFill>
-                <a:schemeClr val="tx1"/>
-              </a:solidFill>
-            </a:endParaRPr>
-          </a:p>
-          <a:p>
-            <a:pPr marL="457200" indent="-457200">
-              <a:buFontTx/>
-              <a:buChar char="-"/>
-            </a:pPr>
-            <a:r>
-              <a:rPr lang="ko-KR" altLang="en-US" sz="3200" b="1" dirty="0">
-                <a:solidFill>
-                  <a:schemeClr val="tx1"/>
-                </a:solidFill>
-              </a:rPr>
-              <a:t>페이지 수 무관</a:t>
-            </a:r>
-          </a:p>
-        </p:txBody>
-      </p:sp>
-    </p:spTree>
-    <p:extLst>
-      <p:ext uri="{BB962C8B-B14F-4D97-AF65-F5344CB8AC3E}">
-        <p14:creationId xmlns:p14="http://schemas.microsoft.com/office/powerpoint/2010/main" val="73432356"/>
-      </p:ext>
-    </p:extLst>
-  </p:cSld>
-  <p:clrMapOvr>
-    <a:masterClrMapping/>
-  </p:clrMapOvr>
-  <p:timing>
-    <p:tnLst>
-      <p:par>
-        <p:cTn id="1" dur="indefinite" restart="never" nodeType="tmRoot"/>
-      </p:par>
-    </p:tnLst>
-  </p:timing>
-</p:sld>
-</file>
-
-<file path=ppt/slides/slide18.xml><?xml version="1.0" encoding="utf-8"?>
-<p:sld xmlns:a="http://schemas.openxmlformats.org/drawingml/2006/main" xmlns:r="http://schemas.openxmlformats.org/officeDocument/2006/relationships" xmlns:p="http://schemas.openxmlformats.org/presentationml/2006/main">
-  <p:cSld>
-    <p:spTree>
-      <p:nvGrpSpPr>
-        <p:cNvPr id="1" name=""/>
-        <p:cNvGrpSpPr/>
-        <p:nvPr/>
-      </p:nvGrpSpPr>
-      <p:grpSpPr>
-        <a:xfrm>
-          <a:off x="0" y="0"/>
-          <a:ext cx="0" cy="0"/>
-          <a:chOff x="0" y="0"/>
-          <a:chExt cx="0" cy="0"/>
-        </a:xfrm>
-      </p:grpSpPr>
-      <p:sp>
-        <p:nvSpPr>
-          <p:cNvPr id="2" name="TextBox 1"/>
-          <p:cNvSpPr txBox="1"/>
-          <p:nvPr/>
-        </p:nvSpPr>
-        <p:spPr>
-          <a:xfrm>
-            <a:off x="244862" y="238662"/>
-            <a:ext cx="14190667" cy="923330"/>
-          </a:xfrm>
-          <a:prstGeom prst="rect">
-            <a:avLst/>
-          </a:prstGeom>
-          <a:noFill/>
-        </p:spPr>
-        <p:txBody>
-          <a:bodyPr wrap="square" rtlCol="0">
-            <a:spAutoFit/>
-          </a:bodyPr>
-          <a:lstStyle/>
-          <a:p>
-            <a:r>
-              <a:rPr lang="en-US" altLang="ko-KR" sz="5400" b="1" dirty="0">
-                <a:solidFill>
-                  <a:schemeClr val="bg1"/>
-                </a:solidFill>
-                <a:latin typeface="LG스마트체2.0 Regular" panose="020B0600000101010101" pitchFamily="50" charset="-127"/>
-                <a:ea typeface="LG스마트체2.0 Regular" panose="020B0600000101010101" pitchFamily="50" charset="-127"/>
-              </a:rPr>
-              <a:t>3. </a:t>
-            </a:r>
-            <a:r>
-              <a:rPr lang="ko-KR" altLang="en-US" sz="5400" b="1" dirty="0">
-                <a:solidFill>
-                  <a:schemeClr val="bg1"/>
-                </a:solidFill>
-                <a:latin typeface="LG스마트체2.0 Regular" panose="020B0600000101010101" pitchFamily="50" charset="-127"/>
-                <a:ea typeface="LG스마트체2.0 Regular" panose="020B0600000101010101" pitchFamily="50" charset="-127"/>
-              </a:rPr>
-              <a:t>핵심 기술</a:t>
-            </a:r>
-          </a:p>
-        </p:txBody>
-      </p:sp>
-      <p:sp>
-        <p:nvSpPr>
-          <p:cNvPr id="3" name="직사각형 2"/>
-          <p:cNvSpPr/>
-          <p:nvPr/>
-        </p:nvSpPr>
-        <p:spPr>
-          <a:xfrm>
-            <a:off x="884420" y="2488367"/>
-            <a:ext cx="11092721" cy="2188564"/>
-          </a:xfrm>
-          <a:prstGeom prst="rect">
-            <a:avLst/>
-          </a:prstGeom>
-          <a:solidFill>
-            <a:srgbClr val="FFFF00"/>
-          </a:solidFill>
-        </p:spPr>
-        <p:style>
-          <a:lnRef idx="2">
-            <a:schemeClr val="accent1">
-              <a:shade val="50000"/>
-            </a:schemeClr>
-          </a:lnRef>
-          <a:fillRef idx="1">
-            <a:schemeClr val="accent1"/>
-          </a:fillRef>
-          <a:effectRef idx="0">
-            <a:schemeClr val="accent1"/>
-          </a:effectRef>
-          <a:fontRef idx="minor">
-            <a:schemeClr val="lt1"/>
-          </a:fontRef>
-        </p:style>
-        <p:txBody>
-          <a:bodyPr rtlCol="0" anchor="ctr"/>
-          <a:lstStyle/>
-          <a:p>
-            <a:pPr marL="457200" indent="-457200">
-              <a:buFontTx/>
-              <a:buChar char="-"/>
-            </a:pPr>
-            <a:r>
-              <a:rPr lang="ko-KR" altLang="en-US" sz="3200" b="1" dirty="0">
-                <a:solidFill>
-                  <a:schemeClr val="tx1"/>
-                </a:solidFill>
-              </a:rPr>
-              <a:t>개발에 사용된 가장 핵심적으로 구현된 기술 소개</a:t>
-            </a:r>
-            <a:endParaRPr lang="en-US" altLang="ko-KR" sz="3200" b="1" dirty="0">
-              <a:solidFill>
-                <a:schemeClr val="tx1"/>
-              </a:solidFill>
-            </a:endParaRPr>
-          </a:p>
-          <a:p>
-            <a:pPr marL="457200" indent="-457200">
-              <a:buFontTx/>
-              <a:buChar char="-"/>
-            </a:pPr>
-            <a:r>
-              <a:rPr lang="ko-KR" altLang="en-US" sz="3200" b="1" dirty="0">
-                <a:solidFill>
-                  <a:schemeClr val="tx1"/>
-                </a:solidFill>
-              </a:rPr>
-              <a:t>기술 내용 또는 소스코드 등 다양한 방법으로 핵심을 소개</a:t>
-            </a:r>
-            <a:endParaRPr lang="en-US" altLang="ko-KR" sz="3200" b="1" dirty="0">
-              <a:solidFill>
-                <a:schemeClr val="tx1"/>
-              </a:solidFill>
-            </a:endParaRPr>
-          </a:p>
-          <a:p>
-            <a:pPr marL="457200" indent="-457200">
-              <a:buFontTx/>
-              <a:buChar char="-"/>
-            </a:pPr>
-            <a:r>
-              <a:rPr lang="ko-KR" altLang="en-US" sz="3200" b="1" dirty="0">
-                <a:solidFill>
-                  <a:schemeClr val="tx1"/>
-                </a:solidFill>
-              </a:rPr>
-              <a:t>페이지 수 무관</a:t>
-            </a:r>
-          </a:p>
-        </p:txBody>
-      </p:sp>
-    </p:spTree>
-    <p:extLst>
-      <p:ext uri="{BB962C8B-B14F-4D97-AF65-F5344CB8AC3E}">
-        <p14:creationId xmlns:p14="http://schemas.microsoft.com/office/powerpoint/2010/main" val="3341560732"/>
-      </p:ext>
-    </p:extLst>
-  </p:cSld>
-  <p:clrMapOvr>
-    <a:masterClrMapping/>
-  </p:clrMapOvr>
-  <p:timing>
-    <p:tnLst>
-      <p:par>
-        <p:cTn id="1" dur="indefinite" restart="never" nodeType="tmRoot"/>
-      </p:par>
-    </p:tnLst>
-  </p:timing>
-</p:sld>
-</file>
-
-<file path=ppt/slides/slide19.xml><?xml version="1.0" encoding="utf-8"?>
-<p:sld xmlns:a="http://schemas.openxmlformats.org/drawingml/2006/main" xmlns:r="http://schemas.openxmlformats.org/officeDocument/2006/relationships" xmlns:p="http://schemas.openxmlformats.org/presentationml/2006/main">
-  <p:cSld>
-    <p:spTree>
-      <p:nvGrpSpPr>
-        <p:cNvPr id="1" name=""/>
-        <p:cNvGrpSpPr/>
-        <p:nvPr/>
-      </p:nvGrpSpPr>
-      <p:grpSpPr>
-        <a:xfrm>
-          <a:off x="0" y="0"/>
-          <a:ext cx="0" cy="0"/>
-          <a:chOff x="0" y="0"/>
-          <a:chExt cx="0" cy="0"/>
-        </a:xfrm>
-      </p:grpSpPr>
-      <p:sp>
-        <p:nvSpPr>
-          <p:cNvPr id="2" name="TextBox 1"/>
-          <p:cNvSpPr txBox="1"/>
-          <p:nvPr/>
-        </p:nvSpPr>
-        <p:spPr>
-          <a:xfrm>
-            <a:off x="244862" y="238662"/>
-            <a:ext cx="14190667" cy="923330"/>
-          </a:xfrm>
-          <a:prstGeom prst="rect">
-            <a:avLst/>
-          </a:prstGeom>
-          <a:noFill/>
-        </p:spPr>
-        <p:txBody>
-          <a:bodyPr wrap="square" rtlCol="0">
-            <a:spAutoFit/>
-          </a:bodyPr>
-          <a:lstStyle/>
-          <a:p>
-            <a:r>
-              <a:rPr lang="en-US" altLang="ko-KR" sz="5400" b="1" dirty="0">
-                <a:solidFill>
-                  <a:schemeClr val="bg1"/>
-                </a:solidFill>
-                <a:latin typeface="LG스마트체2.0 Regular" panose="020B0600000101010101" pitchFamily="50" charset="-127"/>
-                <a:ea typeface="LG스마트체2.0 Regular" panose="020B0600000101010101" pitchFamily="50" charset="-127"/>
-              </a:rPr>
-              <a:t>4. </a:t>
-            </a:r>
-            <a:r>
-              <a:rPr lang="ko-KR" altLang="en-US" sz="5400" b="1" dirty="0">
-                <a:solidFill>
-                  <a:schemeClr val="bg1"/>
-                </a:solidFill>
-                <a:latin typeface="LG스마트체2.0 Regular" panose="020B0600000101010101" pitchFamily="50" charset="-127"/>
-                <a:ea typeface="LG스마트체2.0 Regular" panose="020B0600000101010101" pitchFamily="50" charset="-127"/>
-              </a:rPr>
-              <a:t>결과 분석 및 기대 효과</a:t>
-            </a:r>
-          </a:p>
-        </p:txBody>
-      </p:sp>
-      <p:sp>
-        <p:nvSpPr>
-          <p:cNvPr id="3" name="직사각형 2"/>
-          <p:cNvSpPr/>
-          <p:nvPr/>
-        </p:nvSpPr>
-        <p:spPr>
-          <a:xfrm>
-            <a:off x="884420" y="2488367"/>
-            <a:ext cx="11092721" cy="2458388"/>
-          </a:xfrm>
-          <a:prstGeom prst="rect">
-            <a:avLst/>
-          </a:prstGeom>
-          <a:solidFill>
-            <a:srgbClr val="FFFF00"/>
-          </a:solidFill>
-        </p:spPr>
-        <p:style>
-          <a:lnRef idx="2">
-            <a:schemeClr val="accent1">
-              <a:shade val="50000"/>
-            </a:schemeClr>
-          </a:lnRef>
-          <a:fillRef idx="1">
-            <a:schemeClr val="accent1"/>
-          </a:fillRef>
-          <a:effectRef idx="0">
-            <a:schemeClr val="accent1"/>
-          </a:effectRef>
-          <a:fontRef idx="minor">
-            <a:schemeClr val="lt1"/>
-          </a:fontRef>
-        </p:style>
-        <p:txBody>
-          <a:bodyPr rtlCol="0" anchor="ctr"/>
-          <a:lstStyle/>
-          <a:p>
-            <a:pPr marL="457200" indent="-457200">
-              <a:buFontTx/>
-              <a:buChar char="-"/>
-            </a:pPr>
-            <a:r>
-              <a:rPr lang="ko-KR" altLang="en-US" sz="3200" b="1" dirty="0">
-                <a:solidFill>
-                  <a:schemeClr val="tx1"/>
-                </a:solidFill>
-              </a:rPr>
-              <a:t>결과물에 대한 성능측정 또는 목표달성 여부 등 평가</a:t>
-            </a:r>
-            <a:endParaRPr lang="en-US" altLang="ko-KR" sz="3200" b="1" dirty="0">
-              <a:solidFill>
-                <a:schemeClr val="tx1"/>
-              </a:solidFill>
-            </a:endParaRPr>
-          </a:p>
-          <a:p>
-            <a:pPr marL="457200" indent="-457200">
-              <a:buFontTx/>
-              <a:buChar char="-"/>
-            </a:pPr>
-            <a:r>
-              <a:rPr lang="ko-KR" altLang="en-US" sz="3200" b="1" dirty="0">
-                <a:solidFill>
-                  <a:schemeClr val="tx1"/>
-                </a:solidFill>
-              </a:rPr>
-              <a:t>성능이 낮을 경우 원인 분석 및 개선책 검토 기록</a:t>
-            </a:r>
-            <a:endParaRPr lang="en-US" altLang="ko-KR" sz="3200" b="1" dirty="0">
-              <a:solidFill>
-                <a:schemeClr val="tx1"/>
-              </a:solidFill>
-            </a:endParaRPr>
-          </a:p>
-          <a:p>
-            <a:pPr marL="457200" indent="-457200">
-              <a:buFontTx/>
-              <a:buChar char="-"/>
-            </a:pPr>
-            <a:r>
-              <a:rPr lang="ko-KR" altLang="en-US" sz="3200" b="1" dirty="0">
-                <a:solidFill>
-                  <a:schemeClr val="tx1"/>
-                </a:solidFill>
-              </a:rPr>
-              <a:t>성능이 만족했을 경우 향후 활용 가능한 기대효과 기록</a:t>
-            </a:r>
-            <a:endParaRPr lang="en-US" altLang="ko-KR" sz="3200" b="1" dirty="0">
-              <a:solidFill>
-                <a:schemeClr val="tx1"/>
-              </a:solidFill>
-            </a:endParaRPr>
-          </a:p>
-          <a:p>
-            <a:pPr marL="457200" indent="-457200">
-              <a:buFontTx/>
-              <a:buChar char="-"/>
-            </a:pPr>
-            <a:r>
-              <a:rPr lang="ko-KR" altLang="en-US" sz="3200" b="1" dirty="0">
-                <a:solidFill>
-                  <a:schemeClr val="tx1"/>
-                </a:solidFill>
-              </a:rPr>
-              <a:t>가급적 </a:t>
-            </a:r>
-            <a:r>
-              <a:rPr lang="en-US" altLang="ko-KR" sz="3200" b="1" dirty="0">
-                <a:solidFill>
-                  <a:schemeClr val="tx1"/>
-                </a:solidFill>
-              </a:rPr>
-              <a:t>1 </a:t>
-            </a:r>
-            <a:r>
-              <a:rPr lang="ko-KR" altLang="en-US" sz="3200" b="1" dirty="0">
-                <a:solidFill>
-                  <a:schemeClr val="tx1"/>
-                </a:solidFill>
-              </a:rPr>
-              <a:t>페이지로 정리</a:t>
-            </a:r>
-          </a:p>
-        </p:txBody>
-      </p:sp>
-    </p:spTree>
-    <p:extLst>
-      <p:ext uri="{BB962C8B-B14F-4D97-AF65-F5344CB8AC3E}">
-        <p14:creationId xmlns:p14="http://schemas.microsoft.com/office/powerpoint/2010/main" val="3256740301"/>
-      </p:ext>
-    </p:extLst>
-  </p:cSld>
-  <p:clrMapOvr>
-    <a:masterClrMapping/>
-  </p:clrMapOvr>
-  <p:timing>
-    <p:tnLst>
-      <p:par>
-        <p:cTn id="1" dur="indefinite" restart="never" nodeType="tmRoot"/>
-      </p:par>
-    </p:tnLst>
-  </p:timing>
-</p:sld>
-</file>
-
-<file path=ppt/slides/slide2.xml><?xml version="1.0" encoding="utf-8"?>
-<p:sld xmlns:a="http://schemas.openxmlformats.org/drawingml/2006/main" xmlns:r="http://schemas.openxmlformats.org/officeDocument/2006/relationships" xmlns:p="http://schemas.openxmlformats.org/presentationml/2006/main">
-  <p:cSld name="Slide 3">
-    <p:spTree>
-      <p:nvGrpSpPr>
-        <p:cNvPr id="1" name=""/>
-        <p:cNvGrpSpPr/>
-        <p:nvPr/>
-      </p:nvGrpSpPr>
-      <p:grpSpPr>
-        <a:xfrm>
-          <a:off x="0" y="0"/>
-          <a:ext cx="0" cy="0"/>
-          <a:chOff x="0" y="0"/>
-          <a:chExt cx="0" cy="0"/>
-        </a:xfrm>
-      </p:grpSpPr>
-      <p:pic>
-        <p:nvPicPr>
-          <p:cNvPr id="2" name="Image 0" descr="preencoded.png"/>
-          <p:cNvPicPr>
-            <a:picLocks noChangeAspect="1"/>
-          </p:cNvPicPr>
-          <p:nvPr/>
-        </p:nvPicPr>
-        <p:blipFill>
-          <a:blip r:embed="rId3"/>
-          <a:stretch>
-            <a:fillRect/>
-          </a:stretch>
-        </p:blipFill>
-        <p:spPr>
-          <a:xfrm>
-            <a:off x="0" y="0"/>
-            <a:ext cx="17556480" cy="9875520"/>
-          </a:xfrm>
-          <a:prstGeom prst="rect">
-            <a:avLst/>
-          </a:prstGeom>
-        </p:spPr>
-      </p:pic>
-      <p:pic>
-        <p:nvPicPr>
-          <p:cNvPr id="5" name="Image 3" descr="preencoded.png"/>
-          <p:cNvPicPr>
-            <a:picLocks noChangeAspect="1"/>
-          </p:cNvPicPr>
-          <p:nvPr/>
-        </p:nvPicPr>
-        <p:blipFill>
-          <a:blip r:embed="rId4"/>
-          <a:stretch>
-            <a:fillRect/>
-          </a:stretch>
-        </p:blipFill>
-        <p:spPr>
-          <a:xfrm>
-            <a:off x="948261" y="649796"/>
-            <a:ext cx="4510135" cy="2194560"/>
-          </a:xfrm>
-          <a:prstGeom prst="rect">
-            <a:avLst/>
-          </a:prstGeom>
-        </p:spPr>
-      </p:pic>
-      <p:pic>
-        <p:nvPicPr>
-          <p:cNvPr id="6" name="Image 4" descr="preencoded.png"/>
-          <p:cNvPicPr>
-            <a:picLocks noChangeAspect="1"/>
-          </p:cNvPicPr>
-          <p:nvPr/>
-        </p:nvPicPr>
-        <p:blipFill>
-          <a:blip r:embed="rId5"/>
-          <a:stretch>
-            <a:fillRect/>
-          </a:stretch>
-        </p:blipFill>
-        <p:spPr>
-          <a:xfrm>
-            <a:off x="4092654" y="1373029"/>
-            <a:ext cx="5253657" cy="1325880"/>
-          </a:xfrm>
-          <a:prstGeom prst="rect">
-            <a:avLst/>
-          </a:prstGeom>
-        </p:spPr>
-      </p:pic>
-      <p:sp>
-        <p:nvSpPr>
-          <p:cNvPr id="14" name="TextBox 13"/>
-          <p:cNvSpPr txBox="1"/>
-          <p:nvPr/>
-        </p:nvSpPr>
-        <p:spPr>
-          <a:xfrm>
-            <a:off x="4497049" y="2878040"/>
-            <a:ext cx="11160121" cy="6186309"/>
-          </a:xfrm>
-          <a:prstGeom prst="rect">
-            <a:avLst/>
-          </a:prstGeom>
-          <a:noFill/>
-        </p:spPr>
-        <p:txBody>
-          <a:bodyPr wrap="square" rtlCol="0">
-            <a:spAutoFit/>
-          </a:bodyPr>
-          <a:lstStyle/>
-          <a:p>
-            <a:pPr marL="914400" indent="-914400">
-              <a:lnSpc>
-                <a:spcPct val="150000"/>
-              </a:lnSpc>
-              <a:buAutoNum type="arabicPeriod"/>
-            </a:pPr>
-            <a:r>
-              <a:rPr lang="ko-KR" altLang="en-US" sz="4400" b="1" dirty="0">
-                <a:solidFill>
-                  <a:schemeClr val="bg1"/>
-                </a:solidFill>
-                <a:latin typeface="LG스마트체2.0 Regular" panose="020B0600000101010101" pitchFamily="50" charset="-127"/>
-                <a:ea typeface="LG스마트체2.0 Regular" panose="020B0600000101010101" pitchFamily="50" charset="-127"/>
-              </a:rPr>
-              <a:t>주제 및 결과 요약</a:t>
-            </a:r>
-            <a:endParaRPr lang="en-US" altLang="ko-KR" sz="4400" b="1" dirty="0">
-              <a:solidFill>
-                <a:schemeClr val="bg1"/>
-              </a:solidFill>
-              <a:latin typeface="LG스마트체2.0 Regular" panose="020B0600000101010101" pitchFamily="50" charset="-127"/>
-              <a:ea typeface="LG스마트체2.0 Regular" panose="020B0600000101010101" pitchFamily="50" charset="-127"/>
-            </a:endParaRPr>
-          </a:p>
-          <a:p>
-            <a:pPr marL="914400" indent="-914400">
-              <a:lnSpc>
-                <a:spcPct val="150000"/>
-              </a:lnSpc>
-              <a:buAutoNum type="arabicPeriod"/>
-            </a:pPr>
-            <a:r>
-              <a:rPr lang="ko-KR" altLang="en-US" sz="4400" b="1" dirty="0">
-                <a:solidFill>
-                  <a:schemeClr val="bg1"/>
-                </a:solidFill>
-                <a:latin typeface="LG스마트체2.0 Regular" panose="020B0600000101010101" pitchFamily="50" charset="-127"/>
-                <a:ea typeface="LG스마트체2.0 Regular" panose="020B0600000101010101" pitchFamily="50" charset="-127"/>
-              </a:rPr>
-              <a:t>개발 목표 및 개발 결과</a:t>
-            </a:r>
-            <a:endParaRPr lang="en-US" altLang="ko-KR" sz="4400" b="1" dirty="0">
-              <a:solidFill>
-                <a:schemeClr val="bg1"/>
-              </a:solidFill>
-              <a:latin typeface="LG스마트체2.0 Regular" panose="020B0600000101010101" pitchFamily="50" charset="-127"/>
-              <a:ea typeface="LG스마트체2.0 Regular" panose="020B0600000101010101" pitchFamily="50" charset="-127"/>
-            </a:endParaRPr>
-          </a:p>
-          <a:p>
-            <a:pPr marL="914400" indent="-914400">
-              <a:lnSpc>
-                <a:spcPct val="150000"/>
-              </a:lnSpc>
-              <a:buAutoNum type="arabicPeriod"/>
-            </a:pPr>
-            <a:r>
-              <a:rPr lang="ko-KR" altLang="en-US" sz="4400" b="1" dirty="0">
-                <a:solidFill>
-                  <a:schemeClr val="bg1"/>
-                </a:solidFill>
-                <a:latin typeface="LG스마트체2.0 Regular" panose="020B0600000101010101" pitchFamily="50" charset="-127"/>
-                <a:ea typeface="LG스마트체2.0 Regular" panose="020B0600000101010101" pitchFamily="50" charset="-127"/>
-              </a:rPr>
-              <a:t>핵심 기술</a:t>
-            </a:r>
-            <a:endParaRPr lang="en-US" altLang="ko-KR" sz="4400" b="1" dirty="0">
-              <a:solidFill>
-                <a:schemeClr val="bg1"/>
-              </a:solidFill>
-              <a:latin typeface="LG스마트체2.0 Regular" panose="020B0600000101010101" pitchFamily="50" charset="-127"/>
-              <a:ea typeface="LG스마트체2.0 Regular" panose="020B0600000101010101" pitchFamily="50" charset="-127"/>
-            </a:endParaRPr>
-          </a:p>
-          <a:p>
-            <a:pPr marL="914400" indent="-914400">
-              <a:lnSpc>
-                <a:spcPct val="150000"/>
-              </a:lnSpc>
-              <a:buAutoNum type="arabicPeriod"/>
-            </a:pPr>
-            <a:r>
-              <a:rPr lang="ko-KR" altLang="en-US" sz="4400" b="1" dirty="0">
-                <a:solidFill>
-                  <a:schemeClr val="bg1"/>
-                </a:solidFill>
-                <a:latin typeface="LG스마트체2.0 Regular" panose="020B0600000101010101" pitchFamily="50" charset="-127"/>
-                <a:ea typeface="LG스마트체2.0 Regular" panose="020B0600000101010101" pitchFamily="50" charset="-127"/>
-              </a:rPr>
-              <a:t>결과 분석 및 기대 효과</a:t>
-            </a:r>
-            <a:endParaRPr lang="en-US" altLang="ko-KR" sz="4400" b="1" dirty="0">
-              <a:solidFill>
-                <a:schemeClr val="bg1"/>
-              </a:solidFill>
-              <a:latin typeface="LG스마트체2.0 Regular" panose="020B0600000101010101" pitchFamily="50" charset="-127"/>
-              <a:ea typeface="LG스마트체2.0 Regular" panose="020B0600000101010101" pitchFamily="50" charset="-127"/>
-            </a:endParaRPr>
-          </a:p>
-          <a:p>
-            <a:pPr marL="914400" indent="-914400">
-              <a:lnSpc>
-                <a:spcPct val="150000"/>
-              </a:lnSpc>
-              <a:buAutoNum type="arabicPeriod"/>
-            </a:pPr>
-            <a:r>
-              <a:rPr lang="ko-KR" altLang="en-US" sz="4400" b="1" dirty="0">
-                <a:solidFill>
-                  <a:schemeClr val="bg1"/>
-                </a:solidFill>
-                <a:latin typeface="LG스마트체2.0 Regular" panose="020B0600000101010101" pitchFamily="50" charset="-127"/>
-                <a:ea typeface="LG스마트체2.0 Regular" panose="020B0600000101010101" pitchFamily="50" charset="-127"/>
-              </a:rPr>
-              <a:t>향후 연구 과제</a:t>
-            </a:r>
-            <a:endParaRPr lang="en-US" altLang="ko-KR" sz="4400" b="1" dirty="0">
-              <a:solidFill>
-                <a:schemeClr val="bg1"/>
-              </a:solidFill>
-              <a:latin typeface="LG스마트체2.0 Regular" panose="020B0600000101010101" pitchFamily="50" charset="-127"/>
-              <a:ea typeface="LG스마트체2.0 Regular" panose="020B0600000101010101" pitchFamily="50" charset="-127"/>
-            </a:endParaRPr>
-          </a:p>
-          <a:p>
-            <a:pPr marL="914400" indent="-914400">
-              <a:lnSpc>
-                <a:spcPct val="150000"/>
-              </a:lnSpc>
-              <a:buAutoNum type="arabicPeriod"/>
-            </a:pPr>
-            <a:r>
-              <a:rPr lang="ko-KR" altLang="en-US" sz="4400" b="1" dirty="0">
-                <a:solidFill>
-                  <a:schemeClr val="bg1"/>
-                </a:solidFill>
-                <a:latin typeface="LG스마트체2.0 Regular" panose="020B0600000101010101" pitchFamily="50" charset="-127"/>
-                <a:ea typeface="LG스마트체2.0 Regular" panose="020B0600000101010101" pitchFamily="50" charset="-127"/>
-              </a:rPr>
-              <a:t>프로젝트 수행 후기</a:t>
-            </a:r>
-          </a:p>
-        </p:txBody>
-      </p:sp>
-      <p:sp>
-        <p:nvSpPr>
-          <p:cNvPr id="7" name="직사각형 6"/>
-          <p:cNvSpPr/>
-          <p:nvPr/>
-        </p:nvSpPr>
-        <p:spPr>
-          <a:xfrm>
-            <a:off x="10750089" y="7383726"/>
-            <a:ext cx="6248622" cy="1184223"/>
-          </a:xfrm>
-          <a:prstGeom prst="rect">
-            <a:avLst/>
-          </a:prstGeom>
-          <a:solidFill>
-            <a:srgbClr val="FFFF00"/>
-          </a:solidFill>
-        </p:spPr>
-        <p:style>
-          <a:lnRef idx="2">
-            <a:schemeClr val="accent1">
-              <a:shade val="50000"/>
-            </a:schemeClr>
-          </a:lnRef>
-          <a:fillRef idx="1">
-            <a:schemeClr val="accent1"/>
-          </a:fillRef>
-          <a:effectRef idx="0">
-            <a:schemeClr val="accent1"/>
-          </a:effectRef>
-          <a:fontRef idx="minor">
-            <a:schemeClr val="lt1"/>
-          </a:fontRef>
-        </p:style>
-        <p:txBody>
-          <a:bodyPr rtlCol="0" anchor="ctr"/>
-          <a:lstStyle/>
-          <a:p>
-            <a:pPr algn="ctr"/>
-            <a:r>
-              <a:rPr lang="ko-KR" altLang="en-US" sz="3200" b="1">
-                <a:solidFill>
-                  <a:schemeClr val="tx1"/>
-                </a:solidFill>
-              </a:rPr>
-              <a:t>필요시 목차 임의 수정 가능</a:t>
-            </a:r>
-            <a:endParaRPr lang="ko-KR" altLang="en-US" sz="3200" b="1" dirty="0">
-              <a:solidFill>
-                <a:schemeClr val="tx1"/>
-              </a:solidFill>
-            </a:endParaRPr>
-          </a:p>
-        </p:txBody>
-      </p:sp>
-    </p:spTree>
-  </p:cSld>
-  <p:clrMapOvr>
-    <a:masterClrMapping/>
-  </p:clrMapOvr>
-  <p:timing>
-    <p:tnLst>
-      <p:par>
-        <p:cTn id="1" dur="indefinite" restart="never" nodeType="tmRoot"/>
-      </p:par>
-    </p:tnLst>
-  </p:timing>
-</p:sld>
-</file>
-
-<file path=ppt/slides/slide20.xml><?xml version="1.0" encoding="utf-8"?>
-<p:sld xmlns:a="http://schemas.openxmlformats.org/drawingml/2006/main" xmlns:r="http://schemas.openxmlformats.org/officeDocument/2006/relationships" xmlns:p="http://schemas.openxmlformats.org/presentationml/2006/main">
-  <p:cSld>
-    <p:spTree>
-      <p:nvGrpSpPr>
-        <p:cNvPr id="1" name=""/>
-        <p:cNvGrpSpPr/>
-        <p:nvPr/>
-      </p:nvGrpSpPr>
-      <p:grpSpPr>
-        <a:xfrm>
-          <a:off x="0" y="0"/>
-          <a:ext cx="0" cy="0"/>
-          <a:chOff x="0" y="0"/>
-          <a:chExt cx="0" cy="0"/>
-        </a:xfrm>
-      </p:grpSpPr>
-      <p:sp>
-        <p:nvSpPr>
-          <p:cNvPr id="2" name="TextBox 1"/>
-          <p:cNvSpPr txBox="1"/>
-          <p:nvPr/>
-        </p:nvSpPr>
-        <p:spPr>
-          <a:xfrm>
-            <a:off x="244862" y="238662"/>
-            <a:ext cx="14190667" cy="923330"/>
-          </a:xfrm>
-          <a:prstGeom prst="rect">
-            <a:avLst/>
-          </a:prstGeom>
-          <a:noFill/>
-        </p:spPr>
-        <p:txBody>
-          <a:bodyPr wrap="square" rtlCol="0">
-            <a:spAutoFit/>
-          </a:bodyPr>
-          <a:lstStyle/>
-          <a:p>
-            <a:r>
-              <a:rPr lang="en-US" altLang="ko-KR" sz="5400" b="1" dirty="0">
-                <a:solidFill>
-                  <a:schemeClr val="bg1"/>
-                </a:solidFill>
-                <a:latin typeface="LG스마트체2.0 Regular" panose="020B0600000101010101" pitchFamily="50" charset="-127"/>
-                <a:ea typeface="LG스마트체2.0 Regular" panose="020B0600000101010101" pitchFamily="50" charset="-127"/>
-              </a:rPr>
-              <a:t>5. </a:t>
-            </a:r>
-            <a:r>
-              <a:rPr lang="ko-KR" altLang="en-US" sz="5400" b="1" dirty="0">
-                <a:solidFill>
-                  <a:schemeClr val="bg1"/>
-                </a:solidFill>
-                <a:latin typeface="LG스마트체2.0 Regular" panose="020B0600000101010101" pitchFamily="50" charset="-127"/>
-                <a:ea typeface="LG스마트체2.0 Regular" panose="020B0600000101010101" pitchFamily="50" charset="-127"/>
-              </a:rPr>
-              <a:t>향후 연구 과제</a:t>
-            </a:r>
-          </a:p>
-        </p:txBody>
-      </p:sp>
-      <p:sp>
-        <p:nvSpPr>
-          <p:cNvPr id="3" name="직사각형 2"/>
-          <p:cNvSpPr/>
-          <p:nvPr/>
-        </p:nvSpPr>
-        <p:spPr>
-          <a:xfrm>
-            <a:off x="884420" y="2488367"/>
-            <a:ext cx="11092721" cy="1798820"/>
-          </a:xfrm>
-          <a:prstGeom prst="rect">
-            <a:avLst/>
-          </a:prstGeom>
-          <a:solidFill>
-            <a:srgbClr val="FFFF00"/>
-          </a:solidFill>
-        </p:spPr>
-        <p:style>
-          <a:lnRef idx="2">
-            <a:schemeClr val="accent1">
-              <a:shade val="50000"/>
-            </a:schemeClr>
-          </a:lnRef>
-          <a:fillRef idx="1">
-            <a:schemeClr val="accent1"/>
-          </a:fillRef>
-          <a:effectRef idx="0">
-            <a:schemeClr val="accent1"/>
-          </a:effectRef>
-          <a:fontRef idx="minor">
-            <a:schemeClr val="lt1"/>
-          </a:fontRef>
-        </p:style>
-        <p:txBody>
-          <a:bodyPr rtlCol="0" anchor="ctr"/>
-          <a:lstStyle/>
-          <a:p>
-            <a:pPr marL="457200" indent="-457200">
-              <a:buFontTx/>
-              <a:buChar char="-"/>
-            </a:pPr>
-            <a:r>
-              <a:rPr lang="ko-KR" altLang="en-US" sz="3200" b="1" dirty="0">
-                <a:solidFill>
-                  <a:schemeClr val="tx1"/>
-                </a:solidFill>
-              </a:rPr>
-              <a:t>개발 결과물의 추후 개선점</a:t>
-            </a:r>
-            <a:r>
-              <a:rPr lang="en-US" altLang="ko-KR" sz="3200" b="1" dirty="0">
-                <a:solidFill>
-                  <a:schemeClr val="tx1"/>
-                </a:solidFill>
-              </a:rPr>
-              <a:t>, </a:t>
-            </a:r>
-            <a:r>
-              <a:rPr lang="ko-KR" altLang="en-US" sz="3200" b="1" dirty="0">
-                <a:solidFill>
-                  <a:schemeClr val="tx1"/>
-                </a:solidFill>
-              </a:rPr>
-              <a:t>후속 개발 주제 등에 대한 내용</a:t>
-            </a:r>
-            <a:endParaRPr lang="en-US" altLang="ko-KR" sz="3200" b="1" dirty="0">
-              <a:solidFill>
-                <a:schemeClr val="tx1"/>
-              </a:solidFill>
-            </a:endParaRPr>
-          </a:p>
-          <a:p>
-            <a:pPr marL="457200" indent="-457200">
-              <a:buFontTx/>
-              <a:buChar char="-"/>
-            </a:pPr>
-            <a:r>
-              <a:rPr lang="ko-KR" altLang="en-US" sz="3200" b="1" dirty="0">
-                <a:solidFill>
-                  <a:schemeClr val="tx1"/>
-                </a:solidFill>
-              </a:rPr>
-              <a:t>가급적 </a:t>
-            </a:r>
-            <a:r>
-              <a:rPr lang="en-US" altLang="ko-KR" sz="3200" b="1" dirty="0">
-                <a:solidFill>
-                  <a:schemeClr val="tx1"/>
-                </a:solidFill>
-              </a:rPr>
-              <a:t>1</a:t>
-            </a:r>
-            <a:r>
-              <a:rPr lang="ko-KR" altLang="en-US" sz="3200" b="1" dirty="0">
-                <a:solidFill>
-                  <a:schemeClr val="tx1"/>
-                </a:solidFill>
-              </a:rPr>
-              <a:t>페이지로 요약</a:t>
-            </a:r>
-          </a:p>
-        </p:txBody>
-      </p:sp>
-    </p:spTree>
-    <p:extLst>
-      <p:ext uri="{BB962C8B-B14F-4D97-AF65-F5344CB8AC3E}">
-        <p14:creationId xmlns:p14="http://schemas.microsoft.com/office/powerpoint/2010/main" val="3019012668"/>
-      </p:ext>
-    </p:extLst>
-  </p:cSld>
-  <p:clrMapOvr>
-    <a:masterClrMapping/>
-  </p:clrMapOvr>
-  <p:timing>
-    <p:tnLst>
-      <p:par>
-        <p:cTn id="1" dur="indefinite" restart="never" nodeType="tmRoot"/>
-      </p:par>
-    </p:tnLst>
-  </p:timing>
-</p:sld>
-</file>
-
-<file path=ppt/slides/slide21.xml><?xml version="1.0" encoding="utf-8"?>
-<p:sld xmlns:a="http://schemas.openxmlformats.org/drawingml/2006/main" xmlns:r="http://schemas.openxmlformats.org/officeDocument/2006/relationships" xmlns:p="http://schemas.openxmlformats.org/presentationml/2006/main">
-  <p:cSld>
-    <p:spTree>
-      <p:nvGrpSpPr>
-        <p:cNvPr id="1" name=""/>
-        <p:cNvGrpSpPr/>
-        <p:nvPr/>
-      </p:nvGrpSpPr>
-      <p:grpSpPr>
-        <a:xfrm>
-          <a:off x="0" y="0"/>
-          <a:ext cx="0" cy="0"/>
-          <a:chOff x="0" y="0"/>
-          <a:chExt cx="0" cy="0"/>
-        </a:xfrm>
-      </p:grpSpPr>
-      <p:sp>
-        <p:nvSpPr>
-          <p:cNvPr id="2" name="TextBox 1"/>
-          <p:cNvSpPr txBox="1"/>
-          <p:nvPr/>
-        </p:nvSpPr>
-        <p:spPr>
-          <a:xfrm>
-            <a:off x="244862" y="238662"/>
-            <a:ext cx="14190667" cy="923330"/>
-          </a:xfrm>
-          <a:prstGeom prst="rect">
-            <a:avLst/>
-          </a:prstGeom>
-          <a:noFill/>
-        </p:spPr>
-        <p:txBody>
-          <a:bodyPr wrap="square" rtlCol="0">
-            <a:spAutoFit/>
-          </a:bodyPr>
-          <a:lstStyle/>
-          <a:p>
-            <a:r>
-              <a:rPr lang="en-US" altLang="ko-KR" sz="5400" b="1" dirty="0">
-                <a:solidFill>
-                  <a:schemeClr val="bg1"/>
-                </a:solidFill>
-                <a:latin typeface="LG스마트체2.0 Regular" panose="020B0600000101010101" pitchFamily="50" charset="-127"/>
-                <a:ea typeface="LG스마트체2.0 Regular" panose="020B0600000101010101" pitchFamily="50" charset="-127"/>
-              </a:rPr>
-              <a:t>6. </a:t>
-            </a:r>
-            <a:r>
-              <a:rPr lang="ko-KR" altLang="en-US" sz="5400" b="1" dirty="0">
-                <a:solidFill>
-                  <a:schemeClr val="bg1"/>
-                </a:solidFill>
-                <a:latin typeface="LG스마트체2.0 Regular" panose="020B0600000101010101" pitchFamily="50" charset="-127"/>
-                <a:ea typeface="LG스마트체2.0 Regular" panose="020B0600000101010101" pitchFamily="50" charset="-127"/>
-              </a:rPr>
-              <a:t>프로젝트 수행 후기</a:t>
-            </a:r>
-          </a:p>
-        </p:txBody>
-      </p:sp>
-      <p:sp>
-        <p:nvSpPr>
-          <p:cNvPr id="3" name="직사각형 2"/>
-          <p:cNvSpPr/>
-          <p:nvPr/>
-        </p:nvSpPr>
-        <p:spPr>
-          <a:xfrm>
-            <a:off x="884420" y="2488367"/>
-            <a:ext cx="11092721" cy="2203554"/>
-          </a:xfrm>
-          <a:prstGeom prst="rect">
-            <a:avLst/>
-          </a:prstGeom>
-          <a:solidFill>
-            <a:srgbClr val="FFFF00"/>
-          </a:solidFill>
-        </p:spPr>
-        <p:style>
-          <a:lnRef idx="2">
-            <a:schemeClr val="accent1">
-              <a:shade val="50000"/>
-            </a:schemeClr>
-          </a:lnRef>
-          <a:fillRef idx="1">
-            <a:schemeClr val="accent1"/>
-          </a:fillRef>
-          <a:effectRef idx="0">
-            <a:schemeClr val="accent1"/>
-          </a:effectRef>
-          <a:fontRef idx="minor">
-            <a:schemeClr val="lt1"/>
-          </a:fontRef>
-        </p:style>
-        <p:txBody>
-          <a:bodyPr rtlCol="0" anchor="ctr"/>
-          <a:lstStyle/>
-          <a:p>
-            <a:pPr marL="457200" indent="-457200">
-              <a:buFontTx/>
-              <a:buChar char="-"/>
-            </a:pPr>
-            <a:r>
-              <a:rPr lang="ko-KR" altLang="en-US" sz="3200" b="1" dirty="0">
-                <a:solidFill>
-                  <a:schemeClr val="tx1"/>
-                </a:solidFill>
-              </a:rPr>
-              <a:t>프로젝트 수행에 따른 </a:t>
-            </a:r>
-            <a:r>
-              <a:rPr lang="ko-KR" altLang="en-US" sz="3200" b="1" dirty="0" err="1">
-                <a:solidFill>
-                  <a:schemeClr val="tx1"/>
-                </a:solidFill>
-              </a:rPr>
-              <a:t>느낀점</a:t>
-            </a:r>
-            <a:endParaRPr lang="en-US" altLang="ko-KR" sz="3200" b="1" dirty="0">
-              <a:solidFill>
-                <a:schemeClr val="tx1"/>
-              </a:solidFill>
-            </a:endParaRPr>
-          </a:p>
-          <a:p>
-            <a:pPr marL="457200" indent="-457200">
-              <a:buFontTx/>
-              <a:buChar char="-"/>
-            </a:pPr>
-            <a:r>
-              <a:rPr lang="ko-KR" altLang="en-US" sz="3200" b="1" dirty="0" err="1">
-                <a:solidFill>
-                  <a:schemeClr val="tx1"/>
-                </a:solidFill>
-              </a:rPr>
-              <a:t>개발중</a:t>
-            </a:r>
-            <a:r>
-              <a:rPr lang="ko-KR" altLang="en-US" sz="3200" b="1" dirty="0">
-                <a:solidFill>
-                  <a:schemeClr val="tx1"/>
-                </a:solidFill>
-              </a:rPr>
-              <a:t> 어려웠던 점 그리고 이를 극복한 사연 등</a:t>
-            </a:r>
-            <a:endParaRPr lang="en-US" altLang="ko-KR" sz="3200" b="1" dirty="0">
-              <a:solidFill>
-                <a:schemeClr val="tx1"/>
-              </a:solidFill>
-            </a:endParaRPr>
-          </a:p>
-          <a:p>
-            <a:pPr marL="457200" indent="-457200">
-              <a:buFontTx/>
-              <a:buChar char="-"/>
-            </a:pPr>
-            <a:r>
-              <a:rPr lang="ko-KR" altLang="en-US" sz="3200" b="1" dirty="0">
-                <a:solidFill>
-                  <a:schemeClr val="tx1"/>
-                </a:solidFill>
-              </a:rPr>
-              <a:t>교육과 프로젝트를 마무리한 소회 등</a:t>
-            </a:r>
-            <a:r>
-              <a:rPr lang="en-US" altLang="ko-KR" sz="3200" b="1" dirty="0">
-                <a:solidFill>
-                  <a:schemeClr val="tx1"/>
-                </a:solidFill>
-              </a:rPr>
-              <a:t>… 1</a:t>
-            </a:r>
-            <a:r>
-              <a:rPr lang="ko-KR" altLang="en-US" sz="3200" b="1" dirty="0">
-                <a:solidFill>
-                  <a:schemeClr val="tx1"/>
-                </a:solidFill>
-              </a:rPr>
-              <a:t>페이지로 정리 </a:t>
-            </a:r>
-          </a:p>
-        </p:txBody>
-      </p:sp>
-    </p:spTree>
-    <p:extLst>
-      <p:ext uri="{BB962C8B-B14F-4D97-AF65-F5344CB8AC3E}">
-        <p14:creationId xmlns:p14="http://schemas.microsoft.com/office/powerpoint/2010/main" val="2477282649"/>
-      </p:ext>
-    </p:extLst>
-  </p:cSld>
-  <p:clrMapOvr>
-    <a:masterClrMapping/>
-  </p:clrMapOvr>
-  <p:timing>
-    <p:tnLst>
-      <p:par>
-        <p:cTn id="1" dur="indefinite" restart="never" nodeType="tmRoot"/>
-      </p:par>
-    </p:tnLst>
-  </p:timing>
-</p:sld>
-</file>
-
-<file path=ppt/slides/slide3.xml><?xml version="1.0" encoding="utf-8"?>
+<file path=ppt/slides/slide11.xml><?xml version="1.0" encoding="utf-8"?>
 <p:sld xmlns:a="http://schemas.openxmlformats.org/drawingml/2006/main" xmlns:r="http://schemas.openxmlformats.org/officeDocument/2006/relationships" xmlns:p="http://schemas.openxmlformats.org/presentationml/2006/main">
   <p:cSld>
     <p:spTree>
@@ -5772,7 +3366,7 @@
 </p:sld>
 </file>
 
-<file path=ppt/slides/slide4.xml><?xml version="1.0" encoding="utf-8"?>
+<file path=ppt/slides/slide12.xml><?xml version="1.0" encoding="utf-8"?>
 <p:sld xmlns:a="http://schemas.openxmlformats.org/drawingml/2006/main" xmlns:r="http://schemas.openxmlformats.org/officeDocument/2006/relationships" xmlns:p="http://schemas.openxmlformats.org/presentationml/2006/main">
   <p:cSld>
     <p:spTree>
@@ -6358,7 +3952,7 @@
 </p:sld>
 </file>
 
-<file path=ppt/slides/slide5.xml><?xml version="1.0" encoding="utf-8"?>
+<file path=ppt/slides/slide13.xml><?xml version="1.0" encoding="utf-8"?>
 <p:sld xmlns:a="http://schemas.openxmlformats.org/drawingml/2006/main" xmlns:r="http://schemas.openxmlformats.org/officeDocument/2006/relationships" xmlns:p="http://schemas.openxmlformats.org/presentationml/2006/main">
   <p:cSld>
     <p:spTree>
@@ -7120,7 +4714,7 @@
 </p:sld>
 </file>
 
-<file path=ppt/slides/slide6.xml><?xml version="1.0" encoding="utf-8"?>
+<file path=ppt/slides/slide14.xml><?xml version="1.0" encoding="utf-8"?>
 <p:sld xmlns:a="http://schemas.openxmlformats.org/drawingml/2006/main" xmlns:r="http://schemas.openxmlformats.org/officeDocument/2006/relationships" xmlns:p="http://schemas.openxmlformats.org/presentationml/2006/main">
   <p:cSld>
     <p:spTree>
@@ -9306,7 +6900,7 @@
 </p:sld>
 </file>
 
-<file path=ppt/slides/slide7.xml><?xml version="1.0" encoding="utf-8"?>
+<file path=ppt/slides/slide15.xml><?xml version="1.0" encoding="utf-8"?>
 <p:sld xmlns:a="http://schemas.openxmlformats.org/drawingml/2006/main" xmlns:r="http://schemas.openxmlformats.org/officeDocument/2006/relationships" xmlns:p="http://schemas.openxmlformats.org/presentationml/2006/main">
   <p:cSld>
     <p:spTree>
@@ -10532,7 +8126,146 @@
                   <a:schemeClr val="tx1"/>
                 </a:solidFill>
               </a:rPr>
-              <a:t>영상 제작</a:t>
+              <a:t>영상 </a:t>
+            </a:r>
+            <a:r>
+              <a:rPr lang="ko-KR" altLang="en-US" b="1" smtClean="0">
+                <a:solidFill>
+                  <a:schemeClr val="tx1"/>
+                </a:solidFill>
+              </a:rPr>
+              <a:t>제작</a:t>
+            </a:r>
+            <a:endParaRPr lang="en-US" altLang="ko-KR" b="1" dirty="0" smtClean="0">
+              <a:solidFill>
+                <a:schemeClr val="tx1"/>
+              </a:solidFill>
+            </a:endParaRPr>
+          </a:p>
+          <a:p>
+            <a:pPr marL="800100" lvl="1" indent="-342900">
+              <a:lnSpc>
+                <a:spcPct val="150000"/>
+              </a:lnSpc>
+              <a:buFontTx/>
+              <a:buChar char="-"/>
+            </a:pPr>
+            <a:r>
+              <a:rPr lang="ko-KR" altLang="en-US" b="1" dirty="0" smtClean="0">
+                <a:solidFill>
+                  <a:schemeClr val="tx1"/>
+                </a:solidFill>
+              </a:rPr>
+              <a:t>팀 이름</a:t>
+            </a:r>
+            <a:r>
+              <a:rPr lang="en-US" altLang="ko-KR" b="1" dirty="0" smtClean="0">
+                <a:solidFill>
+                  <a:schemeClr val="tx1"/>
+                </a:solidFill>
+              </a:rPr>
+              <a:t>, </a:t>
+            </a:r>
+            <a:r>
+              <a:rPr lang="ko-KR" altLang="en-US" b="1" smtClean="0">
+                <a:solidFill>
+                  <a:schemeClr val="tx1"/>
+                </a:solidFill>
+              </a:rPr>
+              <a:t>팀원 소개</a:t>
+            </a:r>
+            <a:endParaRPr lang="en-US" altLang="ko-KR" b="1" dirty="0" smtClean="0">
+              <a:solidFill>
+                <a:schemeClr val="tx1"/>
+              </a:solidFill>
+            </a:endParaRPr>
+          </a:p>
+          <a:p>
+            <a:pPr marL="800100" lvl="1" indent="-342900">
+              <a:lnSpc>
+                <a:spcPct val="150000"/>
+              </a:lnSpc>
+              <a:buFontTx/>
+              <a:buChar char="-"/>
+            </a:pPr>
+            <a:r>
+              <a:rPr lang="ko-KR" altLang="en-US" b="1" dirty="0" smtClean="0">
+                <a:solidFill>
+                  <a:schemeClr val="tx1"/>
+                </a:solidFill>
+              </a:rPr>
+              <a:t>프로젝트 주제</a:t>
+            </a:r>
+            <a:r>
+              <a:rPr lang="en-US" altLang="ko-KR" b="1" dirty="0" smtClean="0">
+                <a:solidFill>
+                  <a:schemeClr val="tx1"/>
+                </a:solidFill>
+              </a:rPr>
+              <a:t>, </a:t>
+            </a:r>
+            <a:r>
+              <a:rPr lang="ko-KR" altLang="en-US" b="1" smtClean="0">
+                <a:solidFill>
+                  <a:schemeClr val="tx1"/>
+                </a:solidFill>
+              </a:rPr>
+              <a:t>목표</a:t>
+            </a:r>
+            <a:endParaRPr lang="en-US" altLang="ko-KR" b="1" dirty="0" smtClean="0">
+              <a:solidFill>
+                <a:schemeClr val="tx1"/>
+              </a:solidFill>
+            </a:endParaRPr>
+          </a:p>
+          <a:p>
+            <a:pPr marL="800100" lvl="1" indent="-342900">
+              <a:lnSpc>
+                <a:spcPct val="150000"/>
+              </a:lnSpc>
+              <a:buFontTx/>
+              <a:buChar char="-"/>
+            </a:pPr>
+            <a:r>
+              <a:rPr lang="ko-KR" altLang="en-US" b="1" dirty="0" smtClean="0">
+                <a:solidFill>
+                  <a:schemeClr val="tx1"/>
+                </a:solidFill>
+              </a:rPr>
+              <a:t>팀워크 모습</a:t>
+            </a:r>
+            <a:r>
+              <a:rPr lang="en-US" altLang="ko-KR" b="1" dirty="0" smtClean="0">
+                <a:solidFill>
+                  <a:schemeClr val="tx1"/>
+                </a:solidFill>
+              </a:rPr>
+              <a:t>?</a:t>
+            </a:r>
+          </a:p>
+          <a:p>
+            <a:pPr marL="800100" lvl="1" indent="-342900">
+              <a:lnSpc>
+                <a:spcPct val="150000"/>
+              </a:lnSpc>
+              <a:buFontTx/>
+              <a:buChar char="-"/>
+            </a:pPr>
+            <a:r>
+              <a:rPr lang="ko-KR" altLang="en-US" b="1" dirty="0" err="1" smtClean="0">
+                <a:solidFill>
+                  <a:schemeClr val="tx1"/>
+                </a:solidFill>
+              </a:rPr>
+              <a:t>재밌는</a:t>
+            </a:r>
+            <a:r>
+              <a:rPr lang="ko-KR" altLang="en-US" b="1" dirty="0" smtClean="0">
+                <a:solidFill>
+                  <a:schemeClr val="tx1"/>
+                </a:solidFill>
+              </a:rPr>
+              <a:t> 요소</a:t>
             </a:r>
             <a:endParaRPr lang="en-US" altLang="ko-KR" b="1" dirty="0" smtClean="0">
               <a:solidFill>
@@ -11146,6 +8879,1695 @@
 </p:sld>
 </file>
 
+<file path=ppt/slides/slide2.xml><?xml version="1.0" encoding="utf-8"?>
+<p:sld xmlns:a="http://schemas.openxmlformats.org/drawingml/2006/main" xmlns:r="http://schemas.openxmlformats.org/officeDocument/2006/relationships" xmlns:p="http://schemas.openxmlformats.org/presentationml/2006/main">
+  <p:cSld name="Slide 3">
+    <p:spTree>
+      <p:nvGrpSpPr>
+        <p:cNvPr id="1" name=""/>
+        <p:cNvGrpSpPr/>
+        <p:nvPr/>
+      </p:nvGrpSpPr>
+      <p:grpSpPr>
+        <a:xfrm>
+          <a:off x="0" y="0"/>
+          <a:ext cx="0" cy="0"/>
+          <a:chOff x="0" y="0"/>
+          <a:chExt cx="0" cy="0"/>
+        </a:xfrm>
+      </p:grpSpPr>
+      <p:pic>
+        <p:nvPicPr>
+          <p:cNvPr id="2" name="Image 0" descr="preencoded.png"/>
+          <p:cNvPicPr>
+            <a:picLocks noChangeAspect="1"/>
+          </p:cNvPicPr>
+          <p:nvPr/>
+        </p:nvPicPr>
+        <p:blipFill>
+          <a:blip r:embed="rId3"/>
+          <a:stretch>
+            <a:fillRect/>
+          </a:stretch>
+        </p:blipFill>
+        <p:spPr>
+          <a:xfrm>
+            <a:off x="0" y="0"/>
+            <a:ext cx="17556480" cy="9875520"/>
+          </a:xfrm>
+          <a:prstGeom prst="rect">
+            <a:avLst/>
+          </a:prstGeom>
+        </p:spPr>
+      </p:pic>
+      <p:pic>
+        <p:nvPicPr>
+          <p:cNvPr id="5" name="Image 3" descr="preencoded.png"/>
+          <p:cNvPicPr>
+            <a:picLocks noChangeAspect="1"/>
+          </p:cNvPicPr>
+          <p:nvPr/>
+        </p:nvPicPr>
+        <p:blipFill>
+          <a:blip r:embed="rId4"/>
+          <a:stretch>
+            <a:fillRect/>
+          </a:stretch>
+        </p:blipFill>
+        <p:spPr>
+          <a:xfrm>
+            <a:off x="948261" y="649796"/>
+            <a:ext cx="4510135" cy="2194560"/>
+          </a:xfrm>
+          <a:prstGeom prst="rect">
+            <a:avLst/>
+          </a:prstGeom>
+        </p:spPr>
+      </p:pic>
+      <p:pic>
+        <p:nvPicPr>
+          <p:cNvPr id="6" name="Image 4" descr="preencoded.png"/>
+          <p:cNvPicPr>
+            <a:picLocks noChangeAspect="1"/>
+          </p:cNvPicPr>
+          <p:nvPr/>
+        </p:nvPicPr>
+        <p:blipFill>
+          <a:blip r:embed="rId5"/>
+          <a:stretch>
+            <a:fillRect/>
+          </a:stretch>
+        </p:blipFill>
+        <p:spPr>
+          <a:xfrm>
+            <a:off x="4092654" y="1373029"/>
+            <a:ext cx="5253657" cy="1325880"/>
+          </a:xfrm>
+          <a:prstGeom prst="rect">
+            <a:avLst/>
+          </a:prstGeom>
+        </p:spPr>
+      </p:pic>
+      <p:sp>
+        <p:nvSpPr>
+          <p:cNvPr id="14" name="TextBox 13"/>
+          <p:cNvSpPr txBox="1"/>
+          <p:nvPr/>
+        </p:nvSpPr>
+        <p:spPr>
+          <a:xfrm>
+            <a:off x="4497049" y="2878040"/>
+            <a:ext cx="11160121" cy="6186309"/>
+          </a:xfrm>
+          <a:prstGeom prst="rect">
+            <a:avLst/>
+          </a:prstGeom>
+          <a:noFill/>
+        </p:spPr>
+        <p:txBody>
+          <a:bodyPr wrap="square" rtlCol="0">
+            <a:spAutoFit/>
+          </a:bodyPr>
+          <a:lstStyle/>
+          <a:p>
+            <a:pPr marL="914400" indent="-914400">
+              <a:lnSpc>
+                <a:spcPct val="150000"/>
+              </a:lnSpc>
+              <a:buAutoNum type="arabicPeriod"/>
+            </a:pPr>
+            <a:r>
+              <a:rPr lang="ko-KR" altLang="en-US" sz="4400" b="1" dirty="0">
+                <a:solidFill>
+                  <a:schemeClr val="bg1"/>
+                </a:solidFill>
+                <a:latin typeface="LG스마트체2.0 Regular" panose="020B0600000101010101" pitchFamily="50" charset="-127"/>
+                <a:ea typeface="LG스마트체2.0 Regular" panose="020B0600000101010101" pitchFamily="50" charset="-127"/>
+              </a:rPr>
+              <a:t>주제 및 결과 요약</a:t>
+            </a:r>
+            <a:endParaRPr lang="en-US" altLang="ko-KR" sz="4400" b="1" dirty="0">
+              <a:solidFill>
+                <a:schemeClr val="bg1"/>
+              </a:solidFill>
+              <a:latin typeface="LG스마트체2.0 Regular" panose="020B0600000101010101" pitchFamily="50" charset="-127"/>
+              <a:ea typeface="LG스마트체2.0 Regular" panose="020B0600000101010101" pitchFamily="50" charset="-127"/>
+            </a:endParaRPr>
+          </a:p>
+          <a:p>
+            <a:pPr marL="914400" indent="-914400">
+              <a:lnSpc>
+                <a:spcPct val="150000"/>
+              </a:lnSpc>
+              <a:buAutoNum type="arabicPeriod"/>
+            </a:pPr>
+            <a:r>
+              <a:rPr lang="ko-KR" altLang="en-US" sz="4400" b="1" dirty="0">
+                <a:solidFill>
+                  <a:schemeClr val="bg1"/>
+                </a:solidFill>
+                <a:latin typeface="LG스마트체2.0 Regular" panose="020B0600000101010101" pitchFamily="50" charset="-127"/>
+                <a:ea typeface="LG스마트체2.0 Regular" panose="020B0600000101010101" pitchFamily="50" charset="-127"/>
+              </a:rPr>
+              <a:t>개발 목표 및 개발 결과</a:t>
+            </a:r>
+            <a:endParaRPr lang="en-US" altLang="ko-KR" sz="4400" b="1" dirty="0">
+              <a:solidFill>
+                <a:schemeClr val="bg1"/>
+              </a:solidFill>
+              <a:latin typeface="LG스마트체2.0 Regular" panose="020B0600000101010101" pitchFamily="50" charset="-127"/>
+              <a:ea typeface="LG스마트체2.0 Regular" panose="020B0600000101010101" pitchFamily="50" charset="-127"/>
+            </a:endParaRPr>
+          </a:p>
+          <a:p>
+            <a:pPr marL="914400" indent="-914400">
+              <a:lnSpc>
+                <a:spcPct val="150000"/>
+              </a:lnSpc>
+              <a:buAutoNum type="arabicPeriod"/>
+            </a:pPr>
+            <a:r>
+              <a:rPr lang="ko-KR" altLang="en-US" sz="4400" b="1" dirty="0">
+                <a:solidFill>
+                  <a:schemeClr val="bg1"/>
+                </a:solidFill>
+                <a:latin typeface="LG스마트체2.0 Regular" panose="020B0600000101010101" pitchFamily="50" charset="-127"/>
+                <a:ea typeface="LG스마트체2.0 Regular" panose="020B0600000101010101" pitchFamily="50" charset="-127"/>
+              </a:rPr>
+              <a:t>핵심 기술</a:t>
+            </a:r>
+            <a:endParaRPr lang="en-US" altLang="ko-KR" sz="4400" b="1" dirty="0">
+              <a:solidFill>
+                <a:schemeClr val="bg1"/>
+              </a:solidFill>
+              <a:latin typeface="LG스마트체2.0 Regular" panose="020B0600000101010101" pitchFamily="50" charset="-127"/>
+              <a:ea typeface="LG스마트체2.0 Regular" panose="020B0600000101010101" pitchFamily="50" charset="-127"/>
+            </a:endParaRPr>
+          </a:p>
+          <a:p>
+            <a:pPr marL="914400" indent="-914400">
+              <a:lnSpc>
+                <a:spcPct val="150000"/>
+              </a:lnSpc>
+              <a:buAutoNum type="arabicPeriod"/>
+            </a:pPr>
+            <a:r>
+              <a:rPr lang="ko-KR" altLang="en-US" sz="4400" b="1" dirty="0">
+                <a:solidFill>
+                  <a:schemeClr val="bg1"/>
+                </a:solidFill>
+                <a:latin typeface="LG스마트체2.0 Regular" panose="020B0600000101010101" pitchFamily="50" charset="-127"/>
+                <a:ea typeface="LG스마트체2.0 Regular" panose="020B0600000101010101" pitchFamily="50" charset="-127"/>
+              </a:rPr>
+              <a:t>결과 분석 및 기대 효과</a:t>
+            </a:r>
+            <a:endParaRPr lang="en-US" altLang="ko-KR" sz="4400" b="1" dirty="0">
+              <a:solidFill>
+                <a:schemeClr val="bg1"/>
+              </a:solidFill>
+              <a:latin typeface="LG스마트체2.0 Regular" panose="020B0600000101010101" pitchFamily="50" charset="-127"/>
+              <a:ea typeface="LG스마트체2.0 Regular" panose="020B0600000101010101" pitchFamily="50" charset="-127"/>
+            </a:endParaRPr>
+          </a:p>
+          <a:p>
+            <a:pPr marL="914400" indent="-914400">
+              <a:lnSpc>
+                <a:spcPct val="150000"/>
+              </a:lnSpc>
+              <a:buAutoNum type="arabicPeriod"/>
+            </a:pPr>
+            <a:r>
+              <a:rPr lang="ko-KR" altLang="en-US" sz="4400" b="1" dirty="0">
+                <a:solidFill>
+                  <a:schemeClr val="bg1"/>
+                </a:solidFill>
+                <a:latin typeface="LG스마트체2.0 Regular" panose="020B0600000101010101" pitchFamily="50" charset="-127"/>
+                <a:ea typeface="LG스마트체2.0 Regular" panose="020B0600000101010101" pitchFamily="50" charset="-127"/>
+              </a:rPr>
+              <a:t>향후 연구 과제</a:t>
+            </a:r>
+            <a:endParaRPr lang="en-US" altLang="ko-KR" sz="4400" b="1" dirty="0">
+              <a:solidFill>
+                <a:schemeClr val="bg1"/>
+              </a:solidFill>
+              <a:latin typeface="LG스마트체2.0 Regular" panose="020B0600000101010101" pitchFamily="50" charset="-127"/>
+              <a:ea typeface="LG스마트체2.0 Regular" panose="020B0600000101010101" pitchFamily="50" charset="-127"/>
+            </a:endParaRPr>
+          </a:p>
+          <a:p>
+            <a:pPr marL="914400" indent="-914400">
+              <a:lnSpc>
+                <a:spcPct val="150000"/>
+              </a:lnSpc>
+              <a:buAutoNum type="arabicPeriod"/>
+            </a:pPr>
+            <a:r>
+              <a:rPr lang="ko-KR" altLang="en-US" sz="4400" b="1" dirty="0">
+                <a:solidFill>
+                  <a:schemeClr val="bg1"/>
+                </a:solidFill>
+                <a:latin typeface="LG스마트체2.0 Regular" panose="020B0600000101010101" pitchFamily="50" charset="-127"/>
+                <a:ea typeface="LG스마트체2.0 Regular" panose="020B0600000101010101" pitchFamily="50" charset="-127"/>
+              </a:rPr>
+              <a:t>프로젝트 수행 후기</a:t>
+            </a:r>
+          </a:p>
+        </p:txBody>
+      </p:sp>
+      <p:sp>
+        <p:nvSpPr>
+          <p:cNvPr id="7" name="직사각형 6"/>
+          <p:cNvSpPr/>
+          <p:nvPr/>
+        </p:nvSpPr>
+        <p:spPr>
+          <a:xfrm>
+            <a:off x="10750089" y="7383726"/>
+            <a:ext cx="6248622" cy="1184223"/>
+          </a:xfrm>
+          <a:prstGeom prst="rect">
+            <a:avLst/>
+          </a:prstGeom>
+          <a:solidFill>
+            <a:srgbClr val="FFFF00"/>
+          </a:solidFill>
+        </p:spPr>
+        <p:style>
+          <a:lnRef idx="2">
+            <a:schemeClr val="accent1">
+              <a:shade val="50000"/>
+            </a:schemeClr>
+          </a:lnRef>
+          <a:fillRef idx="1">
+            <a:schemeClr val="accent1"/>
+          </a:fillRef>
+          <a:effectRef idx="0">
+            <a:schemeClr val="accent1"/>
+          </a:effectRef>
+          <a:fontRef idx="minor">
+            <a:schemeClr val="lt1"/>
+          </a:fontRef>
+        </p:style>
+        <p:txBody>
+          <a:bodyPr rtlCol="0" anchor="ctr"/>
+          <a:lstStyle/>
+          <a:p>
+            <a:pPr algn="ctr"/>
+            <a:r>
+              <a:rPr lang="ko-KR" altLang="en-US" sz="3200" b="1">
+                <a:solidFill>
+                  <a:schemeClr val="tx1"/>
+                </a:solidFill>
+              </a:rPr>
+              <a:t>필요시 목차 임의 수정 가능</a:t>
+            </a:r>
+            <a:endParaRPr lang="ko-KR" altLang="en-US" sz="3200" b="1" dirty="0">
+              <a:solidFill>
+                <a:schemeClr val="tx1"/>
+              </a:solidFill>
+            </a:endParaRPr>
+          </a:p>
+        </p:txBody>
+      </p:sp>
+    </p:spTree>
+  </p:cSld>
+  <p:clrMapOvr>
+    <a:masterClrMapping/>
+  </p:clrMapOvr>
+  <p:timing>
+    <p:tnLst>
+      <p:par>
+        <p:cTn id="1" dur="indefinite" restart="never" nodeType="tmRoot"/>
+      </p:par>
+    </p:tnLst>
+  </p:timing>
+</p:sld>
+</file>
+
+<file path=ppt/slides/slide3.xml><?xml version="1.0" encoding="utf-8"?>
+<p:sld xmlns:a="http://schemas.openxmlformats.org/drawingml/2006/main" xmlns:r="http://schemas.openxmlformats.org/officeDocument/2006/relationships" xmlns:p="http://schemas.openxmlformats.org/presentationml/2006/main">
+  <p:cSld>
+    <p:spTree>
+      <p:nvGrpSpPr>
+        <p:cNvPr id="1" name=""/>
+        <p:cNvGrpSpPr/>
+        <p:nvPr/>
+      </p:nvGrpSpPr>
+      <p:grpSpPr>
+        <a:xfrm>
+          <a:off x="0" y="0"/>
+          <a:ext cx="0" cy="0"/>
+          <a:chOff x="0" y="0"/>
+          <a:chExt cx="0" cy="0"/>
+        </a:xfrm>
+      </p:grpSpPr>
+      <p:sp>
+        <p:nvSpPr>
+          <p:cNvPr id="2" name="텍스트 개체 틀 1"/>
+          <p:cNvSpPr>
+            <a:spLocks noGrp="1"/>
+          </p:cNvSpPr>
+          <p:nvPr>
+            <p:ph type="body" sz="quarter" idx="10"/>
+          </p:nvPr>
+        </p:nvSpPr>
+        <p:spPr/>
+        <p:txBody>
+          <a:bodyPr/>
+          <a:lstStyle/>
+          <a:p>
+            <a:r>
+              <a:rPr lang="ko-KR" altLang="en-US" dirty="0" smtClean="0"/>
+              <a:t>프로젝트 주제 </a:t>
+            </a:r>
+            <a:r>
+              <a:rPr lang="en-US" altLang="ko-KR" dirty="0"/>
+              <a:t>: </a:t>
+            </a:r>
+            <a:r>
+              <a:rPr lang="ko-KR" altLang="en-US"/>
+              <a:t>캐치 마인드</a:t>
+            </a:r>
+          </a:p>
+          <a:p>
+            <a:pPr lvl="1"/>
+            <a:r>
+              <a:rPr lang="ko-KR" altLang="en-US" dirty="0"/>
+              <a:t>필요 인원 </a:t>
+            </a:r>
+            <a:r>
+              <a:rPr lang="en-US" altLang="ko-KR" dirty="0"/>
+              <a:t>3</a:t>
+            </a:r>
+            <a:r>
+              <a:rPr lang="ko-KR" altLang="en-US"/>
+              <a:t>명 </a:t>
+            </a:r>
+            <a:r>
+              <a:rPr lang="en-US" altLang="ko-KR" dirty="0"/>
+              <a:t>(1</a:t>
+            </a:r>
+            <a:r>
+              <a:rPr lang="ko-KR" altLang="en-US"/>
+              <a:t>명 출제자</a:t>
+            </a:r>
+            <a:r>
+              <a:rPr lang="en-US" altLang="ko-KR" dirty="0"/>
+              <a:t>, 2</a:t>
+            </a:r>
+            <a:r>
+              <a:rPr lang="ko-KR" altLang="en-US"/>
+              <a:t>명 참가자</a:t>
+            </a:r>
+            <a:r>
+              <a:rPr lang="en-US" altLang="ko-KR" dirty="0" smtClean="0"/>
+              <a:t>)</a:t>
+            </a:r>
+            <a:endParaRPr lang="en-US" altLang="ko-KR" dirty="0"/>
+          </a:p>
+          <a:p>
+            <a:endParaRPr lang="en-US" altLang="ko-KR" dirty="0" smtClean="0"/>
+          </a:p>
+          <a:p>
+            <a:r>
+              <a:rPr lang="ko-KR" altLang="en-US" dirty="0" smtClean="0"/>
+              <a:t>게임 </a:t>
+            </a:r>
+            <a:r>
+              <a:rPr lang="ko-KR" altLang="en-US" dirty="0"/>
+              <a:t>방식</a:t>
+            </a:r>
+          </a:p>
+          <a:p>
+            <a:pPr lvl="1"/>
+            <a:r>
+              <a:rPr lang="ko-KR" altLang="en-US" dirty="0" smtClean="0"/>
+              <a:t>출제자는 분야</a:t>
+            </a:r>
+            <a:r>
+              <a:rPr lang="en-US" altLang="ko-KR" dirty="0" smtClean="0"/>
+              <a:t>&gt;</a:t>
+            </a:r>
+            <a:r>
+              <a:rPr lang="ko-KR" altLang="en-US"/>
+              <a:t>주제어 순서로 </a:t>
+            </a:r>
+            <a:r>
+              <a:rPr lang="ko-KR" altLang="en-US" smtClean="0"/>
+              <a:t>선택</a:t>
+            </a:r>
+            <a:endParaRPr lang="en-US" altLang="ko-KR" dirty="0" smtClean="0"/>
+          </a:p>
+          <a:p>
+            <a:pPr lvl="2"/>
+            <a:r>
+              <a:rPr lang="ko-KR" altLang="en-US" dirty="0" smtClean="0"/>
+              <a:t>각 </a:t>
+            </a:r>
+            <a:r>
+              <a:rPr lang="ko-KR" altLang="en-US" dirty="0"/>
+              <a:t>계층 별 </a:t>
+            </a:r>
+            <a:r>
+              <a:rPr lang="en-US" altLang="ko-KR" dirty="0"/>
+              <a:t>4</a:t>
+            </a:r>
+            <a:r>
+              <a:rPr lang="ko-KR" altLang="en-US"/>
+              <a:t>개씩 랜덤</a:t>
+            </a:r>
+          </a:p>
+          <a:p>
+            <a:pPr lvl="1"/>
+            <a:r>
+              <a:rPr lang="ko-KR" altLang="en-US" dirty="0"/>
+              <a:t>출제자가 그림 그리기 </a:t>
+            </a:r>
+            <a:r>
+              <a:rPr lang="ko-KR" altLang="en-US" dirty="0" smtClean="0"/>
+              <a:t>시작</a:t>
+            </a:r>
+            <a:endParaRPr lang="en-US" altLang="ko-KR" dirty="0"/>
+          </a:p>
+          <a:p>
+            <a:pPr lvl="1"/>
+            <a:r>
+              <a:rPr lang="ko-KR" altLang="en-US" dirty="0" smtClean="0"/>
+              <a:t>참가자는 </a:t>
+            </a:r>
+            <a:r>
+              <a:rPr lang="ko-KR" altLang="en-US" dirty="0"/>
+              <a:t>정답을 자신의 화면에 </a:t>
+            </a:r>
+            <a:r>
+              <a:rPr lang="ko-KR" altLang="en-US" dirty="0" smtClean="0"/>
+              <a:t>글씨로 작성하여 </a:t>
+            </a:r>
+            <a:r>
+              <a:rPr lang="ko-KR" altLang="en-US" dirty="0"/>
+              <a:t>제출</a:t>
+            </a:r>
+          </a:p>
+          <a:p>
+            <a:pPr lvl="1"/>
+            <a:r>
+              <a:rPr lang="ko-KR" altLang="en-US" dirty="0" smtClean="0"/>
+              <a:t>출제자는 </a:t>
+            </a:r>
+            <a:r>
+              <a:rPr lang="ko-KR" altLang="en-US" dirty="0"/>
+              <a:t>확인 후 </a:t>
+            </a:r>
+            <a:r>
+              <a:rPr lang="ko-KR" altLang="en-US" dirty="0" smtClean="0"/>
+              <a:t>정답</a:t>
+            </a:r>
+            <a:r>
+              <a:rPr lang="en-US" altLang="ko-KR" dirty="0" smtClean="0"/>
+              <a:t>/</a:t>
+            </a:r>
+            <a:r>
+              <a:rPr lang="ko-KR" altLang="en-US" smtClean="0"/>
+              <a:t>오답 </a:t>
+            </a:r>
+            <a:r>
+              <a:rPr lang="ko-KR" altLang="en-US" dirty="0"/>
+              <a:t>판단</a:t>
+            </a:r>
+          </a:p>
+          <a:p>
+            <a:pPr lvl="1"/>
+            <a:r>
+              <a:rPr lang="ko-KR" altLang="en-US" dirty="0" smtClean="0"/>
+              <a:t>정답 시 맞춘 </a:t>
+            </a:r>
+            <a:r>
+              <a:rPr lang="ko-KR" altLang="en-US" dirty="0"/>
+              <a:t>사람이 출제자가 되고</a:t>
+            </a:r>
+            <a:r>
+              <a:rPr lang="en-US" altLang="ko-KR" dirty="0"/>
+              <a:t>, </a:t>
+            </a:r>
+            <a:r>
+              <a:rPr lang="en-US" altLang="ko-KR" dirty="0" smtClean="0"/>
+              <a:t/>
+            </a:r>
+            <a:br>
+              <a:rPr lang="en-US" altLang="ko-KR" dirty="0" smtClean="0"/>
+            </a:br>
+            <a:r>
+              <a:rPr lang="ko-KR" altLang="en-US" smtClean="0"/>
+              <a:t>다시 </a:t>
+            </a:r>
+            <a:r>
+              <a:rPr lang="ko-KR" altLang="en-US"/>
+              <a:t>주제어 선택 화면으로 전환</a:t>
+            </a:r>
+          </a:p>
+          <a:p>
+            <a:pPr lvl="1"/>
+            <a:r>
+              <a:rPr lang="ko-KR" altLang="en-US" dirty="0"/>
+              <a:t>다음 라운드 </a:t>
+            </a:r>
+            <a:r>
+              <a:rPr lang="ko-KR" altLang="en-US" dirty="0" smtClean="0"/>
+              <a:t>시작</a:t>
+            </a:r>
+            <a:endParaRPr lang="en-US" altLang="ko-KR" dirty="0" smtClean="0"/>
+          </a:p>
+          <a:p>
+            <a:pPr lvl="1"/>
+            <a:endParaRPr lang="en-US" altLang="ko-KR" dirty="0"/>
+          </a:p>
+          <a:p>
+            <a:r>
+              <a:rPr lang="ko-KR" altLang="en-US" dirty="0" smtClean="0"/>
+              <a:t>점수 획득 방법</a:t>
+            </a:r>
+            <a:endParaRPr lang="en-US" altLang="ko-KR" dirty="0" smtClean="0"/>
+          </a:p>
+          <a:p>
+            <a:pPr lvl="1"/>
+            <a:r>
+              <a:rPr lang="ko-KR" altLang="en-US" dirty="0" smtClean="0"/>
+              <a:t>문제를 맞춘 참가자는 </a:t>
+            </a:r>
+            <a:r>
+              <a:rPr lang="en-US" altLang="ko-KR" dirty="0" smtClean="0"/>
+              <a:t>OO</a:t>
+            </a:r>
+            <a:r>
+              <a:rPr lang="ko-KR" altLang="en-US" smtClean="0"/>
+              <a:t>점의 점수 획득</a:t>
+            </a:r>
+            <a:endParaRPr lang="en-US" altLang="ko-KR" dirty="0" smtClean="0"/>
+          </a:p>
+          <a:p>
+            <a:pPr lvl="1"/>
+            <a:r>
+              <a:rPr lang="en-US" altLang="ko-KR" dirty="0" smtClean="0"/>
+              <a:t>1</a:t>
+            </a:r>
+            <a:r>
+              <a:rPr lang="ko-KR" altLang="en-US" smtClean="0"/>
+              <a:t>분의 그림 그리기 제한 시간동안 맞춘 사람이 있는 경우에는 출제자 </a:t>
+            </a:r>
+            <a:r>
+              <a:rPr lang="en-US" altLang="ko-KR" dirty="0" smtClean="0"/>
+              <a:t>OO</a:t>
+            </a:r>
+            <a:r>
+              <a:rPr lang="ko-KR" altLang="en-US" smtClean="0"/>
+              <a:t>점 획득</a:t>
+            </a:r>
+            <a:endParaRPr lang="en-US" altLang="ko-KR" dirty="0" smtClean="0"/>
+          </a:p>
+          <a:p>
+            <a:pPr lvl="1"/>
+            <a:r>
+              <a:rPr lang="ko-KR" altLang="en-US" dirty="0" smtClean="0"/>
+              <a:t>맞춘 사람이 없는 경우에는 출제자 </a:t>
+            </a:r>
+            <a:r>
+              <a:rPr lang="en-US" altLang="ko-KR" dirty="0" smtClean="0"/>
+              <a:t>OO</a:t>
+            </a:r>
+            <a:r>
+              <a:rPr lang="ko-KR" altLang="en-US" smtClean="0"/>
+              <a:t>점 감점</a:t>
+            </a:r>
+            <a:endParaRPr lang="en-US" altLang="ko-KR" dirty="0" smtClean="0"/>
+          </a:p>
+          <a:p>
+            <a:pPr lvl="1"/>
+            <a:r>
+              <a:rPr lang="en-US" altLang="ko-KR" dirty="0" smtClean="0"/>
+              <a:t>5</a:t>
+            </a:r>
+            <a:r>
+              <a:rPr lang="ko-KR" altLang="en-US" smtClean="0"/>
+              <a:t>라운드 이후 각 인원 점수를 합산하여 </a:t>
+            </a:r>
+            <a:r>
+              <a:rPr lang="en-US" altLang="ko-KR" dirty="0" smtClean="0"/>
+              <a:t>1~3</a:t>
+            </a:r>
+            <a:r>
+              <a:rPr lang="ko-KR" altLang="en-US" smtClean="0"/>
+              <a:t>등 표시</a:t>
+            </a:r>
+            <a:endParaRPr lang="ko-KR" altLang="en-US" dirty="0"/>
+          </a:p>
+        </p:txBody>
+      </p:sp>
+      <p:sp>
+        <p:nvSpPr>
+          <p:cNvPr id="3" name="TextBox 2"/>
+          <p:cNvSpPr txBox="1"/>
+          <p:nvPr/>
+        </p:nvSpPr>
+        <p:spPr>
+          <a:xfrm>
+            <a:off x="244862" y="238662"/>
+            <a:ext cx="14190667" cy="923330"/>
+          </a:xfrm>
+          <a:prstGeom prst="rect">
+            <a:avLst/>
+          </a:prstGeom>
+          <a:noFill/>
+        </p:spPr>
+        <p:txBody>
+          <a:bodyPr wrap="square" rtlCol="0">
+            <a:spAutoFit/>
+          </a:bodyPr>
+          <a:lstStyle/>
+          <a:p>
+            <a:r>
+              <a:rPr lang="en-US" altLang="ko-KR" sz="5400" b="1" dirty="0">
+                <a:solidFill>
+                  <a:schemeClr val="bg1"/>
+                </a:solidFill>
+                <a:latin typeface="LG스마트체2.0 Regular" panose="020B0600000101010101" pitchFamily="50" charset="-127"/>
+                <a:ea typeface="LG스마트체2.0 Regular" panose="020B0600000101010101" pitchFamily="50" charset="-127"/>
+              </a:rPr>
+              <a:t>1. </a:t>
+            </a:r>
+            <a:r>
+              <a:rPr lang="ko-KR" altLang="en-US" sz="5400" b="1" dirty="0">
+                <a:solidFill>
+                  <a:schemeClr val="bg1"/>
+                </a:solidFill>
+                <a:latin typeface="LG스마트체2.0 Regular" panose="020B0600000101010101" pitchFamily="50" charset="-127"/>
+                <a:ea typeface="LG스마트체2.0 Regular" panose="020B0600000101010101" pitchFamily="50" charset="-127"/>
+              </a:rPr>
+              <a:t>주제 및 결과 요약</a:t>
+            </a:r>
+          </a:p>
+        </p:txBody>
+      </p:sp>
+      <p:pic>
+        <p:nvPicPr>
+          <p:cNvPr id="5" name="그림 4"/>
+          <p:cNvPicPr>
+            <a:picLocks noChangeAspect="1"/>
+          </p:cNvPicPr>
+          <p:nvPr/>
+        </p:nvPicPr>
+        <p:blipFill>
+          <a:blip r:embed="rId2"/>
+          <a:stretch>
+            <a:fillRect/>
+          </a:stretch>
+        </p:blipFill>
+        <p:spPr>
+          <a:xfrm>
+            <a:off x="8270081" y="1767433"/>
+            <a:ext cx="8684419" cy="4884986"/>
+          </a:xfrm>
+          <a:prstGeom prst="rect">
+            <a:avLst/>
+          </a:prstGeom>
+        </p:spPr>
+      </p:pic>
+      <p:sp>
+        <p:nvSpPr>
+          <p:cNvPr id="6" name="직사각형 5"/>
+          <p:cNvSpPr/>
+          <p:nvPr/>
+        </p:nvSpPr>
+        <p:spPr>
+          <a:xfrm>
+            <a:off x="884420" y="2488367"/>
+            <a:ext cx="11092721" cy="1124263"/>
+          </a:xfrm>
+          <a:prstGeom prst="rect">
+            <a:avLst/>
+          </a:prstGeom>
+          <a:solidFill>
+            <a:srgbClr val="FFFF00"/>
+          </a:solidFill>
+        </p:spPr>
+        <p:style>
+          <a:lnRef idx="2">
+            <a:schemeClr val="accent1">
+              <a:shade val="50000"/>
+            </a:schemeClr>
+          </a:lnRef>
+          <a:fillRef idx="1">
+            <a:schemeClr val="accent1"/>
+          </a:fillRef>
+          <a:effectRef idx="0">
+            <a:schemeClr val="accent1"/>
+          </a:effectRef>
+          <a:fontRef idx="minor">
+            <a:schemeClr val="lt1"/>
+          </a:fontRef>
+        </p:style>
+        <p:txBody>
+          <a:bodyPr rtlCol="0" anchor="ctr"/>
+          <a:lstStyle/>
+          <a:p>
+            <a:r>
+              <a:rPr lang="ko-KR" altLang="en-US" sz="3200" b="1" dirty="0">
+                <a:solidFill>
+                  <a:schemeClr val="tx1"/>
+                </a:solidFill>
+              </a:rPr>
+              <a:t>간략하게 </a:t>
+            </a:r>
+            <a:r>
+              <a:rPr lang="en-US" altLang="ko-KR" sz="3200" b="1" dirty="0">
+                <a:solidFill>
+                  <a:schemeClr val="tx1"/>
+                </a:solidFill>
+              </a:rPr>
+              <a:t>1 </a:t>
+            </a:r>
+            <a:r>
+              <a:rPr lang="ko-KR" altLang="en-US" sz="3200" b="1" dirty="0">
+                <a:solidFill>
+                  <a:schemeClr val="tx1"/>
+                </a:solidFill>
+              </a:rPr>
+              <a:t>페이지에 프로젝트의 주제</a:t>
+            </a:r>
+            <a:r>
+              <a:rPr lang="en-US" altLang="ko-KR" sz="3200" b="1" dirty="0">
+                <a:solidFill>
+                  <a:schemeClr val="tx1"/>
+                </a:solidFill>
+              </a:rPr>
+              <a:t>, </a:t>
+            </a:r>
+            <a:r>
+              <a:rPr lang="ko-KR" altLang="en-US" sz="3200" b="1" dirty="0">
+                <a:solidFill>
+                  <a:schemeClr val="tx1"/>
+                </a:solidFill>
+              </a:rPr>
+              <a:t>목표</a:t>
+            </a:r>
+            <a:r>
+              <a:rPr lang="en-US" altLang="ko-KR" sz="3200" b="1" dirty="0">
+                <a:solidFill>
+                  <a:schemeClr val="tx1"/>
+                </a:solidFill>
+              </a:rPr>
+              <a:t>, </a:t>
+            </a:r>
+            <a:r>
+              <a:rPr lang="ko-KR" altLang="en-US" sz="3200" b="1" dirty="0">
+                <a:solidFill>
+                  <a:schemeClr val="tx1"/>
+                </a:solidFill>
+              </a:rPr>
+              <a:t>결과를 요약</a:t>
+            </a:r>
+          </a:p>
+        </p:txBody>
+      </p:sp>
+    </p:spTree>
+    <p:extLst>
+      <p:ext uri="{BB962C8B-B14F-4D97-AF65-F5344CB8AC3E}">
+        <p14:creationId xmlns:p14="http://schemas.microsoft.com/office/powerpoint/2010/main" val="279983564"/>
+      </p:ext>
+    </p:extLst>
+  </p:cSld>
+  <p:clrMapOvr>
+    <a:masterClrMapping/>
+  </p:clrMapOvr>
+  <p:timing>
+    <p:tnLst>
+      <p:par>
+        <p:cTn id="1" dur="indefinite" restart="never" nodeType="tmRoot"/>
+      </p:par>
+    </p:tnLst>
+  </p:timing>
+</p:sld>
+</file>
+
+<file path=ppt/slides/slide4.xml><?xml version="1.0" encoding="utf-8"?>
+<p:sld xmlns:a="http://schemas.openxmlformats.org/drawingml/2006/main" xmlns:r="http://schemas.openxmlformats.org/officeDocument/2006/relationships" xmlns:p="http://schemas.openxmlformats.org/presentationml/2006/main">
+  <p:cSld>
+    <p:spTree>
+      <p:nvGrpSpPr>
+        <p:cNvPr id="1" name=""/>
+        <p:cNvGrpSpPr/>
+        <p:nvPr/>
+      </p:nvGrpSpPr>
+      <p:grpSpPr>
+        <a:xfrm>
+          <a:off x="0" y="0"/>
+          <a:ext cx="0" cy="0"/>
+          <a:chOff x="0" y="0"/>
+          <a:chExt cx="0" cy="0"/>
+        </a:xfrm>
+      </p:grpSpPr>
+      <p:sp>
+        <p:nvSpPr>
+          <p:cNvPr id="2" name="텍스트 개체 틀 1"/>
+          <p:cNvSpPr>
+            <a:spLocks noGrp="1"/>
+          </p:cNvSpPr>
+          <p:nvPr>
+            <p:ph type="body" sz="quarter" idx="10"/>
+          </p:nvPr>
+        </p:nvSpPr>
+        <p:spPr/>
+        <p:txBody>
+          <a:bodyPr/>
+          <a:lstStyle/>
+          <a:p>
+            <a:endParaRPr lang="ko-KR" altLang="en-US"/>
+          </a:p>
+        </p:txBody>
+      </p:sp>
+      <p:sp>
+        <p:nvSpPr>
+          <p:cNvPr id="3" name="TextBox 2"/>
+          <p:cNvSpPr txBox="1"/>
+          <p:nvPr/>
+        </p:nvSpPr>
+        <p:spPr>
+          <a:xfrm>
+            <a:off x="244862" y="238662"/>
+            <a:ext cx="14190667" cy="923330"/>
+          </a:xfrm>
+          <a:prstGeom prst="rect">
+            <a:avLst/>
+          </a:prstGeom>
+          <a:noFill/>
+        </p:spPr>
+        <p:txBody>
+          <a:bodyPr wrap="square" rtlCol="0">
+            <a:spAutoFit/>
+          </a:bodyPr>
+          <a:lstStyle/>
+          <a:p>
+            <a:r>
+              <a:rPr lang="en-US" altLang="ko-KR" sz="5400" b="1" dirty="0">
+                <a:solidFill>
+                  <a:schemeClr val="bg1"/>
+                </a:solidFill>
+                <a:latin typeface="LG스마트체2.0 Regular" panose="020B0600000101010101" pitchFamily="50" charset="-127"/>
+                <a:ea typeface="LG스마트체2.0 Regular" panose="020B0600000101010101" pitchFamily="50" charset="-127"/>
+              </a:rPr>
+              <a:t>2. </a:t>
+            </a:r>
+            <a:r>
+              <a:rPr lang="ko-KR" altLang="en-US" sz="5400" b="1" dirty="0">
+                <a:solidFill>
+                  <a:schemeClr val="bg1"/>
+                </a:solidFill>
+                <a:latin typeface="LG스마트체2.0 Regular" panose="020B0600000101010101" pitchFamily="50" charset="-127"/>
+                <a:ea typeface="LG스마트체2.0 Regular" panose="020B0600000101010101" pitchFamily="50" charset="-127"/>
+              </a:rPr>
+              <a:t>개발 목표 및 개발 결과</a:t>
+            </a:r>
+          </a:p>
+        </p:txBody>
+      </p:sp>
+      <p:sp>
+        <p:nvSpPr>
+          <p:cNvPr id="4" name="직사각형 3"/>
+          <p:cNvSpPr/>
+          <p:nvPr/>
+        </p:nvSpPr>
+        <p:spPr>
+          <a:xfrm>
+            <a:off x="884420" y="2488367"/>
+            <a:ext cx="11092721" cy="2548328"/>
+          </a:xfrm>
+          <a:prstGeom prst="rect">
+            <a:avLst/>
+          </a:prstGeom>
+          <a:solidFill>
+            <a:srgbClr val="FFFF00"/>
+          </a:solidFill>
+        </p:spPr>
+        <p:style>
+          <a:lnRef idx="2">
+            <a:schemeClr val="accent1">
+              <a:shade val="50000"/>
+            </a:schemeClr>
+          </a:lnRef>
+          <a:fillRef idx="1">
+            <a:schemeClr val="accent1"/>
+          </a:fillRef>
+          <a:effectRef idx="0">
+            <a:schemeClr val="accent1"/>
+          </a:effectRef>
+          <a:fontRef idx="minor">
+            <a:schemeClr val="lt1"/>
+          </a:fontRef>
+        </p:style>
+        <p:txBody>
+          <a:bodyPr rtlCol="0" anchor="ctr"/>
+          <a:lstStyle/>
+          <a:p>
+            <a:pPr marL="457200" indent="-457200">
+              <a:buFontTx/>
+              <a:buChar char="-"/>
+            </a:pPr>
+            <a:r>
+              <a:rPr lang="ko-KR" altLang="en-US" sz="3200" b="1" dirty="0">
+                <a:solidFill>
+                  <a:schemeClr val="tx1"/>
+                </a:solidFill>
+              </a:rPr>
+              <a:t>처음 기획한 개발 목표</a:t>
+            </a:r>
+            <a:endParaRPr lang="en-US" altLang="ko-KR" sz="3200" b="1" dirty="0">
+              <a:solidFill>
+                <a:schemeClr val="tx1"/>
+              </a:solidFill>
+            </a:endParaRPr>
+          </a:p>
+          <a:p>
+            <a:pPr marL="457200" indent="-457200">
+              <a:buFontTx/>
+              <a:buChar char="-"/>
+            </a:pPr>
+            <a:r>
+              <a:rPr lang="ko-KR" altLang="en-US" sz="3200" b="1" dirty="0">
+                <a:solidFill>
+                  <a:schemeClr val="tx1"/>
+                </a:solidFill>
+              </a:rPr>
+              <a:t>실제 개발 결과 소개</a:t>
+            </a:r>
+            <a:endParaRPr lang="en-US" altLang="ko-KR" sz="3200" b="1" dirty="0">
+              <a:solidFill>
+                <a:schemeClr val="tx1"/>
+              </a:solidFill>
+            </a:endParaRPr>
+          </a:p>
+          <a:p>
+            <a:pPr marL="457200" indent="-457200">
+              <a:buFontTx/>
+              <a:buChar char="-"/>
+            </a:pPr>
+            <a:r>
+              <a:rPr lang="ko-KR" altLang="en-US" sz="3200" b="1" dirty="0">
+                <a:solidFill>
+                  <a:schemeClr val="tx1"/>
+                </a:solidFill>
+              </a:rPr>
+              <a:t>가급적 결과 내용을 상세히 기술</a:t>
+            </a:r>
+            <a:endParaRPr lang="en-US" altLang="ko-KR" sz="3200" b="1" dirty="0">
+              <a:solidFill>
+                <a:schemeClr val="tx1"/>
+              </a:solidFill>
+            </a:endParaRPr>
+          </a:p>
+          <a:p>
+            <a:pPr marL="457200" indent="-457200">
+              <a:buFontTx/>
+              <a:buChar char="-"/>
+            </a:pPr>
+            <a:r>
+              <a:rPr lang="ko-KR" altLang="en-US" sz="3200" b="1" dirty="0">
+                <a:solidFill>
+                  <a:schemeClr val="tx1"/>
+                </a:solidFill>
+              </a:rPr>
+              <a:t>페이지 수 무관</a:t>
+            </a:r>
+          </a:p>
+        </p:txBody>
+      </p:sp>
+    </p:spTree>
+    <p:extLst>
+      <p:ext uri="{BB962C8B-B14F-4D97-AF65-F5344CB8AC3E}">
+        <p14:creationId xmlns:p14="http://schemas.microsoft.com/office/powerpoint/2010/main" val="1608528413"/>
+      </p:ext>
+    </p:extLst>
+  </p:cSld>
+  <p:clrMapOvr>
+    <a:masterClrMapping/>
+  </p:clrMapOvr>
+  <p:timing>
+    <p:tnLst>
+      <p:par>
+        <p:cTn id="1" dur="indefinite" restart="never" nodeType="tmRoot"/>
+      </p:par>
+    </p:tnLst>
+  </p:timing>
+</p:sld>
+</file>
+
+<file path=ppt/slides/slide5.xml><?xml version="1.0" encoding="utf-8"?>
+<p:sld xmlns:a="http://schemas.openxmlformats.org/drawingml/2006/main" xmlns:r="http://schemas.openxmlformats.org/officeDocument/2006/relationships" xmlns:p="http://schemas.openxmlformats.org/presentationml/2006/main">
+  <p:cSld>
+    <p:spTree>
+      <p:nvGrpSpPr>
+        <p:cNvPr id="1" name=""/>
+        <p:cNvGrpSpPr/>
+        <p:nvPr/>
+      </p:nvGrpSpPr>
+      <p:grpSpPr>
+        <a:xfrm>
+          <a:off x="0" y="0"/>
+          <a:ext cx="0" cy="0"/>
+          <a:chOff x="0" y="0"/>
+          <a:chExt cx="0" cy="0"/>
+        </a:xfrm>
+      </p:grpSpPr>
+      <p:sp>
+        <p:nvSpPr>
+          <p:cNvPr id="2" name="텍스트 개체 틀 1"/>
+          <p:cNvSpPr>
+            <a:spLocks noGrp="1"/>
+          </p:cNvSpPr>
+          <p:nvPr>
+            <p:ph type="body" sz="quarter" idx="10"/>
+          </p:nvPr>
+        </p:nvSpPr>
+        <p:spPr/>
+        <p:txBody>
+          <a:bodyPr/>
+          <a:lstStyle/>
+          <a:p>
+            <a:r>
+              <a:rPr lang="ko-KR" altLang="en-US" dirty="0" smtClean="0"/>
+              <a:t>다중 클라이언트 실시간 </a:t>
+            </a:r>
+            <a:r>
+              <a:rPr lang="en-US" altLang="ko-KR" dirty="0" smtClean="0"/>
+              <a:t>UDP </a:t>
+            </a:r>
+            <a:r>
+              <a:rPr lang="ko-KR" altLang="en-US" smtClean="0"/>
+              <a:t>통신</a:t>
+            </a:r>
+            <a:endParaRPr lang="en-US" altLang="ko-KR" dirty="0" smtClean="0"/>
+          </a:p>
+          <a:p>
+            <a:r>
+              <a:rPr lang="ko-KR" altLang="en-US" dirty="0" smtClean="0"/>
+              <a:t>출제자와 참가자 화면 동기화</a:t>
+            </a:r>
+            <a:endParaRPr lang="en-US" altLang="ko-KR" dirty="0" smtClean="0"/>
+          </a:p>
+          <a:p>
+            <a:endParaRPr lang="en-US" altLang="ko-KR" dirty="0" smtClean="0"/>
+          </a:p>
+          <a:p>
+            <a:endParaRPr lang="ko-KR" altLang="en-US" dirty="0"/>
+          </a:p>
+        </p:txBody>
+      </p:sp>
+      <p:sp>
+        <p:nvSpPr>
+          <p:cNvPr id="3" name="TextBox 2"/>
+          <p:cNvSpPr txBox="1"/>
+          <p:nvPr/>
+        </p:nvSpPr>
+        <p:spPr>
+          <a:xfrm>
+            <a:off x="244862" y="238662"/>
+            <a:ext cx="14190667" cy="923330"/>
+          </a:xfrm>
+          <a:prstGeom prst="rect">
+            <a:avLst/>
+          </a:prstGeom>
+          <a:noFill/>
+        </p:spPr>
+        <p:txBody>
+          <a:bodyPr wrap="square" rtlCol="0">
+            <a:spAutoFit/>
+          </a:bodyPr>
+          <a:lstStyle/>
+          <a:p>
+            <a:r>
+              <a:rPr lang="en-US" altLang="ko-KR" sz="5400" b="1" dirty="0">
+                <a:solidFill>
+                  <a:schemeClr val="bg1"/>
+                </a:solidFill>
+                <a:latin typeface="LG스마트체2.0 Regular" panose="020B0600000101010101" pitchFamily="50" charset="-127"/>
+                <a:ea typeface="LG스마트체2.0 Regular" panose="020B0600000101010101" pitchFamily="50" charset="-127"/>
+              </a:rPr>
+              <a:t>3. </a:t>
+            </a:r>
+            <a:r>
+              <a:rPr lang="ko-KR" altLang="en-US" sz="5400" b="1" dirty="0">
+                <a:solidFill>
+                  <a:schemeClr val="bg1"/>
+                </a:solidFill>
+                <a:latin typeface="LG스마트체2.0 Regular" panose="020B0600000101010101" pitchFamily="50" charset="-127"/>
+                <a:ea typeface="LG스마트체2.0 Regular" panose="020B0600000101010101" pitchFamily="50" charset="-127"/>
+              </a:rPr>
+              <a:t>핵심 기술</a:t>
+            </a:r>
+          </a:p>
+        </p:txBody>
+      </p:sp>
+      <p:sp>
+        <p:nvSpPr>
+          <p:cNvPr id="4" name="직사각형 3"/>
+          <p:cNvSpPr/>
+          <p:nvPr/>
+        </p:nvSpPr>
+        <p:spPr>
+          <a:xfrm>
+            <a:off x="-690380" y="7570611"/>
+            <a:ext cx="11092721" cy="2188564"/>
+          </a:xfrm>
+          <a:prstGeom prst="rect">
+            <a:avLst/>
+          </a:prstGeom>
+          <a:solidFill>
+            <a:srgbClr val="FFFF00"/>
+          </a:solidFill>
+        </p:spPr>
+        <p:style>
+          <a:lnRef idx="2">
+            <a:schemeClr val="accent1">
+              <a:shade val="50000"/>
+            </a:schemeClr>
+          </a:lnRef>
+          <a:fillRef idx="1">
+            <a:schemeClr val="accent1"/>
+          </a:fillRef>
+          <a:effectRef idx="0">
+            <a:schemeClr val="accent1"/>
+          </a:effectRef>
+          <a:fontRef idx="minor">
+            <a:schemeClr val="lt1"/>
+          </a:fontRef>
+        </p:style>
+        <p:txBody>
+          <a:bodyPr rtlCol="0" anchor="ctr"/>
+          <a:lstStyle/>
+          <a:p>
+            <a:pPr marL="457200" indent="-457200">
+              <a:buFontTx/>
+              <a:buChar char="-"/>
+            </a:pPr>
+            <a:r>
+              <a:rPr lang="ko-KR" altLang="en-US" sz="3200" b="1" dirty="0">
+                <a:solidFill>
+                  <a:schemeClr val="tx1"/>
+                </a:solidFill>
+              </a:rPr>
+              <a:t>개발에 사용된 가장 핵심적으로 구현된 기술 소개</a:t>
+            </a:r>
+            <a:endParaRPr lang="en-US" altLang="ko-KR" sz="3200" b="1" dirty="0">
+              <a:solidFill>
+                <a:schemeClr val="tx1"/>
+              </a:solidFill>
+            </a:endParaRPr>
+          </a:p>
+          <a:p>
+            <a:pPr marL="457200" indent="-457200">
+              <a:buFontTx/>
+              <a:buChar char="-"/>
+            </a:pPr>
+            <a:r>
+              <a:rPr lang="ko-KR" altLang="en-US" sz="3200" b="1" dirty="0">
+                <a:solidFill>
+                  <a:schemeClr val="tx1"/>
+                </a:solidFill>
+              </a:rPr>
+              <a:t>기술 내용 또는 소스코드 등 다양한 방법으로 핵심을 소개</a:t>
+            </a:r>
+            <a:endParaRPr lang="en-US" altLang="ko-KR" sz="3200" b="1" dirty="0">
+              <a:solidFill>
+                <a:schemeClr val="tx1"/>
+              </a:solidFill>
+            </a:endParaRPr>
+          </a:p>
+          <a:p>
+            <a:pPr marL="457200" indent="-457200">
+              <a:buFontTx/>
+              <a:buChar char="-"/>
+            </a:pPr>
+            <a:r>
+              <a:rPr lang="ko-KR" altLang="en-US" sz="3200" b="1" dirty="0">
+                <a:solidFill>
+                  <a:schemeClr val="tx1"/>
+                </a:solidFill>
+              </a:rPr>
+              <a:t>페이지 수 무관</a:t>
+            </a:r>
+          </a:p>
+        </p:txBody>
+      </p:sp>
+    </p:spTree>
+    <p:extLst>
+      <p:ext uri="{BB962C8B-B14F-4D97-AF65-F5344CB8AC3E}">
+        <p14:creationId xmlns:p14="http://schemas.microsoft.com/office/powerpoint/2010/main" val="3138293880"/>
+      </p:ext>
+    </p:extLst>
+  </p:cSld>
+  <p:clrMapOvr>
+    <a:masterClrMapping/>
+  </p:clrMapOvr>
+  <p:timing>
+    <p:tnLst>
+      <p:par>
+        <p:cTn id="1" dur="indefinite" restart="never" nodeType="tmRoot"/>
+      </p:par>
+    </p:tnLst>
+  </p:timing>
+</p:sld>
+</file>
+
+<file path=ppt/slides/slide6.xml><?xml version="1.0" encoding="utf-8"?>
+<p:sld xmlns:a="http://schemas.openxmlformats.org/drawingml/2006/main" xmlns:r="http://schemas.openxmlformats.org/officeDocument/2006/relationships" xmlns:p="http://schemas.openxmlformats.org/presentationml/2006/main">
+  <p:cSld>
+    <p:spTree>
+      <p:nvGrpSpPr>
+        <p:cNvPr id="1" name=""/>
+        <p:cNvGrpSpPr/>
+        <p:nvPr/>
+      </p:nvGrpSpPr>
+      <p:grpSpPr>
+        <a:xfrm>
+          <a:off x="0" y="0"/>
+          <a:ext cx="0" cy="0"/>
+          <a:chOff x="0" y="0"/>
+          <a:chExt cx="0" cy="0"/>
+        </a:xfrm>
+      </p:grpSpPr>
+      <p:sp>
+        <p:nvSpPr>
+          <p:cNvPr id="2" name="텍스트 개체 틀 1"/>
+          <p:cNvSpPr>
+            <a:spLocks noGrp="1"/>
+          </p:cNvSpPr>
+          <p:nvPr>
+            <p:ph type="body" sz="quarter" idx="10"/>
+          </p:nvPr>
+        </p:nvSpPr>
+        <p:spPr/>
+        <p:txBody>
+          <a:bodyPr/>
+          <a:lstStyle/>
+          <a:p>
+            <a:endParaRPr lang="ko-KR" altLang="en-US"/>
+          </a:p>
+        </p:txBody>
+      </p:sp>
+      <p:sp>
+        <p:nvSpPr>
+          <p:cNvPr id="3" name="TextBox 2"/>
+          <p:cNvSpPr txBox="1"/>
+          <p:nvPr/>
+        </p:nvSpPr>
+        <p:spPr>
+          <a:xfrm>
+            <a:off x="244862" y="238662"/>
+            <a:ext cx="14190667" cy="923330"/>
+          </a:xfrm>
+          <a:prstGeom prst="rect">
+            <a:avLst/>
+          </a:prstGeom>
+          <a:noFill/>
+        </p:spPr>
+        <p:txBody>
+          <a:bodyPr wrap="square" rtlCol="0">
+            <a:spAutoFit/>
+          </a:bodyPr>
+          <a:lstStyle/>
+          <a:p>
+            <a:r>
+              <a:rPr lang="en-US" altLang="ko-KR" sz="5400" b="1" dirty="0">
+                <a:solidFill>
+                  <a:schemeClr val="bg1"/>
+                </a:solidFill>
+                <a:latin typeface="LG스마트체2.0 Regular" panose="020B0600000101010101" pitchFamily="50" charset="-127"/>
+                <a:ea typeface="LG스마트체2.0 Regular" panose="020B0600000101010101" pitchFamily="50" charset="-127"/>
+              </a:rPr>
+              <a:t>4. </a:t>
+            </a:r>
+            <a:r>
+              <a:rPr lang="ko-KR" altLang="en-US" sz="5400" b="1" dirty="0">
+                <a:solidFill>
+                  <a:schemeClr val="bg1"/>
+                </a:solidFill>
+                <a:latin typeface="LG스마트체2.0 Regular" panose="020B0600000101010101" pitchFamily="50" charset="-127"/>
+                <a:ea typeface="LG스마트체2.0 Regular" panose="020B0600000101010101" pitchFamily="50" charset="-127"/>
+              </a:rPr>
+              <a:t>결과 분석 및 기대 효과</a:t>
+            </a:r>
+          </a:p>
+        </p:txBody>
+      </p:sp>
+      <p:sp>
+        <p:nvSpPr>
+          <p:cNvPr id="4" name="직사각형 3"/>
+          <p:cNvSpPr/>
+          <p:nvPr/>
+        </p:nvSpPr>
+        <p:spPr>
+          <a:xfrm>
+            <a:off x="884420" y="2488367"/>
+            <a:ext cx="11092721" cy="2458388"/>
+          </a:xfrm>
+          <a:prstGeom prst="rect">
+            <a:avLst/>
+          </a:prstGeom>
+          <a:solidFill>
+            <a:srgbClr val="FFFF00"/>
+          </a:solidFill>
+        </p:spPr>
+        <p:style>
+          <a:lnRef idx="2">
+            <a:schemeClr val="accent1">
+              <a:shade val="50000"/>
+            </a:schemeClr>
+          </a:lnRef>
+          <a:fillRef idx="1">
+            <a:schemeClr val="accent1"/>
+          </a:fillRef>
+          <a:effectRef idx="0">
+            <a:schemeClr val="accent1"/>
+          </a:effectRef>
+          <a:fontRef idx="minor">
+            <a:schemeClr val="lt1"/>
+          </a:fontRef>
+        </p:style>
+        <p:txBody>
+          <a:bodyPr rtlCol="0" anchor="ctr"/>
+          <a:lstStyle/>
+          <a:p>
+            <a:pPr marL="457200" indent="-457200">
+              <a:buFontTx/>
+              <a:buChar char="-"/>
+            </a:pPr>
+            <a:r>
+              <a:rPr lang="ko-KR" altLang="en-US" sz="3200" b="1" dirty="0">
+                <a:solidFill>
+                  <a:schemeClr val="tx1"/>
+                </a:solidFill>
+              </a:rPr>
+              <a:t>결과물에 대한 성능측정 또는 목표달성 여부 등 평가</a:t>
+            </a:r>
+            <a:endParaRPr lang="en-US" altLang="ko-KR" sz="3200" b="1" dirty="0">
+              <a:solidFill>
+                <a:schemeClr val="tx1"/>
+              </a:solidFill>
+            </a:endParaRPr>
+          </a:p>
+          <a:p>
+            <a:pPr marL="457200" indent="-457200">
+              <a:buFontTx/>
+              <a:buChar char="-"/>
+            </a:pPr>
+            <a:r>
+              <a:rPr lang="ko-KR" altLang="en-US" sz="3200" b="1" dirty="0">
+                <a:solidFill>
+                  <a:schemeClr val="tx1"/>
+                </a:solidFill>
+              </a:rPr>
+              <a:t>성능이 낮을 경우 원인 분석 및 개선책 검토 기록</a:t>
+            </a:r>
+            <a:endParaRPr lang="en-US" altLang="ko-KR" sz="3200" b="1" dirty="0">
+              <a:solidFill>
+                <a:schemeClr val="tx1"/>
+              </a:solidFill>
+            </a:endParaRPr>
+          </a:p>
+          <a:p>
+            <a:pPr marL="457200" indent="-457200">
+              <a:buFontTx/>
+              <a:buChar char="-"/>
+            </a:pPr>
+            <a:r>
+              <a:rPr lang="ko-KR" altLang="en-US" sz="3200" b="1" dirty="0">
+                <a:solidFill>
+                  <a:schemeClr val="tx1"/>
+                </a:solidFill>
+              </a:rPr>
+              <a:t>성능이 만족했을 경우 향후 활용 가능한 기대효과 기록</a:t>
+            </a:r>
+            <a:endParaRPr lang="en-US" altLang="ko-KR" sz="3200" b="1" dirty="0">
+              <a:solidFill>
+                <a:schemeClr val="tx1"/>
+              </a:solidFill>
+            </a:endParaRPr>
+          </a:p>
+          <a:p>
+            <a:pPr marL="457200" indent="-457200">
+              <a:buFontTx/>
+              <a:buChar char="-"/>
+            </a:pPr>
+            <a:r>
+              <a:rPr lang="ko-KR" altLang="en-US" sz="3200" b="1" dirty="0">
+                <a:solidFill>
+                  <a:schemeClr val="tx1"/>
+                </a:solidFill>
+              </a:rPr>
+              <a:t>가급적 </a:t>
+            </a:r>
+            <a:r>
+              <a:rPr lang="en-US" altLang="ko-KR" sz="3200" b="1" dirty="0">
+                <a:solidFill>
+                  <a:schemeClr val="tx1"/>
+                </a:solidFill>
+              </a:rPr>
+              <a:t>1 </a:t>
+            </a:r>
+            <a:r>
+              <a:rPr lang="ko-KR" altLang="en-US" sz="3200" b="1" dirty="0">
+                <a:solidFill>
+                  <a:schemeClr val="tx1"/>
+                </a:solidFill>
+              </a:rPr>
+              <a:t>페이지로 정리</a:t>
+            </a:r>
+          </a:p>
+        </p:txBody>
+      </p:sp>
+    </p:spTree>
+    <p:extLst>
+      <p:ext uri="{BB962C8B-B14F-4D97-AF65-F5344CB8AC3E}">
+        <p14:creationId xmlns:p14="http://schemas.microsoft.com/office/powerpoint/2010/main" val="442290376"/>
+      </p:ext>
+    </p:extLst>
+  </p:cSld>
+  <p:clrMapOvr>
+    <a:masterClrMapping/>
+  </p:clrMapOvr>
+  <p:timing>
+    <p:tnLst>
+      <p:par>
+        <p:cTn id="1" dur="indefinite" restart="never" nodeType="tmRoot"/>
+      </p:par>
+    </p:tnLst>
+  </p:timing>
+</p:sld>
+</file>
+
+<file path=ppt/slides/slide7.xml><?xml version="1.0" encoding="utf-8"?>
+<p:sld xmlns:a="http://schemas.openxmlformats.org/drawingml/2006/main" xmlns:r="http://schemas.openxmlformats.org/officeDocument/2006/relationships" xmlns:p="http://schemas.openxmlformats.org/presentationml/2006/main">
+  <p:cSld>
+    <p:spTree>
+      <p:nvGrpSpPr>
+        <p:cNvPr id="1" name=""/>
+        <p:cNvGrpSpPr/>
+        <p:nvPr/>
+      </p:nvGrpSpPr>
+      <p:grpSpPr>
+        <a:xfrm>
+          <a:off x="0" y="0"/>
+          <a:ext cx="0" cy="0"/>
+          <a:chOff x="0" y="0"/>
+          <a:chExt cx="0" cy="0"/>
+        </a:xfrm>
+      </p:grpSpPr>
+      <p:sp>
+        <p:nvSpPr>
+          <p:cNvPr id="2" name="텍스트 개체 틀 1"/>
+          <p:cNvSpPr>
+            <a:spLocks noGrp="1"/>
+          </p:cNvSpPr>
+          <p:nvPr>
+            <p:ph type="body" sz="quarter" idx="10"/>
+          </p:nvPr>
+        </p:nvSpPr>
+        <p:spPr/>
+        <p:txBody>
+          <a:bodyPr/>
+          <a:lstStyle/>
+          <a:p>
+            <a:endParaRPr lang="ko-KR" altLang="en-US"/>
+          </a:p>
+        </p:txBody>
+      </p:sp>
+      <p:sp>
+        <p:nvSpPr>
+          <p:cNvPr id="3" name="TextBox 2"/>
+          <p:cNvSpPr txBox="1"/>
+          <p:nvPr/>
+        </p:nvSpPr>
+        <p:spPr>
+          <a:xfrm>
+            <a:off x="244862" y="238662"/>
+            <a:ext cx="14190667" cy="923330"/>
+          </a:xfrm>
+          <a:prstGeom prst="rect">
+            <a:avLst/>
+          </a:prstGeom>
+          <a:noFill/>
+        </p:spPr>
+        <p:txBody>
+          <a:bodyPr wrap="square" rtlCol="0">
+            <a:spAutoFit/>
+          </a:bodyPr>
+          <a:lstStyle/>
+          <a:p>
+            <a:r>
+              <a:rPr lang="en-US" altLang="ko-KR" sz="5400" b="1" dirty="0">
+                <a:solidFill>
+                  <a:schemeClr val="bg1"/>
+                </a:solidFill>
+                <a:latin typeface="LG스마트체2.0 Regular" panose="020B0600000101010101" pitchFamily="50" charset="-127"/>
+                <a:ea typeface="LG스마트체2.0 Regular" panose="020B0600000101010101" pitchFamily="50" charset="-127"/>
+              </a:rPr>
+              <a:t>5. </a:t>
+            </a:r>
+            <a:r>
+              <a:rPr lang="ko-KR" altLang="en-US" sz="5400" b="1" dirty="0">
+                <a:solidFill>
+                  <a:schemeClr val="bg1"/>
+                </a:solidFill>
+                <a:latin typeface="LG스마트체2.0 Regular" panose="020B0600000101010101" pitchFamily="50" charset="-127"/>
+                <a:ea typeface="LG스마트체2.0 Regular" panose="020B0600000101010101" pitchFamily="50" charset="-127"/>
+              </a:rPr>
+              <a:t>향후 연구 과제</a:t>
+            </a:r>
+          </a:p>
+        </p:txBody>
+      </p:sp>
+      <p:sp>
+        <p:nvSpPr>
+          <p:cNvPr id="4" name="직사각형 3"/>
+          <p:cNvSpPr/>
+          <p:nvPr/>
+        </p:nvSpPr>
+        <p:spPr>
+          <a:xfrm>
+            <a:off x="884420" y="2488367"/>
+            <a:ext cx="11092721" cy="1798820"/>
+          </a:xfrm>
+          <a:prstGeom prst="rect">
+            <a:avLst/>
+          </a:prstGeom>
+          <a:solidFill>
+            <a:srgbClr val="FFFF00"/>
+          </a:solidFill>
+        </p:spPr>
+        <p:style>
+          <a:lnRef idx="2">
+            <a:schemeClr val="accent1">
+              <a:shade val="50000"/>
+            </a:schemeClr>
+          </a:lnRef>
+          <a:fillRef idx="1">
+            <a:schemeClr val="accent1"/>
+          </a:fillRef>
+          <a:effectRef idx="0">
+            <a:schemeClr val="accent1"/>
+          </a:effectRef>
+          <a:fontRef idx="minor">
+            <a:schemeClr val="lt1"/>
+          </a:fontRef>
+        </p:style>
+        <p:txBody>
+          <a:bodyPr rtlCol="0" anchor="ctr"/>
+          <a:lstStyle/>
+          <a:p>
+            <a:pPr marL="457200" indent="-457200">
+              <a:buFontTx/>
+              <a:buChar char="-"/>
+            </a:pPr>
+            <a:r>
+              <a:rPr lang="ko-KR" altLang="en-US" sz="3200" b="1" dirty="0">
+                <a:solidFill>
+                  <a:schemeClr val="tx1"/>
+                </a:solidFill>
+              </a:rPr>
+              <a:t>개발 결과물의 추후 개선점</a:t>
+            </a:r>
+            <a:r>
+              <a:rPr lang="en-US" altLang="ko-KR" sz="3200" b="1" dirty="0">
+                <a:solidFill>
+                  <a:schemeClr val="tx1"/>
+                </a:solidFill>
+              </a:rPr>
+              <a:t>, </a:t>
+            </a:r>
+            <a:r>
+              <a:rPr lang="ko-KR" altLang="en-US" sz="3200" b="1" dirty="0">
+                <a:solidFill>
+                  <a:schemeClr val="tx1"/>
+                </a:solidFill>
+              </a:rPr>
+              <a:t>후속 개발 주제 등에 대한 내용</a:t>
+            </a:r>
+            <a:endParaRPr lang="en-US" altLang="ko-KR" sz="3200" b="1" dirty="0">
+              <a:solidFill>
+                <a:schemeClr val="tx1"/>
+              </a:solidFill>
+            </a:endParaRPr>
+          </a:p>
+          <a:p>
+            <a:pPr marL="457200" indent="-457200">
+              <a:buFontTx/>
+              <a:buChar char="-"/>
+            </a:pPr>
+            <a:r>
+              <a:rPr lang="ko-KR" altLang="en-US" sz="3200" b="1" dirty="0">
+                <a:solidFill>
+                  <a:schemeClr val="tx1"/>
+                </a:solidFill>
+              </a:rPr>
+              <a:t>가급적 </a:t>
+            </a:r>
+            <a:r>
+              <a:rPr lang="en-US" altLang="ko-KR" sz="3200" b="1" dirty="0">
+                <a:solidFill>
+                  <a:schemeClr val="tx1"/>
+                </a:solidFill>
+              </a:rPr>
+              <a:t>1</a:t>
+            </a:r>
+            <a:r>
+              <a:rPr lang="ko-KR" altLang="en-US" sz="3200" b="1" dirty="0">
+                <a:solidFill>
+                  <a:schemeClr val="tx1"/>
+                </a:solidFill>
+              </a:rPr>
+              <a:t>페이지로 요약</a:t>
+            </a:r>
+          </a:p>
+        </p:txBody>
+      </p:sp>
+    </p:spTree>
+    <p:extLst>
+      <p:ext uri="{BB962C8B-B14F-4D97-AF65-F5344CB8AC3E}">
+        <p14:creationId xmlns:p14="http://schemas.microsoft.com/office/powerpoint/2010/main" val="2998846418"/>
+      </p:ext>
+    </p:extLst>
+  </p:cSld>
+  <p:clrMapOvr>
+    <a:masterClrMapping/>
+  </p:clrMapOvr>
+  <p:timing>
+    <p:tnLst>
+      <p:par>
+        <p:cTn id="1" dur="indefinite" restart="never" nodeType="tmRoot"/>
+      </p:par>
+    </p:tnLst>
+  </p:timing>
+</p:sld>
+</file>
+
 <file path=ppt/slides/slide8.xml><?xml version="1.0" encoding="utf-8"?>
 <p:sld xmlns:a="http://schemas.openxmlformats.org/drawingml/2006/main" xmlns:r="http://schemas.openxmlformats.org/officeDocument/2006/relationships" xmlns:p="http://schemas.openxmlformats.org/presentationml/2006/main">
   <p:cSld>
@@ -11178,289 +10600,7 @@
           <a:bodyPr/>
           <a:lstStyle/>
           <a:p>
-            <a:r>
-              <a:rPr lang="ko-KR" altLang="en-US" dirty="0" smtClean="0"/>
-              <a:t>프로젝트 주제 </a:t>
-            </a:r>
-            <a:r>
-              <a:rPr lang="en-US" altLang="ko-KR" dirty="0"/>
-              <a:t>: </a:t>
-            </a:r>
-            <a:r>
-              <a:rPr lang="ko-KR" altLang="en-US"/>
-              <a:t>캐치 마인드</a:t>
-            </a:r>
-          </a:p>
-          <a:p>
-            <a:pPr lvl="1"/>
-            <a:r>
-              <a:rPr lang="ko-KR" altLang="en-US" dirty="0"/>
-              <a:t>필요 인원 </a:t>
-            </a:r>
-            <a:r>
-              <a:rPr lang="en-US" altLang="ko-KR" dirty="0"/>
-              <a:t>3</a:t>
-            </a:r>
-            <a:r>
-              <a:rPr lang="ko-KR" altLang="en-US"/>
-              <a:t>명 </a:t>
-            </a:r>
-            <a:r>
-              <a:rPr lang="en-US" altLang="ko-KR" dirty="0"/>
-              <a:t>(1</a:t>
-            </a:r>
-            <a:r>
-              <a:rPr lang="ko-KR" altLang="en-US"/>
-              <a:t>명 출제자</a:t>
-            </a:r>
-            <a:r>
-              <a:rPr lang="en-US" altLang="ko-KR" dirty="0"/>
-              <a:t>, 2</a:t>
-            </a:r>
-            <a:r>
-              <a:rPr lang="ko-KR" altLang="en-US"/>
-              <a:t>명 참가자</a:t>
-            </a:r>
-            <a:r>
-              <a:rPr lang="en-US" altLang="ko-KR" dirty="0" smtClean="0"/>
-              <a:t>)</a:t>
-            </a:r>
-            <a:endParaRPr lang="en-US" altLang="ko-KR" dirty="0"/>
-          </a:p>
-          <a:p>
-            <a:endParaRPr lang="en-US" altLang="ko-KR" dirty="0" smtClean="0"/>
-          </a:p>
-          <a:p>
-            <a:r>
-              <a:rPr lang="ko-KR" altLang="en-US" dirty="0" smtClean="0"/>
-              <a:t>게임 </a:t>
-            </a:r>
-            <a:r>
-              <a:rPr lang="ko-KR" altLang="en-US" dirty="0"/>
-              <a:t>방식</a:t>
-            </a:r>
-          </a:p>
-          <a:p>
-            <a:pPr lvl="1"/>
-            <a:r>
-              <a:rPr lang="ko-KR" altLang="en-US" dirty="0" smtClean="0"/>
-              <a:t>출제자는 분야</a:t>
-            </a:r>
-            <a:r>
-              <a:rPr lang="en-US" altLang="ko-KR" dirty="0" smtClean="0"/>
-              <a:t>&gt;</a:t>
-            </a:r>
-            <a:r>
-              <a:rPr lang="ko-KR" altLang="en-US"/>
-              <a:t>주제어 순서로 </a:t>
-            </a:r>
-            <a:r>
-              <a:rPr lang="ko-KR" altLang="en-US" smtClean="0"/>
-              <a:t>선택</a:t>
-            </a:r>
-            <a:endParaRPr lang="en-US" altLang="ko-KR" dirty="0" smtClean="0"/>
-          </a:p>
-          <a:p>
-            <a:pPr lvl="2"/>
-            <a:r>
-              <a:rPr lang="ko-KR" altLang="en-US" dirty="0" smtClean="0"/>
-              <a:t>각 </a:t>
-            </a:r>
-            <a:r>
-              <a:rPr lang="ko-KR" altLang="en-US" dirty="0"/>
-              <a:t>계층 별 </a:t>
-            </a:r>
-            <a:r>
-              <a:rPr lang="en-US" altLang="ko-KR" dirty="0"/>
-              <a:t>4</a:t>
-            </a:r>
-            <a:r>
-              <a:rPr lang="ko-KR" altLang="en-US"/>
-              <a:t>개씩 랜덤</a:t>
-            </a:r>
-          </a:p>
-          <a:p>
-            <a:pPr lvl="1"/>
-            <a:r>
-              <a:rPr lang="ko-KR" altLang="en-US" dirty="0"/>
-              <a:t>출제자가 그림 그리기 </a:t>
-            </a:r>
-            <a:r>
-              <a:rPr lang="ko-KR" altLang="en-US" dirty="0" smtClean="0"/>
-              <a:t>시작</a:t>
-            </a:r>
-            <a:endParaRPr lang="en-US" altLang="ko-KR" dirty="0"/>
-          </a:p>
-          <a:p>
-            <a:pPr lvl="1"/>
-            <a:r>
-              <a:rPr lang="ko-KR" altLang="en-US" dirty="0" smtClean="0"/>
-              <a:t>참가자는 </a:t>
-            </a:r>
-            <a:r>
-              <a:rPr lang="ko-KR" altLang="en-US" dirty="0"/>
-              <a:t>정답을 자신의 화면에 </a:t>
-            </a:r>
-            <a:r>
-              <a:rPr lang="ko-KR" altLang="en-US" dirty="0" smtClean="0"/>
-              <a:t>글씨로 작성하여 </a:t>
-            </a:r>
-            <a:r>
-              <a:rPr lang="ko-KR" altLang="en-US" dirty="0"/>
-              <a:t>제출</a:t>
-            </a:r>
-          </a:p>
-          <a:p>
-            <a:pPr lvl="1"/>
-            <a:r>
-              <a:rPr lang="ko-KR" altLang="en-US" dirty="0" smtClean="0"/>
-              <a:t>출제자는 </a:t>
-            </a:r>
-            <a:r>
-              <a:rPr lang="ko-KR" altLang="en-US" dirty="0"/>
-              <a:t>확인 후 </a:t>
-            </a:r>
-            <a:r>
-              <a:rPr lang="ko-KR" altLang="en-US" dirty="0" smtClean="0"/>
-              <a:t>정답</a:t>
-            </a:r>
-            <a:r>
-              <a:rPr lang="en-US" altLang="ko-KR" dirty="0" smtClean="0"/>
-              <a:t>/</a:t>
-            </a:r>
-            <a:r>
-              <a:rPr lang="ko-KR" altLang="en-US" smtClean="0"/>
-              <a:t>오답 </a:t>
-            </a:r>
-            <a:r>
-              <a:rPr lang="ko-KR" altLang="en-US" dirty="0"/>
-              <a:t>판단</a:t>
-            </a:r>
-          </a:p>
-          <a:p>
-            <a:pPr lvl="1"/>
-            <a:r>
-              <a:rPr lang="ko-KR" altLang="en-US" dirty="0" smtClean="0"/>
-              <a:t>정답 시 맞춘 </a:t>
-            </a:r>
-            <a:r>
-              <a:rPr lang="ko-KR" altLang="en-US" dirty="0"/>
-              <a:t>사람이 출제자가 되고</a:t>
-            </a:r>
-            <a:r>
-              <a:rPr lang="en-US" altLang="ko-KR" dirty="0"/>
-              <a:t>, </a:t>
-            </a:r>
-            <a:r>
-              <a:rPr lang="en-US" altLang="ko-KR" dirty="0" smtClean="0"/>
-              <a:t/>
-            </a:r>
-            <a:br>
-              <a:rPr lang="en-US" altLang="ko-KR" dirty="0" smtClean="0"/>
-            </a:br>
-            <a:r>
-              <a:rPr lang="ko-KR" altLang="en-US" smtClean="0"/>
-              <a:t>다시 </a:t>
-            </a:r>
-            <a:r>
-              <a:rPr lang="ko-KR" altLang="en-US"/>
-              <a:t>주제어 선택 화면으로 전환</a:t>
-            </a:r>
-          </a:p>
-          <a:p>
-            <a:pPr lvl="1"/>
-            <a:r>
-              <a:rPr lang="ko-KR" altLang="en-US" dirty="0"/>
-              <a:t>다음 라운드 </a:t>
-            </a:r>
-            <a:r>
-              <a:rPr lang="ko-KR" altLang="en-US" dirty="0" smtClean="0"/>
-              <a:t>시작</a:t>
-            </a:r>
-            <a:endParaRPr lang="en-US" altLang="ko-KR" dirty="0" smtClean="0"/>
-          </a:p>
-          <a:p>
-            <a:pPr lvl="1"/>
-            <a:endParaRPr lang="en-US" altLang="ko-KR" dirty="0"/>
-          </a:p>
-          <a:p>
-            <a:r>
-              <a:rPr lang="ko-KR" altLang="en-US" dirty="0" smtClean="0"/>
-              <a:t>점수 획득 방법</a:t>
-            </a:r>
-            <a:endParaRPr lang="en-US" altLang="ko-KR" dirty="0" smtClean="0"/>
-          </a:p>
-          <a:p>
-            <a:pPr lvl="1"/>
-            <a:r>
-              <a:rPr lang="ko-KR" altLang="en-US" dirty="0" smtClean="0"/>
-              <a:t>문제를 맞춘 참가자는 </a:t>
-            </a:r>
-            <a:r>
-              <a:rPr lang="en-US" altLang="ko-KR" dirty="0" smtClean="0"/>
-              <a:t>OO</a:t>
-            </a:r>
-            <a:r>
-              <a:rPr lang="ko-KR" altLang="en-US" smtClean="0"/>
-              <a:t>점의 점수 획득</a:t>
-            </a:r>
-            <a:endParaRPr lang="en-US" altLang="ko-KR" dirty="0" smtClean="0"/>
-          </a:p>
-          <a:p>
-            <a:pPr lvl="1"/>
-            <a:r>
-              <a:rPr lang="en-US" altLang="ko-KR" dirty="0" smtClean="0"/>
-              <a:t>1</a:t>
-            </a:r>
-            <a:r>
-              <a:rPr lang="ko-KR" altLang="en-US" smtClean="0"/>
-              <a:t>분의 그림 그리기 제한 시간동안 맞춘 사람이 있는 경우에는 출제자 </a:t>
-            </a:r>
-            <a:r>
-              <a:rPr lang="en-US" altLang="ko-KR" dirty="0" smtClean="0"/>
-              <a:t>OO</a:t>
-            </a:r>
-            <a:r>
-              <a:rPr lang="ko-KR" altLang="en-US" smtClean="0"/>
-              <a:t>점 획득</a:t>
-            </a:r>
-            <a:endParaRPr lang="en-US" altLang="ko-KR" dirty="0" smtClean="0"/>
-          </a:p>
-          <a:p>
-            <a:pPr lvl="1"/>
-            <a:r>
-              <a:rPr lang="ko-KR" altLang="en-US" dirty="0" smtClean="0"/>
-              <a:t>맞춘 사람이 없는 경우에는 출제자 </a:t>
-            </a:r>
-            <a:r>
-              <a:rPr lang="en-US" altLang="ko-KR" dirty="0" smtClean="0"/>
-              <a:t>OO</a:t>
-            </a:r>
-            <a:r>
-              <a:rPr lang="ko-KR" altLang="en-US" smtClean="0"/>
-              <a:t>점 감점</a:t>
-            </a:r>
-            <a:endParaRPr lang="en-US" altLang="ko-KR" dirty="0" smtClean="0"/>
-          </a:p>
-          <a:p>
-            <a:pPr lvl="1"/>
-            <a:r>
-              <a:rPr lang="en-US" altLang="ko-KR" dirty="0" smtClean="0"/>
-              <a:t>5</a:t>
-            </a:r>
-            <a:r>
-              <a:rPr lang="ko-KR" altLang="en-US" smtClean="0"/>
-              <a:t>라운드 이후 각 인원 점수를 합산하여 </a:t>
-            </a:r>
-            <a:r>
-              <a:rPr lang="en-US" altLang="ko-KR" dirty="0" smtClean="0"/>
-              <a:t>1~3</a:t>
-            </a:r>
-            <a:r>
-              <a:rPr lang="ko-KR" altLang="en-US" smtClean="0"/>
-              <a:t>등 표시</a:t>
-            </a:r>
-            <a:endParaRPr lang="ko-KR" altLang="en-US" dirty="0"/>
+            <a:endParaRPr lang="ko-KR" altLang="en-US"/>
           </a:p>
         </p:txBody>
       </p:sp>
@@ -11494,7 +10634,7 @@
                 <a:latin typeface="LG스마트체2.0 Regular" panose="020B0600000101010101" pitchFamily="50" charset="-127"/>
                 <a:ea typeface="LG스마트체2.0 Regular" panose="020B0600000101010101" pitchFamily="50" charset="-127"/>
               </a:rPr>
-              <a:t>1. </a:t>
+              <a:t>6. </a:t>
             </a:r>
             <a:r>
               <a:rPr lang="ko-KR" altLang="en-US" sz="5400" b="1" dirty="0">
@@ -11504,39 +10644,138 @@
                 <a:latin typeface="LG스마트체2.0 Regular" panose="020B0600000101010101" pitchFamily="50" charset="-127"/>
                 <a:ea typeface="LG스마트체2.0 Regular" panose="020B0600000101010101" pitchFamily="50" charset="-127"/>
               </a:rPr>
-              <a:t>주제 및 결과 요약</a:t>
+              <a:t>프로젝트 수행 후기</a:t>
             </a:r>
           </a:p>
         </p:txBody>
       </p:sp>
-      <p:pic>
-        <p:nvPicPr>
-          <p:cNvPr id="5" name="그림 4"/>
-          <p:cNvPicPr>
-            <a:picLocks noChangeAspect="1"/>
-          </p:cNvPicPr>
+      <p:sp>
+        <p:nvSpPr>
+          <p:cNvPr id="4" name="직사각형 3"/>
+          <p:cNvSpPr/>
           <p:nvPr/>
-        </p:nvPicPr>
-        <p:blipFill>
-          <a:blip r:embed="rId2"/>
-          <a:stretch>
-            <a:fillRect/>
-          </a:stretch>
-        </p:blipFill>
+        </p:nvSpPr>
         <p:spPr>
           <a:xfrm>
-            <a:off x="8270081" y="1767433"/>
-            <a:ext cx="8684419" cy="4884986"/>
+            <a:off x="884420" y="2488367"/>
+            <a:ext cx="11092721" cy="2203554"/>
           </a:xfrm>
           <a:prstGeom prst="rect">
             <a:avLst/>
           </a:prstGeom>
+          <a:solidFill>
+            <a:srgbClr val="FFFF00"/>
+          </a:solidFill>
         </p:spPr>
-      </p:pic>
+        <p:style>
+          <a:lnRef idx="2">
+            <a:schemeClr val="accent1">
+              <a:shade val="50000"/>
+            </a:schemeClr>
+          </a:lnRef>
+          <a:fillRef idx="1">
+            <a:schemeClr val="accent1"/>
+          </a:fillRef>
+          <a:effectRef idx="0">
+            <a:schemeClr val="accent1"/>
+          </a:effectRef>
+          <a:fontRef idx="minor">
+            <a:schemeClr val="lt1"/>
+          </a:fontRef>
+        </p:style>
+        <p:txBody>
+          <a:bodyPr rtlCol="0" anchor="ctr"/>
+          <a:lstStyle/>
+          <a:p>
+            <a:pPr marL="457200" indent="-457200">
+              <a:buFontTx/>
+              <a:buChar char="-"/>
+            </a:pPr>
+            <a:r>
+              <a:rPr lang="ko-KR" altLang="en-US" sz="3200" b="1" dirty="0">
+                <a:solidFill>
+                  <a:schemeClr val="tx1"/>
+                </a:solidFill>
+              </a:rPr>
+              <a:t>프로젝트 수행에 따른 </a:t>
+            </a:r>
+            <a:r>
+              <a:rPr lang="ko-KR" altLang="en-US" sz="3200" b="1" dirty="0" err="1">
+                <a:solidFill>
+                  <a:schemeClr val="tx1"/>
+                </a:solidFill>
+              </a:rPr>
+              <a:t>느낀점</a:t>
+            </a:r>
+            <a:endParaRPr lang="en-US" altLang="ko-KR" sz="3200" b="1" dirty="0">
+              <a:solidFill>
+                <a:schemeClr val="tx1"/>
+              </a:solidFill>
+            </a:endParaRPr>
+          </a:p>
+          <a:p>
+            <a:pPr marL="457200" indent="-457200">
+              <a:buFontTx/>
+              <a:buChar char="-"/>
+            </a:pPr>
+            <a:r>
+              <a:rPr lang="ko-KR" altLang="en-US" sz="3200" b="1" dirty="0" err="1">
+                <a:solidFill>
+                  <a:schemeClr val="tx1"/>
+                </a:solidFill>
+              </a:rPr>
+              <a:t>개발중</a:t>
+            </a:r>
+            <a:r>
+              <a:rPr lang="ko-KR" altLang="en-US" sz="3200" b="1" dirty="0">
+                <a:solidFill>
+                  <a:schemeClr val="tx1"/>
+                </a:solidFill>
+              </a:rPr>
+              <a:t> 어려웠던 점 그리고 이를 극복한 사연 등</a:t>
+            </a:r>
+            <a:endParaRPr lang="en-US" altLang="ko-KR" sz="3200" b="1" dirty="0">
+              <a:solidFill>
+                <a:schemeClr val="tx1"/>
+              </a:solidFill>
+            </a:endParaRPr>
+          </a:p>
+          <a:p>
+            <a:pPr marL="457200" indent="-457200">
+              <a:buFontTx/>
+              <a:buChar char="-"/>
+            </a:pPr>
+            <a:r>
+              <a:rPr lang="ko-KR" altLang="en-US" sz="3200" b="1" dirty="0">
+                <a:solidFill>
+                  <a:schemeClr val="tx1"/>
+                </a:solidFill>
+              </a:rPr>
+              <a:t>교육과 프로젝트를 마무리한 소회 등</a:t>
+            </a:r>
+            <a:r>
+              <a:rPr lang="en-US" altLang="ko-KR" sz="3200" b="1" dirty="0">
+                <a:solidFill>
+                  <a:schemeClr val="tx1"/>
+                </a:solidFill>
+              </a:rPr>
+              <a:t>… 1</a:t>
+            </a:r>
+            <a:r>
+              <a:rPr lang="ko-KR" altLang="en-US" sz="3200" b="1" dirty="0">
+                <a:solidFill>
+                  <a:schemeClr val="tx1"/>
+                </a:solidFill>
+              </a:rPr>
+              <a:t>페이지로 정리 </a:t>
+            </a:r>
+          </a:p>
+        </p:txBody>
+      </p:sp>
     </p:spTree>
     <p:extLst>
       <p:ext uri="{BB962C8B-B14F-4D97-AF65-F5344CB8AC3E}">
-        <p14:creationId xmlns:p14="http://schemas.microsoft.com/office/powerpoint/2010/main" val="279983564"/>
+        <p14:creationId xmlns:p14="http://schemas.microsoft.com/office/powerpoint/2010/main" val="693654044"/>
       </p:ext>
     </p:extLst>
   </p:cSld>
@@ -11585,169 +10824,21 @@
           <a:bodyPr/>
           <a:lstStyle/>
           <a:p>
+            <a:pPr marL="0" indent="0" algn="ctr">
+              <a:buNone/>
+            </a:pPr>
+            <a:r>
+              <a:rPr lang="en-US" altLang="ko-KR" sz="19900" dirty="0" smtClean="0"/>
+              <a:t>APPENDIX</a:t>
+            </a:r>
             <a:endParaRPr lang="ko-KR" altLang="en-US"/>
-          </a:p>
-        </p:txBody>
-      </p:sp>
-      <p:sp>
-        <p:nvSpPr>
-          <p:cNvPr id="3" name="TextBox 2"/>
-          <p:cNvSpPr txBox="1"/>
-          <p:nvPr/>
-        </p:nvSpPr>
-        <p:spPr>
-          <a:xfrm>
-            <a:off x="244862" y="238662"/>
-            <a:ext cx="14190667" cy="923330"/>
-          </a:xfrm>
-          <a:prstGeom prst="rect">
-            <a:avLst/>
-          </a:prstGeom>
-          <a:noFill/>
-        </p:spPr>
-        <p:txBody>
-          <a:bodyPr wrap="square" rtlCol="0">
-            <a:spAutoFit/>
-          </a:bodyPr>
-          <a:lstStyle/>
-          <a:p>
-            <a:r>
-              <a:rPr lang="en-US" altLang="ko-KR" sz="5400" b="1" dirty="0">
-                <a:solidFill>
-                  <a:schemeClr val="bg1"/>
-                </a:solidFill>
-                <a:latin typeface="LG스마트체2.0 Regular" panose="020B0600000101010101" pitchFamily="50" charset="-127"/>
-                <a:ea typeface="LG스마트체2.0 Regular" panose="020B0600000101010101" pitchFamily="50" charset="-127"/>
-              </a:rPr>
-              <a:t>2. </a:t>
-            </a:r>
-            <a:r>
-              <a:rPr lang="ko-KR" altLang="en-US" sz="5400" b="1" dirty="0">
-                <a:solidFill>
-                  <a:schemeClr val="bg1"/>
-                </a:solidFill>
-                <a:latin typeface="LG스마트체2.0 Regular" panose="020B0600000101010101" pitchFamily="50" charset="-127"/>
-                <a:ea typeface="LG스마트체2.0 Regular" panose="020B0600000101010101" pitchFamily="50" charset="-127"/>
-              </a:rPr>
-              <a:t>개발 목표 및 개발 결과</a:t>
-            </a:r>
-          </a:p>
-        </p:txBody>
-      </p:sp>
-      <p:sp>
-        <p:nvSpPr>
-          <p:cNvPr id="4" name="직사각형 3"/>
-          <p:cNvSpPr/>
-          <p:nvPr/>
-        </p:nvSpPr>
-        <p:spPr>
-          <a:xfrm>
-            <a:off x="884420" y="2488367"/>
-            <a:ext cx="11092721" cy="2548328"/>
-          </a:xfrm>
-          <a:prstGeom prst="rect">
-            <a:avLst/>
-          </a:prstGeom>
-          <a:solidFill>
-            <a:srgbClr val="FFFF00"/>
-          </a:solidFill>
-        </p:spPr>
-        <p:style>
-          <a:lnRef idx="2">
-            <a:schemeClr val="accent1">
-              <a:shade val="50000"/>
-            </a:schemeClr>
-          </a:lnRef>
-          <a:fillRef idx="1">
-            <a:schemeClr val="accent1"/>
-          </a:fillRef>
-          <a:effectRef idx="0">
-            <a:schemeClr val="accent1"/>
-          </a:effectRef>
-          <a:fontRef idx="minor">
-            <a:schemeClr val="lt1"/>
-          </a:fontRef>
-        </p:style>
-        <p:txBody>
-          <a:bodyPr rtlCol="0" anchor="ctr"/>
-          <a:lstStyle/>
-          <a:p>
-            <a:pPr marL="457200" indent="-457200">
-              <a:buFontTx/>
-              <a:buChar char="-"/>
-            </a:pPr>
-            <a:r>
-              <a:rPr lang="ko-KR" altLang="en-US" sz="3200" b="1" dirty="0">
-                <a:solidFill>
-                  <a:schemeClr val="tx1"/>
-                </a:solidFill>
-              </a:rPr>
-              <a:t>처음 기획한 개발 목표</a:t>
-            </a:r>
-            <a:endParaRPr lang="en-US" altLang="ko-KR" sz="3200" b="1" dirty="0">
-              <a:solidFill>
-                <a:schemeClr val="tx1"/>
-              </a:solidFill>
-            </a:endParaRPr>
-          </a:p>
-          <a:p>
-            <a:pPr marL="457200" indent="-457200">
-              <a:buFontTx/>
-              <a:buChar char="-"/>
-            </a:pPr>
-            <a:r>
-              <a:rPr lang="ko-KR" altLang="en-US" sz="3200" b="1" dirty="0">
-                <a:solidFill>
-                  <a:schemeClr val="tx1"/>
-                </a:solidFill>
-              </a:rPr>
-              <a:t>실제 개발 결과 소개</a:t>
-            </a:r>
-            <a:endParaRPr lang="en-US" altLang="ko-KR" sz="3200" b="1" dirty="0">
-              <a:solidFill>
-                <a:schemeClr val="tx1"/>
-              </a:solidFill>
-            </a:endParaRPr>
-          </a:p>
-          <a:p>
-            <a:pPr marL="457200" indent="-457200">
-              <a:buFontTx/>
-              <a:buChar char="-"/>
-            </a:pPr>
-            <a:r>
-              <a:rPr lang="ko-KR" altLang="en-US" sz="3200" b="1" dirty="0">
-                <a:solidFill>
-                  <a:schemeClr val="tx1"/>
-                </a:solidFill>
-              </a:rPr>
-              <a:t>가급적 결과 내용을 상세히 기술</a:t>
-            </a:r>
-            <a:endParaRPr lang="en-US" altLang="ko-KR" sz="3200" b="1" dirty="0">
-              <a:solidFill>
-                <a:schemeClr val="tx1"/>
-              </a:solidFill>
-            </a:endParaRPr>
-          </a:p>
-          <a:p>
-            <a:pPr marL="457200" indent="-457200">
-              <a:buFontTx/>
-              <a:buChar char="-"/>
-            </a:pPr>
-            <a:r>
-              <a:rPr lang="ko-KR" altLang="en-US" sz="3200" b="1" dirty="0">
-                <a:solidFill>
-                  <a:schemeClr val="tx1"/>
-                </a:solidFill>
-              </a:rPr>
-              <a:t>페이지 수 무관</a:t>
-            </a:r>
           </a:p>
         </p:txBody>
       </p:sp>
     </p:spTree>
     <p:extLst>
       <p:ext uri="{BB962C8B-B14F-4D97-AF65-F5344CB8AC3E}">
-        <p14:creationId xmlns:p14="http://schemas.microsoft.com/office/powerpoint/2010/main" val="1608528413"/>
+        <p14:creationId xmlns:p14="http://schemas.microsoft.com/office/powerpoint/2010/main" val="1390112942"/>
       </p:ext>
     </p:extLst>
   </p:cSld>

--- a/LG_부트캠프_12기_C반_프로젝트일정_및_최종제출결과물_3팀/LG_부트캠프_12기_C반_최종결과물(3팀)/결과보고서/4.LG_부트캠프_12기_C반_결과보고서(3팀)_v1.pptx
+++ b/LG_부트캠프_12기_C반_프로젝트일정_및_최종제출결과물_3팀/LG_부트캠프_12기_C반_최종결과물(3팀)/결과보고서/4.LG_부트캠프_12기_C반_결과보고서(3팀)_v1.pptx
@@ -7117,7 +7117,39 @@
                   <a:schemeClr val="tx1"/>
                 </a:solidFill>
               </a:rPr>
-              <a:t>가 제출 못하도록 원복하자</a:t>
+              <a:t>가 제출 못하도록 </a:t>
+            </a:r>
+            <a:r>
+              <a:rPr lang="ko-KR" altLang="en-US" b="1" smtClean="0">
+                <a:solidFill>
+                  <a:schemeClr val="tx1"/>
+                </a:solidFill>
+              </a:rPr>
+              <a:t>원복</a:t>
+            </a:r>
+            <a:r>
+              <a:rPr lang="en-US" altLang="ko-KR" b="1" dirty="0" smtClean="0">
+                <a:solidFill>
+                  <a:schemeClr val="tx1"/>
+                </a:solidFill>
+              </a:rPr>
+              <a:t>(</a:t>
+            </a:r>
+            <a:r>
+              <a:rPr lang="ko-KR" altLang="en-US" b="1" smtClean="0">
+                <a:solidFill>
+                  <a:schemeClr val="tx1"/>
+                </a:solidFill>
+              </a:rPr>
+              <a:t>완</a:t>
+            </a:r>
+            <a:r>
+              <a:rPr lang="en-US" altLang="ko-KR" b="1" dirty="0" smtClean="0">
+                <a:solidFill>
+                  <a:schemeClr val="tx1"/>
+                </a:solidFill>
+              </a:rPr>
+              <a:t>)</a:t>
             </a:r>
             <a:endParaRPr lang="en-US" altLang="ko-KR" b="1" dirty="0" smtClean="0">
               <a:solidFill>
@@ -7173,6 +7205,30 @@
               </a:rPr>
               <a:t>보드에 업로드 </a:t>
             </a:r>
+            <a:r>
+              <a:rPr lang="en-US" altLang="ko-KR" b="1" dirty="0" smtClean="0">
+                <a:solidFill>
+                  <a:schemeClr val="tx1"/>
+                </a:solidFill>
+              </a:rPr>
+              <a:t>(</a:t>
+            </a:r>
+            <a:r>
+              <a:rPr lang="ko-KR" altLang="en-US" b="1" smtClean="0">
+                <a:solidFill>
+                  <a:schemeClr val="tx1"/>
+                </a:solidFill>
+              </a:rPr>
+              <a:t>완</a:t>
+            </a:r>
+            <a:r>
+              <a:rPr lang="en-US" altLang="ko-KR" b="1" dirty="0" smtClean="0">
+                <a:solidFill>
+                  <a:schemeClr val="tx1"/>
+                </a:solidFill>
+              </a:rPr>
+              <a:t>)</a:t>
+            </a:r>
             <a:endParaRPr lang="en-US" altLang="ko-KR" b="1" dirty="0" smtClean="0">
               <a:solidFill>
                 <a:schemeClr val="tx1"/>
@@ -7255,7 +7311,39 @@
                   <a:schemeClr val="tx1"/>
                 </a:solidFill>
               </a:rPr>
-              <a:t> 맞추기</a:t>
+              <a:t> </a:t>
+            </a:r>
+            <a:r>
+              <a:rPr lang="ko-KR" altLang="en-US" b="1" dirty="0" smtClean="0">
+                <a:solidFill>
+                  <a:schemeClr val="tx1"/>
+                </a:solidFill>
+              </a:rPr>
+              <a:t>맞추기</a:t>
+            </a:r>
+            <a:r>
+              <a:rPr lang="en-US" altLang="ko-KR" b="1" dirty="0" smtClean="0">
+                <a:solidFill>
+                  <a:schemeClr val="tx1"/>
+                </a:solidFill>
+              </a:rPr>
+              <a:t>(</a:t>
+            </a:r>
+            <a:r>
+              <a:rPr lang="ko-KR" altLang="en-US" b="1" smtClean="0">
+                <a:solidFill>
+                  <a:schemeClr val="tx1"/>
+                </a:solidFill>
+              </a:rPr>
+              <a:t>완</a:t>
+            </a:r>
+            <a:r>
+              <a:rPr lang="en-US" altLang="ko-KR" b="1" dirty="0" smtClean="0">
+                <a:solidFill>
+                  <a:schemeClr val="tx1"/>
+                </a:solidFill>
+              </a:rPr>
+              <a:t>)</a:t>
             </a:r>
             <a:endParaRPr lang="en-US" altLang="ko-KR" b="1" dirty="0" smtClean="0">
               <a:solidFill>
@@ -7373,6 +7461,30 @@
               </a:rPr>
               <a:t> </a:t>
             </a:r>
+            <a:r>
+              <a:rPr lang="en-US" altLang="ko-KR" b="1" dirty="0" smtClean="0">
+                <a:solidFill>
+                  <a:schemeClr val="tx1"/>
+                </a:solidFill>
+              </a:rPr>
+              <a:t>(</a:t>
+            </a:r>
+            <a:r>
+              <a:rPr lang="ko-KR" altLang="en-US" b="1" smtClean="0">
+                <a:solidFill>
+                  <a:schemeClr val="tx1"/>
+                </a:solidFill>
+              </a:rPr>
+              <a:t>완</a:t>
+            </a:r>
+            <a:r>
+              <a:rPr lang="en-US" altLang="ko-KR" b="1" dirty="0" smtClean="0">
+                <a:solidFill>
+                  <a:schemeClr val="tx1"/>
+                </a:solidFill>
+              </a:rPr>
+              <a:t>)</a:t>
+            </a:r>
             <a:endParaRPr lang="en-US" altLang="ko-KR" b="1" dirty="0" smtClean="0">
               <a:solidFill>
                 <a:schemeClr val="tx1"/>
@@ -7457,6 +7569,22 @@
                   <a:schemeClr val="tx1"/>
                 </a:solidFill>
               </a:rPr>
+              <a:t>) (</a:t>
+            </a:r>
+            <a:r>
+              <a:rPr lang="ko-KR" altLang="en-US" b="1" smtClean="0">
+                <a:solidFill>
+                  <a:schemeClr val="tx1"/>
+                </a:solidFill>
+              </a:rPr>
+              <a:t>완</a:t>
+            </a:r>
+            <a:r>
+              <a:rPr lang="en-US" altLang="ko-KR" b="1" dirty="0" smtClean="0">
+                <a:solidFill>
+                  <a:schemeClr val="tx1"/>
+                </a:solidFill>
+              </a:rPr>
               <a:t>)</a:t>
             </a:r>
             <a:endParaRPr lang="en-US" altLang="ko-KR" b="1" dirty="0">
@@ -7941,7 +8069,39 @@
                   <a:schemeClr val="tx1"/>
                 </a:solidFill>
               </a:rPr>
-              <a:t>한시까지 제출</a:t>
+              <a:t>한시까지 </a:t>
+            </a:r>
+            <a:r>
+              <a:rPr lang="ko-KR" altLang="en-US" b="1" smtClean="0">
+                <a:solidFill>
+                  <a:schemeClr val="tx1"/>
+                </a:solidFill>
+              </a:rPr>
+              <a:t>제출 </a:t>
+            </a:r>
+            <a:r>
+              <a:rPr lang="en-US" altLang="ko-KR" b="1" dirty="0" smtClean="0">
+                <a:solidFill>
+                  <a:schemeClr val="tx1"/>
+                </a:solidFill>
+              </a:rPr>
+              <a:t>(</a:t>
+            </a:r>
+            <a:r>
+              <a:rPr lang="ko-KR" altLang="en-US" b="1" smtClean="0">
+                <a:solidFill>
+                  <a:schemeClr val="tx1"/>
+                </a:solidFill>
+              </a:rPr>
+              <a:t>완</a:t>
+            </a:r>
+            <a:r>
+              <a:rPr lang="en-US" altLang="ko-KR" b="1" dirty="0" smtClean="0">
+                <a:solidFill>
+                  <a:schemeClr val="tx1"/>
+                </a:solidFill>
+              </a:rPr>
+              <a:t>)</a:t>
             </a:r>
             <a:endParaRPr lang="en-US" altLang="ko-KR" b="1" dirty="0" smtClean="0">
               <a:solidFill>
@@ -7979,7 +8139,39 @@
                   <a:schemeClr val="tx1"/>
                 </a:solidFill>
               </a:rPr>
-              <a:t>모니터에 띄울 수 있는지</a:t>
+              <a:t>모니터에 띄울 수 </a:t>
+            </a:r>
+            <a:r>
+              <a:rPr lang="ko-KR" altLang="en-US" b="1" smtClean="0">
+                <a:solidFill>
+                  <a:schemeClr val="tx1"/>
+                </a:solidFill>
+              </a:rPr>
+              <a:t>있는지 </a:t>
+            </a:r>
+            <a:r>
+              <a:rPr lang="en-US" altLang="ko-KR" b="1" dirty="0" smtClean="0">
+                <a:solidFill>
+                  <a:schemeClr val="tx1"/>
+                </a:solidFill>
+              </a:rPr>
+              <a:t>(</a:t>
+            </a:r>
+            <a:r>
+              <a:rPr lang="ko-KR" altLang="en-US" b="1" smtClean="0">
+                <a:solidFill>
+                  <a:schemeClr val="tx1"/>
+                </a:solidFill>
+              </a:rPr>
+              <a:t>완</a:t>
+            </a:r>
+            <a:r>
+              <a:rPr lang="en-US" altLang="ko-KR" b="1" dirty="0" smtClean="0">
+                <a:solidFill>
+                  <a:schemeClr val="tx1"/>
+                </a:solidFill>
+              </a:rPr>
+              <a:t>)</a:t>
             </a:r>
             <a:endParaRPr lang="en-US" altLang="ko-KR" sz="2800" b="1" dirty="0" smtClean="0">
               <a:solidFill>
@@ -9740,7 +9932,7 @@
           <a:bodyPr/>
           <a:lstStyle/>
           <a:p>
-            <a:endParaRPr lang="ko-KR" altLang="en-US"/>
+            <a:endParaRPr lang="ko-KR" altLang="en-US" dirty="0"/>
           </a:p>
         </p:txBody>
       </p:sp>
@@ -10033,7 +10225,7 @@
         </p:nvSpPr>
         <p:spPr>
           <a:xfrm>
-            <a:off x="-690380" y="7570611"/>
+            <a:off x="0" y="6715588"/>
             <a:ext cx="11092721" cy="2188564"/>
           </a:xfrm>
           <a:prstGeom prst="rect">

--- a/LG_부트캠프_12기_C반_프로젝트일정_및_최종제출결과물_3팀/LG_부트캠프_12기_C반_최종결과물(3팀)/결과보고서/4.LG_부트캠프_12기_C반_결과보고서(3팀)_v1.pptx
+++ b/LG_부트캠프_12기_C반_프로젝트일정_및_최종제출결과물_3팀/LG_부트캠프_12기_C반_최종결과물(3팀)/결과보고서/4.LG_부트캠프_12기_C반_결과보고서(3팀)_v1.pptx
@@ -5,7 +5,7 @@
     <p:sldMasterId id="2147483648" r:id="rId1"/>
   </p:sldMasterIdLst>
   <p:notesMasterIdLst>
-    <p:notesMasterId r:id="rId17"/>
+    <p:notesMasterId r:id="rId18"/>
   </p:notesMasterIdLst>
   <p:sldIdLst>
     <p:sldId id="257" r:id="rId2"/>
@@ -23,6 +23,7 @@
     <p:sldId id="267" r:id="rId14"/>
     <p:sldId id="277" r:id="rId15"/>
     <p:sldId id="278" r:id="rId16"/>
+    <p:sldId id="279" r:id="rId17"/>
   </p:sldIdLst>
   <p:sldSz cx="17556163" cy="9875838"/>
   <p:notesSz cx="9875838" cy="17556163"/>
@@ -7117,7 +7118,15 @@
                   <a:schemeClr val="tx1"/>
                 </a:solidFill>
               </a:rPr>
-              <a:t>가 제출 못하도록 </a:t>
+              <a:t>가 제출 못하도록 원복</a:t>
+            </a:r>
+            <a:r>
+              <a:rPr lang="en-US" altLang="ko-KR" b="1" dirty="0" smtClean="0">
+                <a:solidFill>
+                  <a:schemeClr val="tx1"/>
+                </a:solidFill>
+              </a:rPr>
+              <a:t>(</a:t>
             </a:r>
             <a:r>
               <a:rPr lang="ko-KR" altLang="en-US" b="1" smtClean="0">
@@ -7125,22 +7134,6 @@
                   <a:schemeClr val="tx1"/>
                 </a:solidFill>
               </a:rPr>
-              <a:t>원복</a:t>
-            </a:r>
-            <a:r>
-              <a:rPr lang="en-US" altLang="ko-KR" b="1" dirty="0" smtClean="0">
-                <a:solidFill>
-                  <a:schemeClr val="tx1"/>
-                </a:solidFill>
-              </a:rPr>
-              <a:t>(</a:t>
-            </a:r>
-            <a:r>
-              <a:rPr lang="ko-KR" altLang="en-US" b="1" smtClean="0">
-                <a:solidFill>
-                  <a:schemeClr val="tx1"/>
-                </a:solidFill>
-              </a:rPr>
               <a:t>완</a:t>
             </a:r>
             <a:r>
@@ -7151,11 +7144,6 @@
               </a:rPr>
               <a:t>)</a:t>
             </a:r>
-            <a:endParaRPr lang="en-US" altLang="ko-KR" b="1" dirty="0" smtClean="0">
-              <a:solidFill>
-                <a:schemeClr val="tx1"/>
-              </a:solidFill>
-            </a:endParaRPr>
           </a:p>
           <a:p>
             <a:pPr marL="800100" lvl="1" indent="-342900">
@@ -7229,11 +7217,6 @@
               </a:rPr>
               <a:t>)</a:t>
             </a:r>
-            <a:endParaRPr lang="en-US" altLang="ko-KR" b="1" dirty="0" smtClean="0">
-              <a:solidFill>
-                <a:schemeClr val="tx1"/>
-              </a:solidFill>
-            </a:endParaRPr>
           </a:p>
           <a:p>
             <a:pPr marL="800100" lvl="1" indent="-342900">
@@ -7311,15 +7294,7 @@
                   <a:schemeClr val="tx1"/>
                 </a:solidFill>
               </a:rPr>
-              <a:t> </a:t>
-            </a:r>
-            <a:r>
-              <a:rPr lang="ko-KR" altLang="en-US" b="1" dirty="0" smtClean="0">
-                <a:solidFill>
-                  <a:schemeClr val="tx1"/>
-                </a:solidFill>
-              </a:rPr>
-              <a:t>맞추기</a:t>
+              <a:t> 맞추기</a:t>
             </a:r>
             <a:r>
               <a:rPr lang="en-US" altLang="ko-KR" b="1" dirty="0" smtClean="0">
@@ -7345,11 +7320,6 @@
               </a:rPr>
               <a:t>)</a:t>
             </a:r>
-            <a:endParaRPr lang="en-US" altLang="ko-KR" b="1" dirty="0" smtClean="0">
-              <a:solidFill>
-                <a:schemeClr val="tx1"/>
-              </a:solidFill>
-            </a:endParaRPr>
           </a:p>
           <a:p>
             <a:pPr marL="800100" lvl="1" indent="-342900">
@@ -7485,11 +7455,6 @@
               </a:rPr>
               <a:t>)</a:t>
             </a:r>
-            <a:endParaRPr lang="en-US" altLang="ko-KR" b="1" dirty="0" smtClean="0">
-              <a:solidFill>
-                <a:schemeClr val="tx1"/>
-              </a:solidFill>
-            </a:endParaRPr>
           </a:p>
           <a:p>
             <a:pPr marL="800100" lvl="1" indent="-342900">
@@ -8069,7 +8034,15 @@
                   <a:schemeClr val="tx1"/>
                 </a:solidFill>
               </a:rPr>
-              <a:t>한시까지 </a:t>
+              <a:t>한시까지 제출 </a:t>
+            </a:r>
+            <a:r>
+              <a:rPr lang="en-US" altLang="ko-KR" b="1" dirty="0" smtClean="0">
+                <a:solidFill>
+                  <a:schemeClr val="tx1"/>
+                </a:solidFill>
+              </a:rPr>
+              <a:t>(</a:t>
             </a:r>
             <a:r>
               <a:rPr lang="ko-KR" altLang="en-US" b="1" smtClean="0">
@@ -8077,22 +8050,6 @@
                   <a:schemeClr val="tx1"/>
                 </a:solidFill>
               </a:rPr>
-              <a:t>제출 </a:t>
-            </a:r>
-            <a:r>
-              <a:rPr lang="en-US" altLang="ko-KR" b="1" dirty="0" smtClean="0">
-                <a:solidFill>
-                  <a:schemeClr val="tx1"/>
-                </a:solidFill>
-              </a:rPr>
-              <a:t>(</a:t>
-            </a:r>
-            <a:r>
-              <a:rPr lang="ko-KR" altLang="en-US" b="1" smtClean="0">
-                <a:solidFill>
-                  <a:schemeClr val="tx1"/>
-                </a:solidFill>
-              </a:rPr>
               <a:t>완</a:t>
             </a:r>
             <a:r>
@@ -8103,11 +8060,6 @@
               </a:rPr>
               <a:t>)</a:t>
             </a:r>
-            <a:endParaRPr lang="en-US" altLang="ko-KR" b="1" dirty="0" smtClean="0">
-              <a:solidFill>
-                <a:schemeClr val="tx1"/>
-              </a:solidFill>
-            </a:endParaRPr>
           </a:p>
           <a:p>
             <a:pPr marL="800100" lvl="1" indent="-342900">
@@ -8139,15 +8091,7 @@
                   <a:schemeClr val="tx1"/>
                 </a:solidFill>
               </a:rPr>
-              <a:t>모니터에 띄울 수 </a:t>
-            </a:r>
-            <a:r>
-              <a:rPr lang="ko-KR" altLang="en-US" b="1" smtClean="0">
-                <a:solidFill>
-                  <a:schemeClr val="tx1"/>
-                </a:solidFill>
-              </a:rPr>
-              <a:t>있는지 </a:t>
+              <a:t>모니터에 띄울 수 있는지 </a:t>
             </a:r>
             <a:r>
               <a:rPr lang="en-US" altLang="ko-KR" b="1" dirty="0" smtClean="0">
@@ -8302,31 +8246,7 @@
                   <a:schemeClr val="tx1"/>
                 </a:solidFill>
               </a:rPr>
-              <a:t>월 </a:t>
-            </a:r>
-            <a:r>
-              <a:rPr lang="ko-KR" altLang="en-US" b="1" smtClean="0">
-                <a:solidFill>
-                  <a:schemeClr val="tx1"/>
-                </a:solidFill>
-              </a:rPr>
-              <a:t>오후 한시반 팀별 </a:t>
-            </a:r>
-            <a:r>
-              <a:rPr lang="ko-KR" altLang="en-US" b="1" smtClean="0">
-                <a:solidFill>
-                  <a:schemeClr val="tx1"/>
-                </a:solidFill>
-              </a:rPr>
-              <a:t>영상 </a:t>
-            </a:r>
-            <a:r>
-              <a:rPr lang="ko-KR" altLang="en-US" b="1" smtClean="0">
-                <a:solidFill>
-                  <a:schemeClr val="tx1"/>
-                </a:solidFill>
-              </a:rPr>
-              <a:t>제작</a:t>
+              <a:t>월 오후 한시반 팀별 영상 제작</a:t>
             </a:r>
             <a:endParaRPr lang="en-US" altLang="ko-KR" b="1" dirty="0" smtClean="0">
               <a:solidFill>
@@ -9055,6 +8975,1409 @@
     <p:extLst>
       <p:ext uri="{BB962C8B-B14F-4D97-AF65-F5344CB8AC3E}">
         <p14:creationId xmlns:p14="http://schemas.microsoft.com/office/powerpoint/2010/main" val="753764332"/>
+      </p:ext>
+    </p:extLst>
+  </p:cSld>
+  <p:clrMapOvr>
+    <a:masterClrMapping/>
+  </p:clrMapOvr>
+  <p:timing>
+    <p:tnLst>
+      <p:par>
+        <p:cTn id="1" dur="indefinite" restart="never" nodeType="tmRoot"/>
+      </p:par>
+    </p:tnLst>
+  </p:timing>
+</p:sld>
+</file>
+
+<file path=ppt/slides/slide16.xml><?xml version="1.0" encoding="utf-8"?>
+<p:sld xmlns:a="http://schemas.openxmlformats.org/drawingml/2006/main" xmlns:r="http://schemas.openxmlformats.org/officeDocument/2006/relationships" xmlns:p="http://schemas.openxmlformats.org/presentationml/2006/main">
+  <p:cSld>
+    <p:spTree>
+      <p:nvGrpSpPr>
+        <p:cNvPr id="1" name=""/>
+        <p:cNvGrpSpPr/>
+        <p:nvPr/>
+      </p:nvGrpSpPr>
+      <p:grpSpPr>
+        <a:xfrm>
+          <a:off x="0" y="0"/>
+          <a:ext cx="0" cy="0"/>
+          <a:chOff x="0" y="0"/>
+          <a:chExt cx="0" cy="0"/>
+        </a:xfrm>
+      </p:grpSpPr>
+      <p:sp>
+        <p:nvSpPr>
+          <p:cNvPr id="21" name="직사각형 20"/>
+          <p:cNvSpPr/>
+          <p:nvPr/>
+        </p:nvSpPr>
+        <p:spPr>
+          <a:xfrm>
+            <a:off x="8857633" y="1561514"/>
+            <a:ext cx="7743960" cy="8653640"/>
+          </a:xfrm>
+          <a:prstGeom prst="rect">
+            <a:avLst/>
+          </a:prstGeom>
+          <a:solidFill>
+            <a:srgbClr val="FFFF00"/>
+          </a:solidFill>
+        </p:spPr>
+        <p:style>
+          <a:lnRef idx="2">
+            <a:schemeClr val="accent1">
+              <a:shade val="50000"/>
+            </a:schemeClr>
+          </a:lnRef>
+          <a:fillRef idx="1">
+            <a:schemeClr val="accent1"/>
+          </a:fillRef>
+          <a:effectRef idx="0">
+            <a:schemeClr val="accent1"/>
+          </a:effectRef>
+          <a:fontRef idx="minor">
+            <a:schemeClr val="lt1"/>
+          </a:fontRef>
+        </p:style>
+        <p:txBody>
+          <a:bodyPr rtlCol="0" anchor="t"/>
+          <a:lstStyle/>
+          <a:p>
+            <a:pPr marL="342900" indent="-342900">
+              <a:lnSpc>
+                <a:spcPct val="150000"/>
+              </a:lnSpc>
+              <a:buFontTx/>
+              <a:buChar char="-"/>
+            </a:pPr>
+            <a:r>
+              <a:rPr lang="ko-KR" altLang="en-US" b="1" dirty="0" smtClean="0">
+                <a:solidFill>
+                  <a:schemeClr val="tx1"/>
+                </a:solidFill>
+              </a:rPr>
+              <a:t>구현</a:t>
+            </a:r>
+            <a:endParaRPr lang="en-US" altLang="ko-KR" b="1" dirty="0" smtClean="0">
+              <a:solidFill>
+                <a:schemeClr val="tx1"/>
+              </a:solidFill>
+            </a:endParaRPr>
+          </a:p>
+          <a:p>
+            <a:pPr marL="800100" lvl="1" indent="-342900">
+              <a:lnSpc>
+                <a:spcPct val="150000"/>
+              </a:lnSpc>
+              <a:buFontTx/>
+              <a:buChar char="-"/>
+            </a:pPr>
+            <a:r>
+              <a:rPr lang="ko-KR" altLang="en-US" b="1" dirty="0" smtClean="0">
+                <a:solidFill>
+                  <a:schemeClr val="tx1"/>
+                </a:solidFill>
+              </a:rPr>
+              <a:t>참가자</a:t>
+            </a:r>
+            <a:r>
+              <a:rPr lang="en-US" altLang="ko-KR" b="1" dirty="0" smtClean="0">
+                <a:solidFill>
+                  <a:schemeClr val="tx1"/>
+                </a:solidFill>
+              </a:rPr>
+              <a:t>/</a:t>
+            </a:r>
+            <a:r>
+              <a:rPr lang="ko-KR" altLang="en-US" b="1" smtClean="0">
+                <a:solidFill>
+                  <a:schemeClr val="tx1"/>
+                </a:solidFill>
+              </a:rPr>
+              <a:t>출제자 화면에 </a:t>
+            </a:r>
+            <a:r>
+              <a:rPr lang="ko-KR" altLang="en-US" b="1" dirty="0" smtClean="0">
+                <a:solidFill>
+                  <a:schemeClr val="tx1"/>
+                </a:solidFill>
+              </a:rPr>
+              <a:t>지우개 기능</a:t>
+            </a:r>
+            <a:endParaRPr lang="en-US" altLang="ko-KR" b="1" dirty="0" smtClean="0">
+              <a:solidFill>
+                <a:schemeClr val="tx1"/>
+              </a:solidFill>
+            </a:endParaRPr>
+          </a:p>
+          <a:p>
+            <a:pPr marL="800100" lvl="1" indent="-342900">
+              <a:lnSpc>
+                <a:spcPct val="150000"/>
+              </a:lnSpc>
+              <a:buFontTx/>
+              <a:buChar char="-"/>
+            </a:pPr>
+            <a:r>
+              <a:rPr lang="ko-KR" altLang="en-US" b="1" dirty="0" smtClean="0">
+                <a:solidFill>
+                  <a:schemeClr val="tx1"/>
+                </a:solidFill>
+              </a:rPr>
+              <a:t>일정 </a:t>
+            </a:r>
+            <a:r>
+              <a:rPr lang="ko-KR" altLang="en-US" b="1" dirty="0">
+                <a:solidFill>
+                  <a:schemeClr val="tx1"/>
+                </a:solidFill>
+              </a:rPr>
+              <a:t>시간 못 맞추면 힌트로 카테고리 </a:t>
+            </a:r>
+            <a:r>
+              <a:rPr lang="ko-KR" altLang="en-US" b="1" dirty="0" smtClean="0">
+                <a:solidFill>
+                  <a:schemeClr val="tx1"/>
+                </a:solidFill>
+              </a:rPr>
+              <a:t>출력</a:t>
+            </a:r>
+            <a:endParaRPr lang="en-US" altLang="ko-KR" b="1" dirty="0" smtClean="0">
+              <a:solidFill>
+                <a:schemeClr val="tx1"/>
+              </a:solidFill>
+            </a:endParaRPr>
+          </a:p>
+          <a:p>
+            <a:pPr marL="800100" lvl="1" indent="-342900">
+              <a:lnSpc>
+                <a:spcPct val="150000"/>
+              </a:lnSpc>
+              <a:buFontTx/>
+              <a:buChar char="-"/>
+            </a:pPr>
+            <a:r>
+              <a:rPr lang="ko-KR" altLang="en-US" b="1" dirty="0" err="1" smtClean="0">
+                <a:solidFill>
+                  <a:schemeClr val="tx1"/>
+                </a:solidFill>
+              </a:rPr>
+              <a:t>점수제</a:t>
+            </a:r>
+            <a:r>
+              <a:rPr lang="ko-KR" altLang="en-US" b="1" dirty="0" smtClean="0">
+                <a:solidFill>
+                  <a:schemeClr val="tx1"/>
+                </a:solidFill>
+              </a:rPr>
+              <a:t> </a:t>
+            </a:r>
+            <a:r>
+              <a:rPr lang="ko-KR" altLang="en-US" b="1" dirty="0" smtClean="0">
+                <a:solidFill>
+                  <a:schemeClr val="tx1"/>
+                </a:solidFill>
+              </a:rPr>
+              <a:t>룰 </a:t>
+            </a:r>
+            <a:r>
+              <a:rPr lang="en-US" altLang="ko-KR" b="1" dirty="0" smtClean="0">
+                <a:solidFill>
+                  <a:schemeClr val="tx1"/>
+                </a:solidFill>
+              </a:rPr>
+              <a:t>(5</a:t>
+            </a:r>
+            <a:r>
+              <a:rPr lang="ko-KR" altLang="en-US" b="1" smtClean="0">
+                <a:solidFill>
+                  <a:schemeClr val="tx1"/>
+                </a:solidFill>
+              </a:rPr>
+              <a:t>라운드</a:t>
+            </a:r>
+            <a:r>
+              <a:rPr lang="en-US" altLang="ko-KR" b="1" dirty="0" smtClean="0">
+                <a:solidFill>
+                  <a:schemeClr val="tx1"/>
+                </a:solidFill>
+              </a:rPr>
+              <a:t>, 60</a:t>
+            </a:r>
+            <a:r>
+              <a:rPr lang="ko-KR" altLang="en-US" b="1" smtClean="0">
+                <a:solidFill>
+                  <a:schemeClr val="tx1"/>
+                </a:solidFill>
+              </a:rPr>
+              <a:t>초 </a:t>
+            </a:r>
+            <a:r>
+              <a:rPr lang="en-US" altLang="ko-KR" b="1" dirty="0" smtClean="0">
+                <a:solidFill>
+                  <a:schemeClr val="tx1"/>
+                </a:solidFill>
+              </a:rPr>
+              <a:t>-&gt; 0</a:t>
+            </a:r>
+            <a:r>
+              <a:rPr lang="ko-KR" altLang="en-US" b="1" smtClean="0">
+                <a:solidFill>
+                  <a:schemeClr val="tx1"/>
+                </a:solidFill>
+              </a:rPr>
+              <a:t>초</a:t>
+            </a:r>
+            <a:r>
+              <a:rPr lang="en-US" altLang="ko-KR" b="1" dirty="0" smtClean="0">
+                <a:solidFill>
+                  <a:schemeClr val="tx1"/>
+                </a:solidFill>
+              </a:rPr>
+              <a:t>) (</a:t>
+            </a:r>
+            <a:r>
+              <a:rPr lang="ko-KR" altLang="en-US" b="1" smtClean="0">
+                <a:solidFill>
+                  <a:schemeClr val="tx1"/>
+                </a:solidFill>
+              </a:rPr>
+              <a:t>완</a:t>
+            </a:r>
+            <a:r>
+              <a:rPr lang="en-US" altLang="ko-KR" b="1" dirty="0" smtClean="0">
+                <a:solidFill>
+                  <a:schemeClr val="tx1"/>
+                </a:solidFill>
+              </a:rPr>
+              <a:t>)</a:t>
+            </a:r>
+            <a:endParaRPr lang="en-US" altLang="ko-KR" b="1" dirty="0">
+              <a:solidFill>
+                <a:schemeClr val="tx1"/>
+              </a:solidFill>
+            </a:endParaRPr>
+          </a:p>
+          <a:p>
+            <a:pPr marL="1257300" lvl="2" indent="-342900">
+              <a:lnSpc>
+                <a:spcPct val="150000"/>
+              </a:lnSpc>
+              <a:buFontTx/>
+              <a:buChar char="-"/>
+            </a:pPr>
+            <a:r>
+              <a:rPr lang="ko-KR" altLang="en-US" b="1" dirty="0" smtClean="0">
+                <a:solidFill>
+                  <a:schemeClr val="tx1"/>
+                </a:solidFill>
+              </a:rPr>
+              <a:t>최초 출제자는 선착순</a:t>
+            </a:r>
+            <a:endParaRPr lang="en-US" altLang="ko-KR" b="1" dirty="0" smtClean="0">
+              <a:solidFill>
+                <a:schemeClr val="tx1"/>
+              </a:solidFill>
+            </a:endParaRPr>
+          </a:p>
+          <a:p>
+            <a:pPr marL="1257300" lvl="2" indent="-342900">
+              <a:lnSpc>
+                <a:spcPct val="150000"/>
+              </a:lnSpc>
+              <a:buFontTx/>
+              <a:buChar char="-"/>
+            </a:pPr>
+            <a:r>
+              <a:rPr lang="en-US" altLang="ko-KR" b="1" dirty="0" smtClean="0">
+                <a:solidFill>
+                  <a:schemeClr val="tx1"/>
+                </a:solidFill>
+              </a:rPr>
+              <a:t>60 ~ 30</a:t>
+            </a:r>
+            <a:r>
+              <a:rPr lang="ko-KR" altLang="en-US" b="1" smtClean="0">
+                <a:solidFill>
+                  <a:schemeClr val="tx1"/>
+                </a:solidFill>
+              </a:rPr>
+              <a:t>초 </a:t>
+            </a:r>
+            <a:r>
+              <a:rPr lang="en-US" altLang="ko-KR" b="1" dirty="0" smtClean="0">
+                <a:solidFill>
+                  <a:schemeClr val="tx1"/>
+                </a:solidFill>
+              </a:rPr>
+              <a:t>– </a:t>
+            </a:r>
+            <a:r>
+              <a:rPr lang="ko-KR" altLang="en-US" b="1" smtClean="0">
+                <a:solidFill>
+                  <a:schemeClr val="tx1"/>
+                </a:solidFill>
+              </a:rPr>
+              <a:t>출제자의 문제를 맞추면</a:t>
+            </a:r>
+            <a:r>
+              <a:rPr lang="en-US" altLang="ko-KR" b="1" dirty="0" smtClean="0">
+                <a:solidFill>
+                  <a:schemeClr val="tx1"/>
+                </a:solidFill>
+              </a:rPr>
+              <a:t>,</a:t>
+            </a:r>
+            <a:r>
+              <a:rPr lang="ko-KR" altLang="en-US" b="1" smtClean="0">
+                <a:solidFill>
+                  <a:schemeClr val="tx1"/>
+                </a:solidFill>
+              </a:rPr>
+              <a:t> 출제자가 </a:t>
+            </a:r>
+            <a:r>
+              <a:rPr lang="en-US" altLang="ko-KR" b="1" dirty="0" smtClean="0">
+                <a:solidFill>
+                  <a:schemeClr val="tx1"/>
+                </a:solidFill>
+              </a:rPr>
+              <a:t>2</a:t>
+            </a:r>
+            <a:r>
+              <a:rPr lang="ko-KR" altLang="en-US" b="1" smtClean="0">
+                <a:solidFill>
+                  <a:schemeClr val="tx1"/>
+                </a:solidFill>
+              </a:rPr>
+              <a:t>점 획득</a:t>
+            </a:r>
+            <a:r>
+              <a:rPr lang="en-US" altLang="ko-KR" b="1" dirty="0" smtClean="0">
+                <a:solidFill>
+                  <a:schemeClr val="tx1"/>
+                </a:solidFill>
+              </a:rPr>
+              <a:t>, </a:t>
+            </a:r>
+            <a:r>
+              <a:rPr lang="ko-KR" altLang="en-US" b="1" smtClean="0">
+                <a:solidFill>
+                  <a:schemeClr val="tx1"/>
+                </a:solidFill>
+              </a:rPr>
+              <a:t>참가자는 </a:t>
+            </a:r>
+            <a:r>
+              <a:rPr lang="en-US" altLang="ko-KR" b="1" dirty="0" smtClean="0">
+                <a:solidFill>
+                  <a:schemeClr val="tx1"/>
+                </a:solidFill>
+              </a:rPr>
+              <a:t>3</a:t>
+            </a:r>
+            <a:r>
+              <a:rPr lang="ko-KR" altLang="en-US" b="1" smtClean="0">
+                <a:solidFill>
+                  <a:schemeClr val="tx1"/>
+                </a:solidFill>
+              </a:rPr>
+              <a:t>점 획득</a:t>
+            </a:r>
+            <a:endParaRPr lang="en-US" altLang="ko-KR" b="1" dirty="0" smtClean="0">
+              <a:solidFill>
+                <a:schemeClr val="tx1"/>
+              </a:solidFill>
+            </a:endParaRPr>
+          </a:p>
+          <a:p>
+            <a:pPr marL="1257300" lvl="2" indent="-342900">
+              <a:lnSpc>
+                <a:spcPct val="150000"/>
+              </a:lnSpc>
+              <a:buFontTx/>
+              <a:buChar char="-"/>
+            </a:pPr>
+            <a:r>
+              <a:rPr lang="en-US" altLang="ko-KR" b="1" dirty="0" smtClean="0">
+                <a:solidFill>
+                  <a:schemeClr val="tx1"/>
+                </a:solidFill>
+              </a:rPr>
+              <a:t>30</a:t>
+            </a:r>
+            <a:r>
+              <a:rPr lang="ko-KR" altLang="en-US" b="1">
+                <a:solidFill>
+                  <a:schemeClr val="tx1"/>
+                </a:solidFill>
+              </a:rPr>
+              <a:t> </a:t>
+            </a:r>
+            <a:r>
+              <a:rPr lang="en-US" altLang="ko-KR" b="1" dirty="0" smtClean="0">
+                <a:solidFill>
+                  <a:schemeClr val="tx1"/>
+                </a:solidFill>
+              </a:rPr>
+              <a:t>~ 0</a:t>
+            </a:r>
+            <a:r>
+              <a:rPr lang="ko-KR" altLang="en-US" b="1" smtClean="0">
+                <a:solidFill>
+                  <a:schemeClr val="tx1"/>
+                </a:solidFill>
+              </a:rPr>
+              <a:t>초 </a:t>
+            </a:r>
+            <a:r>
+              <a:rPr lang="en-US" altLang="ko-KR" b="1" dirty="0" smtClean="0">
+                <a:solidFill>
+                  <a:schemeClr val="tx1"/>
+                </a:solidFill>
+              </a:rPr>
+              <a:t>– </a:t>
+            </a:r>
+            <a:r>
+              <a:rPr lang="ko-KR" altLang="en-US" b="1" smtClean="0">
+                <a:solidFill>
+                  <a:schemeClr val="tx1"/>
+                </a:solidFill>
+              </a:rPr>
+              <a:t>힌트 출력</a:t>
+            </a:r>
+            <a:r>
+              <a:rPr lang="en-US" altLang="ko-KR" b="1" dirty="0" smtClean="0">
+                <a:solidFill>
+                  <a:schemeClr val="tx1"/>
+                </a:solidFill>
+              </a:rPr>
+              <a:t>(</a:t>
+            </a:r>
+            <a:r>
+              <a:rPr lang="ko-KR" altLang="en-US" b="1" smtClean="0">
+                <a:solidFill>
+                  <a:schemeClr val="tx1"/>
+                </a:solidFill>
+              </a:rPr>
+              <a:t>카테고리</a:t>
+            </a:r>
+            <a:r>
+              <a:rPr lang="en-US" altLang="ko-KR" b="1" dirty="0" smtClean="0">
+                <a:solidFill>
+                  <a:schemeClr val="tx1"/>
+                </a:solidFill>
+              </a:rPr>
+              <a:t>). </a:t>
+            </a:r>
+            <a:r>
+              <a:rPr lang="ko-KR" altLang="en-US" b="1" smtClean="0">
+                <a:solidFill>
+                  <a:schemeClr val="tx1"/>
+                </a:solidFill>
+              </a:rPr>
+              <a:t>출제자의 </a:t>
+            </a:r>
+            <a:r>
+              <a:rPr lang="ko-KR" altLang="en-US" b="1">
+                <a:solidFill>
+                  <a:schemeClr val="tx1"/>
+                </a:solidFill>
+              </a:rPr>
+              <a:t>문제를 맞추면</a:t>
+            </a:r>
+            <a:r>
+              <a:rPr lang="en-US" altLang="ko-KR" b="1" dirty="0">
+                <a:solidFill>
+                  <a:schemeClr val="tx1"/>
+                </a:solidFill>
+              </a:rPr>
+              <a:t>,</a:t>
+            </a:r>
+            <a:r>
+              <a:rPr lang="ko-KR" altLang="en-US" b="1">
+                <a:solidFill>
+                  <a:schemeClr val="tx1"/>
+                </a:solidFill>
+              </a:rPr>
+              <a:t> 출제자가 </a:t>
+            </a:r>
+            <a:r>
+              <a:rPr lang="en-US" altLang="ko-KR" b="1" dirty="0" smtClean="0">
+                <a:solidFill>
+                  <a:schemeClr val="tx1"/>
+                </a:solidFill>
+              </a:rPr>
+              <a:t>1</a:t>
+            </a:r>
+            <a:r>
+              <a:rPr lang="ko-KR" altLang="en-US" b="1" smtClean="0">
+                <a:solidFill>
+                  <a:schemeClr val="tx1"/>
+                </a:solidFill>
+              </a:rPr>
+              <a:t>점 </a:t>
+            </a:r>
+            <a:r>
+              <a:rPr lang="ko-KR" altLang="en-US" b="1">
+                <a:solidFill>
+                  <a:schemeClr val="tx1"/>
+                </a:solidFill>
+              </a:rPr>
+              <a:t>획득</a:t>
+            </a:r>
+            <a:r>
+              <a:rPr lang="en-US" altLang="ko-KR" b="1" dirty="0">
+                <a:solidFill>
+                  <a:schemeClr val="tx1"/>
+                </a:solidFill>
+              </a:rPr>
+              <a:t>, </a:t>
+            </a:r>
+            <a:r>
+              <a:rPr lang="ko-KR" altLang="en-US" b="1">
+                <a:solidFill>
+                  <a:schemeClr val="tx1"/>
+                </a:solidFill>
+              </a:rPr>
+              <a:t>참가자는 </a:t>
+            </a:r>
+            <a:r>
+              <a:rPr lang="en-US" altLang="ko-KR" b="1" dirty="0" smtClean="0">
+                <a:solidFill>
+                  <a:schemeClr val="tx1"/>
+                </a:solidFill>
+              </a:rPr>
+              <a:t>2</a:t>
+            </a:r>
+            <a:r>
+              <a:rPr lang="ko-KR" altLang="en-US" b="1" smtClean="0">
+                <a:solidFill>
+                  <a:schemeClr val="tx1"/>
+                </a:solidFill>
+              </a:rPr>
+              <a:t>점 획득</a:t>
+            </a:r>
+            <a:endParaRPr lang="en-US" altLang="ko-KR" b="1" dirty="0" smtClean="0">
+              <a:solidFill>
+                <a:schemeClr val="tx1"/>
+              </a:solidFill>
+            </a:endParaRPr>
+          </a:p>
+          <a:p>
+            <a:pPr marL="1257300" lvl="2" indent="-342900">
+              <a:lnSpc>
+                <a:spcPct val="150000"/>
+              </a:lnSpc>
+              <a:buFontTx/>
+              <a:buChar char="-"/>
+            </a:pPr>
+            <a:r>
+              <a:rPr lang="en-US" altLang="ko-KR" b="1" dirty="0" smtClean="0">
+                <a:solidFill>
+                  <a:schemeClr val="tx1"/>
+                </a:solidFill>
+              </a:rPr>
+              <a:t>0</a:t>
+            </a:r>
+            <a:r>
+              <a:rPr lang="ko-KR" altLang="en-US" b="1" smtClean="0">
+                <a:solidFill>
+                  <a:schemeClr val="tx1"/>
+                </a:solidFill>
+              </a:rPr>
+              <a:t>초 이후 </a:t>
+            </a:r>
+            <a:r>
+              <a:rPr lang="en-US" altLang="ko-KR" b="1" dirty="0" smtClean="0">
+                <a:solidFill>
+                  <a:schemeClr val="tx1"/>
+                </a:solidFill>
+              </a:rPr>
+              <a:t>– </a:t>
+            </a:r>
+            <a:r>
+              <a:rPr lang="ko-KR" altLang="en-US" b="1" smtClean="0">
+                <a:solidFill>
+                  <a:schemeClr val="tx1"/>
+                </a:solidFill>
+              </a:rPr>
+              <a:t>바로 종료 후</a:t>
+            </a:r>
+            <a:r>
+              <a:rPr lang="en-US" altLang="ko-KR" b="1" dirty="0" smtClean="0">
+                <a:solidFill>
+                  <a:schemeClr val="tx1"/>
+                </a:solidFill>
+              </a:rPr>
+              <a:t>, </a:t>
+            </a:r>
+            <a:r>
+              <a:rPr lang="ko-KR" altLang="en-US" b="1" smtClean="0">
+                <a:solidFill>
+                  <a:schemeClr val="tx1"/>
+                </a:solidFill>
+              </a:rPr>
+              <a:t>정답 공개</a:t>
+            </a:r>
+            <a:r>
+              <a:rPr lang="en-US" altLang="ko-KR" b="1" dirty="0" smtClean="0">
+                <a:solidFill>
+                  <a:schemeClr val="tx1"/>
+                </a:solidFill>
+              </a:rPr>
+              <a:t>. </a:t>
+            </a:r>
+            <a:r>
+              <a:rPr lang="ko-KR" altLang="en-US" b="1" smtClean="0">
+                <a:solidFill>
+                  <a:schemeClr val="tx1"/>
+                </a:solidFill>
+              </a:rPr>
+              <a:t>출제자 </a:t>
+            </a:r>
+            <a:r>
+              <a:rPr lang="en-US" altLang="ko-KR" b="1" dirty="0" smtClean="0">
+                <a:solidFill>
+                  <a:schemeClr val="tx1"/>
+                </a:solidFill>
+              </a:rPr>
+              <a:t>1</a:t>
+            </a:r>
+            <a:r>
+              <a:rPr lang="ko-KR" altLang="en-US" b="1" smtClean="0">
+                <a:solidFill>
+                  <a:schemeClr val="tx1"/>
+                </a:solidFill>
+              </a:rPr>
+              <a:t>점 감점</a:t>
+            </a:r>
+            <a:r>
+              <a:rPr lang="en-US" altLang="ko-KR" b="1" dirty="0" smtClean="0">
+                <a:solidFill>
+                  <a:schemeClr val="tx1"/>
+                </a:solidFill>
+              </a:rPr>
+              <a:t>, </a:t>
+            </a:r>
+            <a:r>
+              <a:rPr lang="ko-KR" altLang="en-US" b="1" smtClean="0">
+                <a:solidFill>
+                  <a:schemeClr val="tx1"/>
+                </a:solidFill>
+              </a:rPr>
+              <a:t>다음 출제자는 기존 출제자 유지 </a:t>
+            </a:r>
+            <a:endParaRPr lang="en-US" altLang="ko-KR" b="1" dirty="0" smtClean="0">
+              <a:solidFill>
+                <a:schemeClr val="tx1"/>
+              </a:solidFill>
+            </a:endParaRPr>
+          </a:p>
+        </p:txBody>
+      </p:sp>
+      <p:sp>
+        <p:nvSpPr>
+          <p:cNvPr id="2" name="TextBox 1"/>
+          <p:cNvSpPr txBox="1"/>
+          <p:nvPr/>
+        </p:nvSpPr>
+        <p:spPr>
+          <a:xfrm>
+            <a:off x="244862" y="238662"/>
+            <a:ext cx="14190667" cy="923330"/>
+          </a:xfrm>
+          <a:prstGeom prst="rect">
+            <a:avLst/>
+          </a:prstGeom>
+          <a:noFill/>
+        </p:spPr>
+        <p:txBody>
+          <a:bodyPr wrap="square" rtlCol="0">
+            <a:spAutoFit/>
+          </a:bodyPr>
+          <a:lstStyle/>
+          <a:p>
+            <a:r>
+              <a:rPr lang="en-US" altLang="ko-KR" sz="5400" b="1" dirty="0" smtClean="0">
+                <a:solidFill>
+                  <a:schemeClr val="bg1"/>
+                </a:solidFill>
+                <a:latin typeface="LG스마트체2.0 Regular" panose="020B0600000101010101" pitchFamily="50" charset="-127"/>
+                <a:ea typeface="LG스마트체2.0 Regular" panose="020B0600000101010101" pitchFamily="50" charset="-127"/>
+              </a:rPr>
+              <a:t>0. </a:t>
+            </a:r>
+            <a:r>
+              <a:rPr lang="ko-KR" altLang="en-US" sz="5400" b="1" smtClean="0">
+                <a:solidFill>
+                  <a:schemeClr val="bg1"/>
+                </a:solidFill>
+                <a:latin typeface="LG스마트체2.0 Regular" panose="020B0600000101010101" pitchFamily="50" charset="-127"/>
+                <a:ea typeface="LG스마트체2.0 Regular" panose="020B0600000101010101" pitchFamily="50" charset="-127"/>
+              </a:rPr>
+              <a:t>기획</a:t>
+            </a:r>
+            <a:r>
+              <a:rPr lang="en-US" altLang="ko-KR" sz="5400" b="1" dirty="0" smtClean="0">
+                <a:solidFill>
+                  <a:schemeClr val="bg1"/>
+                </a:solidFill>
+                <a:latin typeface="LG스마트체2.0 Regular" panose="020B0600000101010101" pitchFamily="50" charset="-127"/>
+                <a:ea typeface="LG스마트체2.0 Regular" panose="020B0600000101010101" pitchFamily="50" charset="-127"/>
+              </a:rPr>
+              <a:t>(</a:t>
+            </a:r>
+            <a:r>
+              <a:rPr lang="en-US" altLang="ko-KR" sz="5400" b="1" dirty="0" smtClean="0">
+                <a:solidFill>
+                  <a:schemeClr val="bg1"/>
+                </a:solidFill>
+                <a:latin typeface="LG스마트체2.0 Regular" panose="020B0600000101010101" pitchFamily="50" charset="-127"/>
+                <a:ea typeface="LG스마트체2.0 Regular" panose="020B0600000101010101" pitchFamily="50" charset="-127"/>
+              </a:rPr>
+              <a:t>260421)</a:t>
+            </a:r>
+            <a:endParaRPr lang="ko-KR" altLang="en-US" sz="5400" b="1" dirty="0">
+              <a:solidFill>
+                <a:schemeClr val="bg1"/>
+              </a:solidFill>
+              <a:latin typeface="LG스마트체2.0 Regular" panose="020B0600000101010101" pitchFamily="50" charset="-127"/>
+              <a:ea typeface="LG스마트체2.0 Regular" panose="020B0600000101010101" pitchFamily="50" charset="-127"/>
+            </a:endParaRPr>
+          </a:p>
+        </p:txBody>
+      </p:sp>
+      <p:sp>
+        <p:nvSpPr>
+          <p:cNvPr id="5" name="직사각형 4"/>
+          <p:cNvSpPr/>
+          <p:nvPr/>
+        </p:nvSpPr>
+        <p:spPr>
+          <a:xfrm>
+            <a:off x="701541" y="1561514"/>
+            <a:ext cx="7743960" cy="8653640"/>
+          </a:xfrm>
+          <a:prstGeom prst="rect">
+            <a:avLst/>
+          </a:prstGeom>
+          <a:solidFill>
+            <a:srgbClr val="FFFF00"/>
+          </a:solidFill>
+        </p:spPr>
+        <p:style>
+          <a:lnRef idx="2">
+            <a:schemeClr val="accent1">
+              <a:shade val="50000"/>
+            </a:schemeClr>
+          </a:lnRef>
+          <a:fillRef idx="1">
+            <a:schemeClr val="accent1"/>
+          </a:fillRef>
+          <a:effectRef idx="0">
+            <a:schemeClr val="accent1"/>
+          </a:effectRef>
+          <a:fontRef idx="minor">
+            <a:schemeClr val="lt1"/>
+          </a:fontRef>
+        </p:style>
+        <p:txBody>
+          <a:bodyPr rtlCol="0" anchor="t"/>
+          <a:lstStyle/>
+          <a:p>
+            <a:pPr marL="342900" indent="-342900">
+              <a:lnSpc>
+                <a:spcPct val="150000"/>
+              </a:lnSpc>
+              <a:buFontTx/>
+              <a:buChar char="-"/>
+            </a:pPr>
+            <a:r>
+              <a:rPr lang="en-US" altLang="ko-KR" b="1" dirty="0" smtClean="0">
+                <a:solidFill>
+                  <a:schemeClr val="tx1"/>
+                </a:solidFill>
+              </a:rPr>
+              <a:t>4/21 </a:t>
+            </a:r>
+            <a:r>
+              <a:rPr lang="ko-KR" altLang="en-US" b="1" smtClean="0">
+                <a:solidFill>
+                  <a:schemeClr val="tx1"/>
+                </a:solidFill>
+              </a:rPr>
+              <a:t>화 오후 한시반 </a:t>
+            </a:r>
+            <a:r>
+              <a:rPr lang="en-US" altLang="ko-KR" b="1" dirty="0" smtClean="0">
+                <a:solidFill>
+                  <a:schemeClr val="tx1"/>
+                </a:solidFill>
+              </a:rPr>
+              <a:t>2</a:t>
+            </a:r>
+            <a:r>
+              <a:rPr lang="ko-KR" altLang="en-US" b="1" smtClean="0">
+                <a:solidFill>
+                  <a:schemeClr val="tx1"/>
+                </a:solidFill>
+              </a:rPr>
+              <a:t>차 데모</a:t>
+            </a:r>
+            <a:endParaRPr lang="en-US" altLang="ko-KR" b="1" dirty="0" smtClean="0">
+              <a:solidFill>
+                <a:schemeClr val="tx1"/>
+              </a:solidFill>
+            </a:endParaRPr>
+          </a:p>
+          <a:p>
+            <a:pPr marL="342900" indent="-342900">
+              <a:lnSpc>
+                <a:spcPct val="150000"/>
+              </a:lnSpc>
+              <a:buFontTx/>
+              <a:buChar char="-"/>
+            </a:pPr>
+            <a:r>
+              <a:rPr lang="en-US" altLang="ko-KR" b="1" dirty="0" smtClean="0">
+                <a:solidFill>
+                  <a:schemeClr val="tx1"/>
+                </a:solidFill>
+              </a:rPr>
+              <a:t>4/22 </a:t>
+            </a:r>
+            <a:r>
+              <a:rPr lang="ko-KR" altLang="en-US" b="1" smtClean="0">
+                <a:solidFill>
+                  <a:schemeClr val="tx1"/>
+                </a:solidFill>
+              </a:rPr>
+              <a:t>수 오후 한시반 </a:t>
+            </a:r>
+            <a:r>
+              <a:rPr lang="en-US" altLang="ko-KR" b="1" dirty="0" smtClean="0">
+                <a:solidFill>
+                  <a:schemeClr val="tx1"/>
+                </a:solidFill>
+              </a:rPr>
+              <a:t>3</a:t>
+            </a:r>
+            <a:r>
+              <a:rPr lang="ko-KR" altLang="en-US" b="1" smtClean="0">
+                <a:solidFill>
+                  <a:schemeClr val="tx1"/>
+                </a:solidFill>
+              </a:rPr>
+              <a:t>차 데모</a:t>
+            </a:r>
+            <a:endParaRPr lang="en-US" altLang="ko-KR" b="1" dirty="0" smtClean="0">
+              <a:solidFill>
+                <a:schemeClr val="tx1"/>
+              </a:solidFill>
+            </a:endParaRPr>
+          </a:p>
+          <a:p>
+            <a:pPr marL="342900" indent="-342900">
+              <a:lnSpc>
+                <a:spcPct val="150000"/>
+              </a:lnSpc>
+              <a:buFontTx/>
+              <a:buChar char="-"/>
+            </a:pPr>
+            <a:r>
+              <a:rPr lang="en-US" altLang="ko-KR" b="1" dirty="0" smtClean="0">
+                <a:solidFill>
+                  <a:schemeClr val="tx1"/>
+                </a:solidFill>
+              </a:rPr>
+              <a:t>4/23 </a:t>
+            </a:r>
+            <a:r>
+              <a:rPr lang="ko-KR" altLang="en-US" b="1" smtClean="0">
+                <a:solidFill>
+                  <a:schemeClr val="tx1"/>
+                </a:solidFill>
+              </a:rPr>
+              <a:t>목 오후 한시반 최종 발표</a:t>
+            </a:r>
+            <a:r>
+              <a:rPr lang="en-US" altLang="ko-KR" b="1" dirty="0" smtClean="0">
+                <a:solidFill>
+                  <a:schemeClr val="tx1"/>
+                </a:solidFill>
+              </a:rPr>
+              <a:t>, </a:t>
+            </a:r>
+            <a:r>
+              <a:rPr lang="ko-KR" altLang="en-US" b="1" smtClean="0">
+                <a:solidFill>
+                  <a:schemeClr val="tx1"/>
+                </a:solidFill>
+              </a:rPr>
+              <a:t>세시반 반별 전시회</a:t>
+            </a:r>
+            <a:endParaRPr lang="en-US" altLang="ko-KR" b="1" dirty="0" smtClean="0">
+              <a:solidFill>
+                <a:schemeClr val="tx1"/>
+              </a:solidFill>
+            </a:endParaRPr>
+          </a:p>
+        </p:txBody>
+      </p:sp>
+      <p:grpSp>
+        <p:nvGrpSpPr>
+          <p:cNvPr id="20" name="그룹 19"/>
+          <p:cNvGrpSpPr/>
+          <p:nvPr/>
+        </p:nvGrpSpPr>
+        <p:grpSpPr>
+          <a:xfrm>
+            <a:off x="1822813" y="3831739"/>
+            <a:ext cx="4655366" cy="3357592"/>
+            <a:chOff x="11739591" y="2631786"/>
+            <a:chExt cx="4655366" cy="3357592"/>
+          </a:xfrm>
+        </p:grpSpPr>
+        <p:sp>
+          <p:nvSpPr>
+            <p:cNvPr id="11" name="직사각형 10"/>
+            <p:cNvSpPr/>
+            <p:nvPr/>
+          </p:nvSpPr>
+          <p:spPr>
+            <a:xfrm>
+              <a:off x="12635344" y="3056708"/>
+              <a:ext cx="3759613" cy="2926080"/>
+            </a:xfrm>
+            <a:prstGeom prst="rect">
+              <a:avLst/>
+            </a:prstGeom>
+            <a:solidFill>
+              <a:schemeClr val="bg1"/>
+            </a:solidFill>
+            <a:ln w="28575">
+              <a:solidFill>
+                <a:schemeClr val="tx1"/>
+              </a:solidFill>
+            </a:ln>
+          </p:spPr>
+          <p:style>
+            <a:lnRef idx="2">
+              <a:schemeClr val="accent1">
+                <a:shade val="50000"/>
+              </a:schemeClr>
+            </a:lnRef>
+            <a:fillRef idx="1">
+              <a:schemeClr val="accent1"/>
+            </a:fillRef>
+            <a:effectRef idx="0">
+              <a:schemeClr val="accent1"/>
+            </a:effectRef>
+            <a:fontRef idx="minor">
+              <a:schemeClr val="lt1"/>
+            </a:fontRef>
+          </p:style>
+          <p:txBody>
+            <a:bodyPr rtlCol="0" anchor="ctr"/>
+            <a:lstStyle/>
+            <a:p>
+              <a:pPr algn="ctr"/>
+              <a:endParaRPr lang="ko-KR" altLang="en-US" b="1"/>
+            </a:p>
+          </p:txBody>
+        </p:sp>
+        <p:cxnSp>
+          <p:nvCxnSpPr>
+            <p:cNvPr id="12" name="직선 연결선 11"/>
+            <p:cNvCxnSpPr/>
+            <p:nvPr/>
+          </p:nvCxnSpPr>
+          <p:spPr>
+            <a:xfrm>
+              <a:off x="14435529" y="4513217"/>
+              <a:ext cx="0" cy="1476161"/>
+            </a:xfrm>
+            <a:prstGeom prst="line">
+              <a:avLst/>
+            </a:prstGeom>
+            <a:ln w="38100">
+              <a:solidFill>
+                <a:schemeClr val="tx1"/>
+              </a:solidFill>
+            </a:ln>
+          </p:spPr>
+          <p:style>
+            <a:lnRef idx="1">
+              <a:schemeClr val="accent1"/>
+            </a:lnRef>
+            <a:fillRef idx="0">
+              <a:schemeClr val="accent1"/>
+            </a:fillRef>
+            <a:effectRef idx="0">
+              <a:schemeClr val="accent1"/>
+            </a:effectRef>
+            <a:fontRef idx="minor">
+              <a:schemeClr val="tx1"/>
+            </a:fontRef>
+          </p:style>
+        </p:cxnSp>
+        <p:cxnSp>
+          <p:nvCxnSpPr>
+            <p:cNvPr id="13" name="직선 연결선 12"/>
+            <p:cNvCxnSpPr>
+              <a:stCxn id="11" idx="3"/>
+              <a:endCxn id="11" idx="1"/>
+            </p:cNvCxnSpPr>
+            <p:nvPr/>
+          </p:nvCxnSpPr>
+          <p:spPr>
+            <a:xfrm flipH="1">
+              <a:off x="12635344" y="4519748"/>
+              <a:ext cx="3759613" cy="0"/>
+            </a:xfrm>
+            <a:prstGeom prst="line">
+              <a:avLst/>
+            </a:prstGeom>
+            <a:ln w="38100">
+              <a:solidFill>
+                <a:schemeClr val="tx1"/>
+              </a:solidFill>
+            </a:ln>
+          </p:spPr>
+          <p:style>
+            <a:lnRef idx="1">
+              <a:schemeClr val="accent1"/>
+            </a:lnRef>
+            <a:fillRef idx="0">
+              <a:schemeClr val="accent1"/>
+            </a:fillRef>
+            <a:effectRef idx="0">
+              <a:schemeClr val="accent1"/>
+            </a:effectRef>
+            <a:fontRef idx="minor">
+              <a:schemeClr val="tx1"/>
+            </a:fontRef>
+          </p:style>
+        </p:cxnSp>
+        <p:sp>
+          <p:nvSpPr>
+            <p:cNvPr id="7" name="TextBox 6"/>
+            <p:cNvSpPr txBox="1"/>
+            <p:nvPr/>
+          </p:nvSpPr>
+          <p:spPr>
+            <a:xfrm>
+              <a:off x="11849395" y="2631786"/>
+              <a:ext cx="1418978" cy="369332"/>
+            </a:xfrm>
+            <a:prstGeom prst="rect">
+              <a:avLst/>
+            </a:prstGeom>
+            <a:noFill/>
+          </p:spPr>
+          <p:txBody>
+            <a:bodyPr wrap="none" rtlCol="0">
+              <a:spAutoFit/>
+            </a:bodyPr>
+            <a:lstStyle/>
+            <a:p>
+              <a:r>
+                <a:rPr lang="ko-KR" altLang="en-US" b="1" dirty="0" smtClean="0"/>
+                <a:t>화면 </a:t>
+              </a:r>
+              <a:r>
+                <a:rPr lang="en-US" altLang="ko-KR" b="1" dirty="0" smtClean="0"/>
+                <a:t>UI </a:t>
+              </a:r>
+              <a:r>
+                <a:rPr lang="ko-KR" altLang="en-US" b="1" smtClean="0"/>
+                <a:t>구성</a:t>
+              </a:r>
+              <a:endParaRPr lang="ko-KR" altLang="en-US" b="1"/>
+            </a:p>
+          </p:txBody>
+        </p:sp>
+        <p:sp>
+          <p:nvSpPr>
+            <p:cNvPr id="8" name="TextBox 7"/>
+            <p:cNvSpPr txBox="1"/>
+            <p:nvPr/>
+          </p:nvSpPr>
+          <p:spPr>
+            <a:xfrm>
+              <a:off x="12729613" y="3151052"/>
+              <a:ext cx="1194558" cy="307777"/>
+            </a:xfrm>
+            <a:prstGeom prst="rect">
+              <a:avLst/>
+            </a:prstGeom>
+            <a:noFill/>
+          </p:spPr>
+          <p:txBody>
+            <a:bodyPr wrap="none" rtlCol="0">
+              <a:spAutoFit/>
+            </a:bodyPr>
+            <a:lstStyle/>
+            <a:p>
+              <a:r>
+                <a:rPr lang="ko-KR" altLang="en-US" sz="1400" b="1" dirty="0" smtClean="0"/>
+                <a:t>출제자</a:t>
+              </a:r>
+              <a:r>
+                <a:rPr lang="en-US" altLang="ko-KR" sz="1400" b="1" dirty="0"/>
+                <a:t>(</a:t>
+              </a:r>
+              <a:r>
+                <a:rPr lang="ko-KR" altLang="en-US" sz="1400" b="1" smtClean="0"/>
+                <a:t>점수</a:t>
+              </a:r>
+              <a:r>
+                <a:rPr lang="en-US" altLang="ko-KR" sz="1400" b="1" dirty="0" smtClean="0"/>
+                <a:t>)</a:t>
+              </a:r>
+              <a:endParaRPr lang="ko-KR" altLang="en-US" sz="1400" b="1"/>
+            </a:p>
+          </p:txBody>
+        </p:sp>
+        <p:sp>
+          <p:nvSpPr>
+            <p:cNvPr id="9" name="TextBox 8"/>
+            <p:cNvSpPr txBox="1"/>
+            <p:nvPr/>
+          </p:nvSpPr>
+          <p:spPr>
+            <a:xfrm>
+              <a:off x="12729613" y="4588179"/>
+              <a:ext cx="1366080" cy="307777"/>
+            </a:xfrm>
+            <a:prstGeom prst="rect">
+              <a:avLst/>
+            </a:prstGeom>
+            <a:noFill/>
+          </p:spPr>
+          <p:txBody>
+            <a:bodyPr wrap="none" rtlCol="0">
+              <a:spAutoFit/>
+            </a:bodyPr>
+            <a:lstStyle/>
+            <a:p>
+              <a:r>
+                <a:rPr lang="ko-KR" altLang="en-US" sz="1400" b="1" dirty="0" smtClean="0"/>
+                <a:t>참가자 </a:t>
+              </a:r>
+              <a:r>
+                <a:rPr lang="en-US" altLang="ko-KR" sz="1400" b="1" dirty="0" smtClean="0"/>
+                <a:t>1</a:t>
+              </a:r>
+              <a:r>
+                <a:rPr lang="en-US" altLang="ko-KR" sz="1400" b="1" dirty="0"/>
+                <a:t> (</a:t>
+              </a:r>
+              <a:r>
+                <a:rPr lang="ko-KR" altLang="en-US" sz="1400" b="1"/>
+                <a:t>점수</a:t>
+              </a:r>
+              <a:r>
+                <a:rPr lang="en-US" altLang="ko-KR" sz="1400" b="1" dirty="0"/>
+                <a:t>)</a:t>
+              </a:r>
+              <a:endParaRPr lang="ko-KR" altLang="en-US" sz="1400" b="1" dirty="0"/>
+            </a:p>
+          </p:txBody>
+        </p:sp>
+        <p:sp>
+          <p:nvSpPr>
+            <p:cNvPr id="10" name="TextBox 9"/>
+            <p:cNvSpPr txBox="1"/>
+            <p:nvPr/>
+          </p:nvSpPr>
+          <p:spPr>
+            <a:xfrm>
+              <a:off x="14529799" y="4569839"/>
+              <a:ext cx="1366080" cy="307777"/>
+            </a:xfrm>
+            <a:prstGeom prst="rect">
+              <a:avLst/>
+            </a:prstGeom>
+            <a:noFill/>
+          </p:spPr>
+          <p:txBody>
+            <a:bodyPr wrap="none" rtlCol="0">
+              <a:spAutoFit/>
+            </a:bodyPr>
+            <a:lstStyle/>
+            <a:p>
+              <a:r>
+                <a:rPr lang="ko-KR" altLang="en-US" sz="1400" b="1" dirty="0" smtClean="0"/>
+                <a:t>참가자 </a:t>
+              </a:r>
+              <a:r>
+                <a:rPr lang="en-US" altLang="ko-KR" sz="1400" b="1" dirty="0" smtClean="0"/>
+                <a:t>2 </a:t>
+              </a:r>
+              <a:r>
+                <a:rPr lang="en-US" altLang="ko-KR" sz="1400" b="1" dirty="0"/>
+                <a:t>(</a:t>
+              </a:r>
+              <a:r>
+                <a:rPr lang="ko-KR" altLang="en-US" sz="1400" b="1"/>
+                <a:t>점수</a:t>
+              </a:r>
+              <a:r>
+                <a:rPr lang="en-US" altLang="ko-KR" sz="1400" b="1" dirty="0"/>
+                <a:t>)</a:t>
+              </a:r>
+              <a:endParaRPr lang="ko-KR" altLang="en-US" sz="1400" b="1" dirty="0"/>
+            </a:p>
+          </p:txBody>
+        </p:sp>
+        <p:sp>
+          <p:nvSpPr>
+            <p:cNvPr id="16" name="직사각형 15"/>
+            <p:cNvSpPr/>
+            <p:nvPr/>
+          </p:nvSpPr>
+          <p:spPr>
+            <a:xfrm>
+              <a:off x="11758716" y="3056709"/>
+              <a:ext cx="876627" cy="2926080"/>
+            </a:xfrm>
+            <a:prstGeom prst="rect">
+              <a:avLst/>
+            </a:prstGeom>
+            <a:solidFill>
+              <a:schemeClr val="bg1"/>
+            </a:solidFill>
+            <a:ln w="28575">
+              <a:solidFill>
+                <a:schemeClr val="tx1"/>
+              </a:solidFill>
+            </a:ln>
+          </p:spPr>
+          <p:style>
+            <a:lnRef idx="2">
+              <a:schemeClr val="accent1">
+                <a:shade val="50000"/>
+              </a:schemeClr>
+            </a:lnRef>
+            <a:fillRef idx="1">
+              <a:schemeClr val="accent1"/>
+            </a:fillRef>
+            <a:effectRef idx="0">
+              <a:schemeClr val="accent1"/>
+            </a:effectRef>
+            <a:fontRef idx="minor">
+              <a:schemeClr val="lt1"/>
+            </a:fontRef>
+          </p:style>
+          <p:txBody>
+            <a:bodyPr rtlCol="0" anchor="ctr"/>
+            <a:lstStyle/>
+            <a:p>
+              <a:pPr algn="ctr"/>
+              <a:endParaRPr lang="ko-KR" altLang="en-US" b="1"/>
+            </a:p>
+          </p:txBody>
+        </p:sp>
+        <p:sp>
+          <p:nvSpPr>
+            <p:cNvPr id="17" name="TextBox 16"/>
+            <p:cNvSpPr txBox="1"/>
+            <p:nvPr/>
+          </p:nvSpPr>
+          <p:spPr>
+            <a:xfrm>
+              <a:off x="11739591" y="3151052"/>
+              <a:ext cx="942887" cy="307777"/>
+            </a:xfrm>
+            <a:prstGeom prst="rect">
+              <a:avLst/>
+            </a:prstGeom>
+            <a:noFill/>
+          </p:spPr>
+          <p:txBody>
+            <a:bodyPr wrap="none" rtlCol="0">
+              <a:spAutoFit/>
+            </a:bodyPr>
+            <a:lstStyle/>
+            <a:p>
+              <a:r>
+                <a:rPr lang="ko-KR" altLang="en-US" sz="1400" b="1" dirty="0" smtClean="0"/>
+                <a:t>남은 시간</a:t>
+              </a:r>
+              <a:endParaRPr lang="ko-KR" altLang="en-US" sz="1400" b="1" dirty="0"/>
+            </a:p>
+          </p:txBody>
+        </p:sp>
+        <p:sp>
+          <p:nvSpPr>
+            <p:cNvPr id="18" name="TextBox 17"/>
+            <p:cNvSpPr txBox="1"/>
+            <p:nvPr/>
+          </p:nvSpPr>
+          <p:spPr>
+            <a:xfrm>
+              <a:off x="11849396" y="4056313"/>
+              <a:ext cx="723275" cy="307777"/>
+            </a:xfrm>
+            <a:prstGeom prst="rect">
+              <a:avLst/>
+            </a:prstGeom>
+            <a:noFill/>
+          </p:spPr>
+          <p:txBody>
+            <a:bodyPr wrap="none" rtlCol="0">
+              <a:spAutoFit/>
+            </a:bodyPr>
+            <a:lstStyle/>
+            <a:p>
+              <a:r>
+                <a:rPr lang="ko-KR" altLang="en-US" sz="1400" b="1" dirty="0" smtClean="0"/>
+                <a:t>라운드</a:t>
+              </a:r>
+              <a:endParaRPr lang="ko-KR" altLang="en-US" sz="1400" b="1" dirty="0"/>
+            </a:p>
+          </p:txBody>
+        </p:sp>
+        <p:sp>
+          <p:nvSpPr>
+            <p:cNvPr id="19" name="TextBox 18"/>
+            <p:cNvSpPr txBox="1"/>
+            <p:nvPr/>
+          </p:nvSpPr>
+          <p:spPr>
+            <a:xfrm>
+              <a:off x="11849395" y="5023380"/>
+              <a:ext cx="723275" cy="307777"/>
+            </a:xfrm>
+            <a:prstGeom prst="rect">
+              <a:avLst/>
+            </a:prstGeom>
+            <a:noFill/>
+          </p:spPr>
+          <p:txBody>
+            <a:bodyPr wrap="none" rtlCol="0">
+              <a:spAutoFit/>
+            </a:bodyPr>
+            <a:lstStyle/>
+            <a:p>
+              <a:r>
+                <a:rPr lang="ko-KR" altLang="en-US" sz="1400" b="1" dirty="0" smtClean="0"/>
+                <a:t>캐릭터</a:t>
+              </a:r>
+              <a:endParaRPr lang="ko-KR" altLang="en-US" sz="1400" b="1" dirty="0"/>
+            </a:p>
+          </p:txBody>
+        </p:sp>
+      </p:grpSp>
+    </p:spTree>
+    <p:extLst>
+      <p:ext uri="{BB962C8B-B14F-4D97-AF65-F5344CB8AC3E}">
+        <p14:creationId xmlns:p14="http://schemas.microsoft.com/office/powerpoint/2010/main" val="410126138"/>
       </p:ext>
     </p:extLst>
   </p:cSld>

--- a/LG_부트캠프_12기_C반_프로젝트일정_및_최종제출결과물_3팀/LG_부트캠프_12기_C반_최종결과물(3팀)/결과보고서/4.LG_부트캠프_12기_C반_결과보고서(3팀)_v1.pptx
+++ b/LG_부트캠프_12기_C반_프로젝트일정_및_최종제출결과물_3팀/LG_부트캠프_12기_C반_최종결과물(3팀)/결과보고서/4.LG_부트캠프_12기_C반_결과보고서(3팀)_v1.pptx
@@ -9872,7 +9872,103 @@
                   <a:schemeClr val="tx1"/>
                 </a:solidFill>
               </a:rPr>
-              <a:t>차 데모</a:t>
+              <a:t>차 </a:t>
+            </a:r>
+            <a:r>
+              <a:rPr lang="ko-KR" altLang="en-US" b="1" smtClean="0">
+                <a:solidFill>
+                  <a:schemeClr val="tx1"/>
+                </a:solidFill>
+              </a:rPr>
+              <a:t>데모</a:t>
+            </a:r>
+            <a:endParaRPr lang="en-US" altLang="ko-KR" b="1" dirty="0" smtClean="0">
+              <a:solidFill>
+                <a:schemeClr val="tx1"/>
+              </a:solidFill>
+            </a:endParaRPr>
+          </a:p>
+          <a:p>
+            <a:pPr marL="800100" lvl="1" indent="-342900">
+              <a:lnSpc>
+                <a:spcPct val="150000"/>
+              </a:lnSpc>
+              <a:buFontTx/>
+              <a:buChar char="-"/>
+            </a:pPr>
+            <a:r>
+              <a:rPr lang="ko-KR" altLang="en-US" b="1" dirty="0" smtClean="0">
+                <a:solidFill>
+                  <a:schemeClr val="tx1"/>
+                </a:solidFill>
+              </a:rPr>
+              <a:t>포스터</a:t>
+            </a:r>
+            <a:endParaRPr lang="en-US" altLang="ko-KR" b="1" dirty="0" smtClean="0">
+              <a:solidFill>
+                <a:schemeClr val="tx1"/>
+              </a:solidFill>
+            </a:endParaRPr>
+          </a:p>
+          <a:p>
+            <a:pPr marL="800100" lvl="1" indent="-342900">
+              <a:lnSpc>
+                <a:spcPct val="150000"/>
+              </a:lnSpc>
+              <a:buFontTx/>
+              <a:buChar char="-"/>
+            </a:pPr>
+            <a:r>
+              <a:rPr lang="ko-KR" altLang="en-US" b="1" dirty="0" smtClean="0">
+                <a:solidFill>
+                  <a:schemeClr val="tx1"/>
+                </a:solidFill>
+              </a:rPr>
+              <a:t>시연 영상</a:t>
+            </a:r>
+            <a:endParaRPr lang="en-US" altLang="ko-KR" b="1" dirty="0" smtClean="0">
+              <a:solidFill>
+                <a:schemeClr val="tx1"/>
+              </a:solidFill>
+            </a:endParaRPr>
+          </a:p>
+          <a:p>
+            <a:pPr marL="800100" lvl="1" indent="-342900">
+              <a:lnSpc>
+                <a:spcPct val="150000"/>
+              </a:lnSpc>
+              <a:buFontTx/>
+              <a:buChar char="-"/>
+            </a:pPr>
+            <a:r>
+              <a:rPr lang="ko-KR" altLang="en-US" b="1" dirty="0" smtClean="0">
+                <a:solidFill>
+                  <a:schemeClr val="tx1"/>
+                </a:solidFill>
+              </a:rPr>
+              <a:t>결과보고서</a:t>
+            </a:r>
+            <a:endParaRPr lang="en-US" altLang="ko-KR" b="1" dirty="0" smtClean="0">
+              <a:solidFill>
+                <a:schemeClr val="tx1"/>
+              </a:solidFill>
+            </a:endParaRPr>
+          </a:p>
+          <a:p>
+            <a:pPr marL="800100" lvl="1" indent="-342900">
+              <a:lnSpc>
+                <a:spcPct val="150000"/>
+              </a:lnSpc>
+              <a:buFontTx/>
+              <a:buChar char="-"/>
+            </a:pPr>
+            <a:r>
+              <a:rPr lang="ko-KR" altLang="en-US" b="1" smtClean="0">
+                <a:solidFill>
+                  <a:schemeClr val="tx1"/>
+                </a:solidFill>
+              </a:rPr>
+              <a:t>결과 파일</a:t>
             </a:r>
             <a:endParaRPr lang="en-US" altLang="ko-KR" b="1" dirty="0" smtClean="0">
               <a:solidFill>
@@ -9930,139 +10026,18 @@
       </p:sp>
       <p:grpSp>
         <p:nvGrpSpPr>
-          <p:cNvPr id="20" name="그룹 19"/>
+          <p:cNvPr id="6" name="그룹 5"/>
           <p:cNvGrpSpPr/>
           <p:nvPr/>
         </p:nvGrpSpPr>
         <p:grpSpPr>
           <a:xfrm>
-            <a:off x="1822813" y="3831739"/>
-            <a:ext cx="4655366" cy="3357592"/>
-            <a:chOff x="11739591" y="2631786"/>
-            <a:chExt cx="4655366" cy="3357592"/>
+            <a:off x="981732" y="6395112"/>
+            <a:ext cx="4686663" cy="3357592"/>
+            <a:chOff x="1791517" y="3831739"/>
+            <a:chExt cx="4686663" cy="3357592"/>
           </a:xfrm>
         </p:grpSpPr>
-        <p:sp>
-          <p:nvSpPr>
-            <p:cNvPr id="11" name="직사각형 10"/>
-            <p:cNvSpPr/>
-            <p:nvPr/>
-          </p:nvSpPr>
-          <p:spPr>
-            <a:xfrm>
-              <a:off x="12635344" y="3056708"/>
-              <a:ext cx="3759613" cy="2926080"/>
-            </a:xfrm>
-            <a:prstGeom prst="rect">
-              <a:avLst/>
-            </a:prstGeom>
-            <a:solidFill>
-              <a:schemeClr val="bg1"/>
-            </a:solidFill>
-            <a:ln w="28575">
-              <a:solidFill>
-                <a:schemeClr val="tx1"/>
-              </a:solidFill>
-            </a:ln>
-          </p:spPr>
-          <p:style>
-            <a:lnRef idx="2">
-              <a:schemeClr val="accent1">
-                <a:shade val="50000"/>
-              </a:schemeClr>
-            </a:lnRef>
-            <a:fillRef idx="1">
-              <a:schemeClr val="accent1"/>
-            </a:fillRef>
-            <a:effectRef idx="0">
-              <a:schemeClr val="accent1"/>
-            </a:effectRef>
-            <a:fontRef idx="minor">
-              <a:schemeClr val="lt1"/>
-            </a:fontRef>
-          </p:style>
-          <p:txBody>
-            <a:bodyPr rtlCol="0" anchor="ctr"/>
-            <a:lstStyle/>
-            <a:p>
-              <a:pPr algn="ctr"/>
-              <a:endParaRPr lang="ko-KR" altLang="en-US" b="1"/>
-            </a:p>
-          </p:txBody>
-        </p:sp>
-        <p:cxnSp>
-          <p:nvCxnSpPr>
-            <p:cNvPr id="12" name="직선 연결선 11"/>
-            <p:cNvCxnSpPr/>
-            <p:nvPr/>
-          </p:nvCxnSpPr>
-          <p:spPr>
-            <a:xfrm>
-              <a:off x="14435529" y="4513217"/>
-              <a:ext cx="0" cy="1476161"/>
-            </a:xfrm>
-            <a:prstGeom prst="line">
-              <a:avLst/>
-            </a:prstGeom>
-            <a:ln w="38100">
-              <a:solidFill>
-                <a:schemeClr val="tx1"/>
-              </a:solidFill>
-            </a:ln>
-          </p:spPr>
-          <p:style>
-            <a:lnRef idx="1">
-              <a:schemeClr val="accent1"/>
-            </a:lnRef>
-            <a:fillRef idx="0">
-              <a:schemeClr val="accent1"/>
-            </a:fillRef>
-            <a:effectRef idx="0">
-              <a:schemeClr val="accent1"/>
-            </a:effectRef>
-            <a:fontRef idx="minor">
-              <a:schemeClr val="tx1"/>
-            </a:fontRef>
-          </p:style>
-        </p:cxnSp>
-        <p:cxnSp>
-          <p:nvCxnSpPr>
-            <p:cNvPr id="13" name="직선 연결선 12"/>
-            <p:cNvCxnSpPr>
-              <a:stCxn id="11" idx="3"/>
-              <a:endCxn id="11" idx="1"/>
-            </p:cNvCxnSpPr>
-            <p:nvPr/>
-          </p:nvCxnSpPr>
-          <p:spPr>
-            <a:xfrm flipH="1">
-              <a:off x="12635344" y="4519748"/>
-              <a:ext cx="3759613" cy="0"/>
-            </a:xfrm>
-            <a:prstGeom prst="line">
-              <a:avLst/>
-            </a:prstGeom>
-            <a:ln w="38100">
-              <a:solidFill>
-                <a:schemeClr val="tx1"/>
-              </a:solidFill>
-            </a:ln>
-          </p:spPr>
-          <p:style>
-            <a:lnRef idx="1">
-              <a:schemeClr val="accent1"/>
-            </a:lnRef>
-            <a:fillRef idx="0">
-              <a:schemeClr val="accent1"/>
-            </a:fillRef>
-            <a:effectRef idx="0">
-              <a:schemeClr val="accent1"/>
-            </a:effectRef>
-            <a:fontRef idx="minor">
-              <a:schemeClr val="tx1"/>
-            </a:fontRef>
-          </p:style>
-        </p:cxnSp>
         <p:sp>
           <p:nvSpPr>
             <p:cNvPr id="7" name="TextBox 6"/>
@@ -10071,7 +10046,7 @@
           </p:nvSpPr>
           <p:spPr>
             <a:xfrm>
-              <a:off x="11849395" y="2631786"/>
+              <a:off x="1932617" y="3831739"/>
               <a:ext cx="1418978" cy="369332"/>
             </a:xfrm>
             <a:prstGeom prst="rect">
@@ -10101,278 +10076,449 @@
             </a:p>
           </p:txBody>
         </p:sp>
-        <p:sp>
-          <p:nvSpPr>
-            <p:cNvPr id="8" name="TextBox 7"/>
-            <p:cNvSpPr txBox="1"/>
+        <p:grpSp>
+          <p:nvGrpSpPr>
+            <p:cNvPr id="3" name="그룹 2"/>
+            <p:cNvGrpSpPr/>
             <p:nvPr/>
-          </p:nvSpPr>
+          </p:nvGrpSpPr>
+          <p:grpSpPr>
+            <a:xfrm>
+              <a:off x="1791517" y="4256661"/>
+              <a:ext cx="4686663" cy="2932670"/>
+              <a:chOff x="2701219" y="4256661"/>
+              <a:chExt cx="3776960" cy="2932670"/>
+            </a:xfrm>
+          </p:grpSpPr>
+          <p:sp>
+            <p:nvSpPr>
+              <p:cNvPr id="11" name="직사각형 10"/>
+              <p:cNvSpPr/>
+              <p:nvPr/>
+            </p:nvSpPr>
+            <p:spPr>
+              <a:xfrm>
+                <a:off x="2718566" y="4256661"/>
+                <a:ext cx="3759613" cy="2926080"/>
+              </a:xfrm>
+              <a:prstGeom prst="rect">
+                <a:avLst/>
+              </a:prstGeom>
+              <a:solidFill>
+                <a:schemeClr val="bg1"/>
+              </a:solidFill>
+              <a:ln w="28575">
+                <a:solidFill>
+                  <a:schemeClr val="tx1"/>
+                </a:solidFill>
+              </a:ln>
+            </p:spPr>
+            <p:style>
+              <a:lnRef idx="2">
+                <a:schemeClr val="accent1">
+                  <a:shade val="50000"/>
+                </a:schemeClr>
+              </a:lnRef>
+              <a:fillRef idx="1">
+                <a:schemeClr val="accent1"/>
+              </a:fillRef>
+              <a:effectRef idx="0">
+                <a:schemeClr val="accent1"/>
+              </a:effectRef>
+              <a:fontRef idx="minor">
+                <a:schemeClr val="lt1"/>
+              </a:fontRef>
+            </p:style>
+            <p:txBody>
+              <a:bodyPr rtlCol="0" anchor="ctr"/>
+              <a:lstStyle/>
+              <a:p>
+                <a:pPr algn="ctr"/>
+                <a:endParaRPr lang="ko-KR" altLang="en-US" b="1"/>
+              </a:p>
+            </p:txBody>
+          </p:sp>
+          <p:cxnSp>
+            <p:nvCxnSpPr>
+              <p:cNvPr id="12" name="직선 연결선 11"/>
+              <p:cNvCxnSpPr/>
+              <p:nvPr/>
+            </p:nvCxnSpPr>
+            <p:spPr>
+              <a:xfrm>
+                <a:off x="4432618" y="5998726"/>
+                <a:ext cx="0" cy="1190605"/>
+              </a:xfrm>
+              <a:prstGeom prst="line">
+                <a:avLst/>
+              </a:prstGeom>
+              <a:ln w="38100">
+                <a:solidFill>
+                  <a:schemeClr val="tx1"/>
+                </a:solidFill>
+              </a:ln>
+            </p:spPr>
+            <p:style>
+              <a:lnRef idx="1">
+                <a:schemeClr val="accent1"/>
+              </a:lnRef>
+              <a:fillRef idx="0">
+                <a:schemeClr val="accent1"/>
+              </a:fillRef>
+              <a:effectRef idx="0">
+                <a:schemeClr val="accent1"/>
+              </a:effectRef>
+              <a:fontRef idx="minor">
+                <a:schemeClr val="tx1"/>
+              </a:fontRef>
+            </p:style>
+          </p:cxnSp>
+          <p:cxnSp>
+            <p:nvCxnSpPr>
+              <p:cNvPr id="13" name="직선 연결선 12"/>
+              <p:cNvCxnSpPr>
+                <a:stCxn id="11" idx="3"/>
+                <a:endCxn id="11" idx="1"/>
+              </p:cNvCxnSpPr>
+              <p:nvPr/>
+            </p:nvCxnSpPr>
+            <p:spPr>
+              <a:xfrm flipH="1">
+                <a:off x="2718566" y="5719701"/>
+                <a:ext cx="3759613" cy="0"/>
+              </a:xfrm>
+              <a:prstGeom prst="line">
+                <a:avLst/>
+              </a:prstGeom>
+              <a:ln w="38100">
+                <a:solidFill>
+                  <a:schemeClr val="tx1"/>
+                </a:solidFill>
+              </a:ln>
+            </p:spPr>
+            <p:style>
+              <a:lnRef idx="1">
+                <a:schemeClr val="accent1"/>
+              </a:lnRef>
+              <a:fillRef idx="0">
+                <a:schemeClr val="accent1"/>
+              </a:fillRef>
+              <a:effectRef idx="0">
+                <a:schemeClr val="accent1"/>
+              </a:effectRef>
+              <a:fontRef idx="minor">
+                <a:schemeClr val="tx1"/>
+              </a:fontRef>
+            </p:style>
+          </p:cxnSp>
+          <p:sp>
+            <p:nvSpPr>
+              <p:cNvPr id="8" name="TextBox 7"/>
+              <p:cNvSpPr txBox="1"/>
+              <p:nvPr/>
+            </p:nvSpPr>
+            <p:spPr>
+              <a:xfrm>
+                <a:off x="3588167" y="4342784"/>
+                <a:ext cx="1194558" cy="307777"/>
+              </a:xfrm>
+              <a:prstGeom prst="rect">
+                <a:avLst/>
+              </a:prstGeom>
+              <a:noFill/>
+            </p:spPr>
+            <p:txBody>
+              <a:bodyPr wrap="none" rtlCol="0">
+                <a:spAutoFit/>
+              </a:bodyPr>
+              <a:lstStyle/>
+              <a:p>
+                <a:r>
+                  <a:rPr lang="ko-KR" altLang="en-US" sz="1400" b="1" dirty="0" smtClean="0"/>
+                  <a:t>출제자</a:t>
+                </a:r>
+                <a:r>
+                  <a:rPr lang="en-US" altLang="ko-KR" sz="1400" b="1" dirty="0"/>
+                  <a:t>(</a:t>
+                </a:r>
+                <a:r>
+                  <a:rPr lang="ko-KR" altLang="en-US" sz="1400" b="1" smtClean="0"/>
+                  <a:t>점수</a:t>
+                </a:r>
+                <a:r>
+                  <a:rPr lang="en-US" altLang="ko-KR" sz="1400" b="1" dirty="0" smtClean="0"/>
+                  <a:t>)</a:t>
+                </a:r>
+                <a:endParaRPr lang="ko-KR" altLang="en-US" sz="1400" b="1"/>
+              </a:p>
+            </p:txBody>
+          </p:sp>
+          <p:sp>
+            <p:nvSpPr>
+              <p:cNvPr id="9" name="TextBox 8"/>
+              <p:cNvSpPr txBox="1"/>
+              <p:nvPr/>
+            </p:nvSpPr>
+            <p:spPr>
+              <a:xfrm>
+                <a:off x="2982539" y="5998726"/>
+                <a:ext cx="1366080" cy="307777"/>
+              </a:xfrm>
+              <a:prstGeom prst="rect">
+                <a:avLst/>
+              </a:prstGeom>
+              <a:noFill/>
+            </p:spPr>
+            <p:txBody>
+              <a:bodyPr wrap="none" rtlCol="0">
+                <a:spAutoFit/>
+              </a:bodyPr>
+              <a:lstStyle/>
+              <a:p>
+                <a:r>
+                  <a:rPr lang="ko-KR" altLang="en-US" sz="1400" b="1" dirty="0" smtClean="0"/>
+                  <a:t>참가자 </a:t>
+                </a:r>
+                <a:r>
+                  <a:rPr lang="en-US" altLang="ko-KR" sz="1400" b="1" dirty="0" smtClean="0"/>
+                  <a:t>1</a:t>
+                </a:r>
+                <a:r>
+                  <a:rPr lang="en-US" altLang="ko-KR" sz="1400" b="1" dirty="0"/>
+                  <a:t> (</a:t>
+                </a:r>
+                <a:r>
+                  <a:rPr lang="ko-KR" altLang="en-US" sz="1400" b="1"/>
+                  <a:t>점수</a:t>
+                </a:r>
+                <a:r>
+                  <a:rPr lang="en-US" altLang="ko-KR" sz="1400" b="1" dirty="0"/>
+                  <a:t>)</a:t>
+                </a:r>
+                <a:endParaRPr lang="ko-KR" altLang="en-US" sz="1400" b="1" dirty="0"/>
+              </a:p>
+            </p:txBody>
+          </p:sp>
+          <p:sp>
+            <p:nvSpPr>
+              <p:cNvPr id="10" name="TextBox 9"/>
+              <p:cNvSpPr txBox="1"/>
+              <p:nvPr/>
+            </p:nvSpPr>
+            <p:spPr>
+              <a:xfrm>
+                <a:off x="4782725" y="5980386"/>
+                <a:ext cx="1366080" cy="307777"/>
+              </a:xfrm>
+              <a:prstGeom prst="rect">
+                <a:avLst/>
+              </a:prstGeom>
+              <a:noFill/>
+            </p:spPr>
+            <p:txBody>
+              <a:bodyPr wrap="none" rtlCol="0">
+                <a:spAutoFit/>
+              </a:bodyPr>
+              <a:lstStyle/>
+              <a:p>
+                <a:r>
+                  <a:rPr lang="ko-KR" altLang="en-US" sz="1400" b="1" dirty="0" smtClean="0"/>
+                  <a:t>참가자 </a:t>
+                </a:r>
+                <a:r>
+                  <a:rPr lang="en-US" altLang="ko-KR" sz="1400" b="1" dirty="0" smtClean="0"/>
+                  <a:t>2 </a:t>
+                </a:r>
+                <a:r>
+                  <a:rPr lang="en-US" altLang="ko-KR" sz="1400" b="1" dirty="0"/>
+                  <a:t>(</a:t>
+                </a:r>
+                <a:r>
+                  <a:rPr lang="ko-KR" altLang="en-US" sz="1400" b="1"/>
+                  <a:t>점수</a:t>
+                </a:r>
+                <a:r>
+                  <a:rPr lang="en-US" altLang="ko-KR" sz="1400" b="1" dirty="0"/>
+                  <a:t>)</a:t>
+                </a:r>
+                <a:endParaRPr lang="ko-KR" altLang="en-US" sz="1400" b="1" dirty="0"/>
+              </a:p>
+            </p:txBody>
+          </p:sp>
+          <p:sp>
+            <p:nvSpPr>
+              <p:cNvPr id="16" name="직사각형 15"/>
+              <p:cNvSpPr/>
+              <p:nvPr/>
+            </p:nvSpPr>
+            <p:spPr>
+              <a:xfrm>
+                <a:off x="2719009" y="4256662"/>
+                <a:ext cx="774889" cy="1469571"/>
+              </a:xfrm>
+              <a:prstGeom prst="rect">
+                <a:avLst/>
+              </a:prstGeom>
+              <a:solidFill>
+                <a:schemeClr val="bg1"/>
+              </a:solidFill>
+              <a:ln w="28575">
+                <a:solidFill>
+                  <a:schemeClr val="tx1"/>
+                </a:solidFill>
+              </a:ln>
+            </p:spPr>
+            <p:style>
+              <a:lnRef idx="2">
+                <a:schemeClr val="accent1">
+                  <a:shade val="50000"/>
+                </a:schemeClr>
+              </a:lnRef>
+              <a:fillRef idx="1">
+                <a:schemeClr val="accent1"/>
+              </a:fillRef>
+              <a:effectRef idx="0">
+                <a:schemeClr val="accent1"/>
+              </a:effectRef>
+              <a:fontRef idx="minor">
+                <a:schemeClr val="lt1"/>
+              </a:fontRef>
+            </p:style>
+            <p:txBody>
+              <a:bodyPr rtlCol="0" anchor="ctr"/>
+              <a:lstStyle/>
+              <a:p>
+                <a:pPr algn="ctr"/>
+                <a:endParaRPr lang="ko-KR" altLang="en-US" b="1"/>
+              </a:p>
+            </p:txBody>
+          </p:sp>
+          <p:sp>
+            <p:nvSpPr>
+              <p:cNvPr id="17" name="TextBox 16"/>
+              <p:cNvSpPr txBox="1"/>
+              <p:nvPr/>
+            </p:nvSpPr>
+            <p:spPr>
+              <a:xfrm>
+                <a:off x="2701219" y="5714460"/>
+                <a:ext cx="855681" cy="307777"/>
+              </a:xfrm>
+              <a:prstGeom prst="rect">
+                <a:avLst/>
+              </a:prstGeom>
+              <a:noFill/>
+            </p:spPr>
+            <p:txBody>
+              <a:bodyPr wrap="square" rtlCol="0">
+                <a:spAutoFit/>
+              </a:bodyPr>
+              <a:lstStyle/>
+              <a:p>
+                <a:r>
+                  <a:rPr lang="ko-KR" altLang="en-US" sz="1400" b="1" dirty="0" smtClean="0"/>
+                  <a:t>남은 시간</a:t>
+                </a:r>
+                <a:endParaRPr lang="ko-KR" altLang="en-US" sz="1400" b="1" dirty="0"/>
+              </a:p>
+            </p:txBody>
+          </p:sp>
+          <p:sp>
+            <p:nvSpPr>
+              <p:cNvPr id="18" name="TextBox 17"/>
+              <p:cNvSpPr txBox="1"/>
+              <p:nvPr/>
+            </p:nvSpPr>
+            <p:spPr>
+              <a:xfrm>
+                <a:off x="2809861" y="4430924"/>
+                <a:ext cx="723275" cy="307777"/>
+              </a:xfrm>
+              <a:prstGeom prst="rect">
+                <a:avLst/>
+              </a:prstGeom>
+              <a:noFill/>
+            </p:spPr>
+            <p:txBody>
+              <a:bodyPr wrap="none" rtlCol="0">
+                <a:spAutoFit/>
+              </a:bodyPr>
+              <a:lstStyle/>
+              <a:p>
+                <a:r>
+                  <a:rPr lang="ko-KR" altLang="en-US" sz="1400" b="1" dirty="0" smtClean="0"/>
+                  <a:t>라운드</a:t>
+                </a:r>
+                <a:endParaRPr lang="ko-KR" altLang="en-US" sz="1400" b="1" dirty="0"/>
+              </a:p>
+            </p:txBody>
+          </p:sp>
+          <p:sp>
+            <p:nvSpPr>
+              <p:cNvPr id="19" name="TextBox 18"/>
+              <p:cNvSpPr txBox="1"/>
+              <p:nvPr/>
+            </p:nvSpPr>
+            <p:spPr>
+              <a:xfrm>
+                <a:off x="2809861" y="5022931"/>
+                <a:ext cx="723275" cy="307777"/>
+              </a:xfrm>
+              <a:prstGeom prst="rect">
+                <a:avLst/>
+              </a:prstGeom>
+              <a:noFill/>
+            </p:spPr>
+            <p:txBody>
+              <a:bodyPr wrap="none" rtlCol="0">
+                <a:spAutoFit/>
+              </a:bodyPr>
+              <a:lstStyle/>
+              <a:p>
+                <a:r>
+                  <a:rPr lang="ko-KR" altLang="en-US" sz="1400" b="1" dirty="0" smtClean="0"/>
+                  <a:t>캐릭터</a:t>
+                </a:r>
+                <a:endParaRPr lang="ko-KR" altLang="en-US" sz="1400" b="1" dirty="0"/>
+              </a:p>
+            </p:txBody>
+          </p:sp>
+        </p:grpSp>
+        <p:cxnSp>
+          <p:nvCxnSpPr>
+            <p:cNvPr id="22" name="직선 연결선 21"/>
+            <p:cNvCxnSpPr/>
+            <p:nvPr/>
+          </p:nvCxnSpPr>
           <p:spPr>
-            <a:xfrm>
-              <a:off x="12729613" y="3151052"/>
-              <a:ext cx="1194558" cy="307777"/>
+            <a:xfrm flipH="1">
+              <a:off x="1803678" y="5980386"/>
+              <a:ext cx="4665138" cy="0"/>
             </a:xfrm>
-            <a:prstGeom prst="rect">
+            <a:prstGeom prst="line">
               <a:avLst/>
             </a:prstGeom>
-            <a:noFill/>
-          </p:spPr>
-          <p:txBody>
-            <a:bodyPr wrap="none" rtlCol="0">
-              <a:spAutoFit/>
-            </a:bodyPr>
-            <a:lstStyle/>
-            <a:p>
-              <a:r>
-                <a:rPr lang="ko-KR" altLang="en-US" sz="1400" b="1" dirty="0" smtClean="0"/>
-                <a:t>출제자</a:t>
-              </a:r>
-              <a:r>
-                <a:rPr lang="en-US" altLang="ko-KR" sz="1400" b="1" dirty="0"/>
-                <a:t>(</a:t>
-              </a:r>
-              <a:r>
-                <a:rPr lang="ko-KR" altLang="en-US" sz="1400" b="1" smtClean="0"/>
-                <a:t>점수</a:t>
-              </a:r>
-              <a:r>
-                <a:rPr lang="en-US" altLang="ko-KR" sz="1400" b="1" dirty="0" smtClean="0"/>
-                <a:t>)</a:t>
-              </a:r>
-              <a:endParaRPr lang="ko-KR" altLang="en-US" sz="1400" b="1"/>
-            </a:p>
-          </p:txBody>
-        </p:sp>
-        <p:sp>
-          <p:nvSpPr>
-            <p:cNvPr id="9" name="TextBox 8"/>
-            <p:cNvSpPr txBox="1"/>
-            <p:nvPr/>
-          </p:nvSpPr>
-          <p:spPr>
-            <a:xfrm>
-              <a:off x="12729613" y="4588179"/>
-              <a:ext cx="1366080" cy="307777"/>
-            </a:xfrm>
-            <a:prstGeom prst="rect">
-              <a:avLst/>
-            </a:prstGeom>
-            <a:noFill/>
-          </p:spPr>
-          <p:txBody>
-            <a:bodyPr wrap="none" rtlCol="0">
-              <a:spAutoFit/>
-            </a:bodyPr>
-            <a:lstStyle/>
-            <a:p>
-              <a:r>
-                <a:rPr lang="ko-KR" altLang="en-US" sz="1400" b="1" dirty="0" smtClean="0"/>
-                <a:t>참가자 </a:t>
-              </a:r>
-              <a:r>
-                <a:rPr lang="en-US" altLang="ko-KR" sz="1400" b="1" dirty="0" smtClean="0"/>
-                <a:t>1</a:t>
-              </a:r>
-              <a:r>
-                <a:rPr lang="en-US" altLang="ko-KR" sz="1400" b="1" dirty="0"/>
-                <a:t> (</a:t>
-              </a:r>
-              <a:r>
-                <a:rPr lang="ko-KR" altLang="en-US" sz="1400" b="1"/>
-                <a:t>점수</a:t>
-              </a:r>
-              <a:r>
-                <a:rPr lang="en-US" altLang="ko-KR" sz="1400" b="1" dirty="0"/>
-                <a:t>)</a:t>
-              </a:r>
-              <a:endParaRPr lang="ko-KR" altLang="en-US" sz="1400" b="1" dirty="0"/>
-            </a:p>
-          </p:txBody>
-        </p:sp>
-        <p:sp>
-          <p:nvSpPr>
-            <p:cNvPr id="10" name="TextBox 9"/>
-            <p:cNvSpPr txBox="1"/>
-            <p:nvPr/>
-          </p:nvSpPr>
-          <p:spPr>
-            <a:xfrm>
-              <a:off x="14529799" y="4569839"/>
-              <a:ext cx="1366080" cy="307777"/>
-            </a:xfrm>
-            <a:prstGeom prst="rect">
-              <a:avLst/>
-            </a:prstGeom>
-            <a:noFill/>
-          </p:spPr>
-          <p:txBody>
-            <a:bodyPr wrap="none" rtlCol="0">
-              <a:spAutoFit/>
-            </a:bodyPr>
-            <a:lstStyle/>
-            <a:p>
-              <a:r>
-                <a:rPr lang="ko-KR" altLang="en-US" sz="1400" b="1" dirty="0" smtClean="0"/>
-                <a:t>참가자 </a:t>
-              </a:r>
-              <a:r>
-                <a:rPr lang="en-US" altLang="ko-KR" sz="1400" b="1" dirty="0" smtClean="0"/>
-                <a:t>2 </a:t>
-              </a:r>
-              <a:r>
-                <a:rPr lang="en-US" altLang="ko-KR" sz="1400" b="1" dirty="0"/>
-                <a:t>(</a:t>
-              </a:r>
-              <a:r>
-                <a:rPr lang="ko-KR" altLang="en-US" sz="1400" b="1"/>
-                <a:t>점수</a:t>
-              </a:r>
-              <a:r>
-                <a:rPr lang="en-US" altLang="ko-KR" sz="1400" b="1" dirty="0"/>
-                <a:t>)</a:t>
-              </a:r>
-              <a:endParaRPr lang="ko-KR" altLang="en-US" sz="1400" b="1" dirty="0"/>
-            </a:p>
-          </p:txBody>
-        </p:sp>
-        <p:sp>
-          <p:nvSpPr>
-            <p:cNvPr id="16" name="직사각형 15"/>
-            <p:cNvSpPr/>
-            <p:nvPr/>
-          </p:nvSpPr>
-          <p:spPr>
-            <a:xfrm>
-              <a:off x="11758716" y="3056709"/>
-              <a:ext cx="876627" cy="2926080"/>
-            </a:xfrm>
-            <a:prstGeom prst="rect">
-              <a:avLst/>
-            </a:prstGeom>
-            <a:solidFill>
-              <a:schemeClr val="bg1"/>
-            </a:solidFill>
-            <a:ln w="28575">
+            <a:ln w="38100">
               <a:solidFill>
                 <a:schemeClr val="tx1"/>
               </a:solidFill>
             </a:ln>
           </p:spPr>
           <p:style>
-            <a:lnRef idx="2">
-              <a:schemeClr val="accent1">
-                <a:shade val="50000"/>
-              </a:schemeClr>
+            <a:lnRef idx="1">
+              <a:schemeClr val="accent1"/>
             </a:lnRef>
-            <a:fillRef idx="1">
+            <a:fillRef idx="0">
               <a:schemeClr val="accent1"/>
             </a:fillRef>
             <a:effectRef idx="0">
               <a:schemeClr val="accent1"/>
             </a:effectRef>
             <a:fontRef idx="minor">
-              <a:schemeClr val="lt1"/>
+              <a:schemeClr val="tx1"/>
             </a:fontRef>
           </p:style>
-          <p:txBody>
-            <a:bodyPr rtlCol="0" anchor="ctr"/>
-            <a:lstStyle/>
-            <a:p>
-              <a:pPr algn="ctr"/>
-              <a:endParaRPr lang="ko-KR" altLang="en-US" b="1"/>
-            </a:p>
-          </p:txBody>
-        </p:sp>
-        <p:sp>
-          <p:nvSpPr>
-            <p:cNvPr id="17" name="TextBox 16"/>
-            <p:cNvSpPr txBox="1"/>
-            <p:nvPr/>
-          </p:nvSpPr>
-          <p:spPr>
-            <a:xfrm>
-              <a:off x="11739591" y="3151052"/>
-              <a:ext cx="942887" cy="307777"/>
-            </a:xfrm>
-            <a:prstGeom prst="rect">
-              <a:avLst/>
-            </a:prstGeom>
-            <a:noFill/>
-          </p:spPr>
-          <p:txBody>
-            <a:bodyPr wrap="none" rtlCol="0">
-              <a:spAutoFit/>
-            </a:bodyPr>
-            <a:lstStyle/>
-            <a:p>
-              <a:r>
-                <a:rPr lang="ko-KR" altLang="en-US" sz="1400" b="1" dirty="0" smtClean="0"/>
-                <a:t>남은 시간</a:t>
-              </a:r>
-              <a:endParaRPr lang="ko-KR" altLang="en-US" sz="1400" b="1" dirty="0"/>
-            </a:p>
-          </p:txBody>
-        </p:sp>
-        <p:sp>
-          <p:nvSpPr>
-            <p:cNvPr id="18" name="TextBox 17"/>
-            <p:cNvSpPr txBox="1"/>
-            <p:nvPr/>
-          </p:nvSpPr>
-          <p:spPr>
-            <a:xfrm>
-              <a:off x="11849396" y="4056313"/>
-              <a:ext cx="723275" cy="307777"/>
-            </a:xfrm>
-            <a:prstGeom prst="rect">
-              <a:avLst/>
-            </a:prstGeom>
-            <a:noFill/>
-          </p:spPr>
-          <p:txBody>
-            <a:bodyPr wrap="none" rtlCol="0">
-              <a:spAutoFit/>
-            </a:bodyPr>
-            <a:lstStyle/>
-            <a:p>
-              <a:r>
-                <a:rPr lang="ko-KR" altLang="en-US" sz="1400" b="1" dirty="0" smtClean="0"/>
-                <a:t>라운드</a:t>
-              </a:r>
-              <a:endParaRPr lang="ko-KR" altLang="en-US" sz="1400" b="1" dirty="0"/>
-            </a:p>
-          </p:txBody>
-        </p:sp>
-        <p:sp>
-          <p:nvSpPr>
-            <p:cNvPr id="19" name="TextBox 18"/>
-            <p:cNvSpPr txBox="1"/>
-            <p:nvPr/>
-          </p:nvSpPr>
-          <p:spPr>
-            <a:xfrm>
-              <a:off x="11849395" y="5023380"/>
-              <a:ext cx="723275" cy="307777"/>
-            </a:xfrm>
-            <a:prstGeom prst="rect">
-              <a:avLst/>
-            </a:prstGeom>
-            <a:noFill/>
-          </p:spPr>
-          <p:txBody>
-            <a:bodyPr wrap="none" rtlCol="0">
-              <a:spAutoFit/>
-            </a:bodyPr>
-            <a:lstStyle/>
-            <a:p>
-              <a:r>
-                <a:rPr lang="ko-KR" altLang="en-US" sz="1400" b="1" dirty="0" smtClean="0"/>
-                <a:t>캐릭터</a:t>
-              </a:r>
-              <a:endParaRPr lang="ko-KR" altLang="en-US" sz="1400" b="1" dirty="0"/>
-            </a:p>
-          </p:txBody>
-        </p:sp>
+        </p:cxnSp>
       </p:grpSp>
     </p:spTree>
     <p:extLst>
